--- a/slides/Lecture_Reward_Engineering.pptx
+++ b/slides/Lecture_Reward_Engineering.pptx
@@ -165,7 +165,7 @@
 </file>
 
 <file path=ppt/diagrams/colors1.xml><?xml version="1.0" encoding="utf-8"?>
-<dgm:colorsDef xmlns:dgm="http://schemas.openxmlformats.org/drawingml/2006/diagram" xmlns:a="http://schemas.openxmlformats.org/drawingml/2006/main" uniqueId="urn:microsoft.com/office/officeart/2005/8/colors/colorful1">
+<dgm:colorsDef xmlns:dgm="http://schemas.openxmlformats.org/drawingml/2006/diagram" xmlns:a="http://schemas.openxmlformats.org/drawingml/2006/main" uniqueId="urn:microsoft.com/office/officeart/2005/8/colors/colorful1#1">
   <dgm:title val=""/>
   <dgm:desc val=""/>
   <dgm:catLst>
@@ -1087,7 +1087,7 @@
 <dgm:dataModel xmlns:dgm="http://schemas.openxmlformats.org/drawingml/2006/diagram" xmlns:a="http://schemas.openxmlformats.org/drawingml/2006/main">
   <dgm:ptLst>
     <dgm:pt modelId="{A3DF4AD9-7C31-49A4-B2A0-141140D6B1D8}" type="doc">
-      <dgm:prSet loTypeId="urn:microsoft.com/office/officeart/2005/8/layout/pyramid2" loCatId="pyramid" qsTypeId="urn:microsoft.com/office/officeart/2005/8/quickstyle/simple1" qsCatId="simple" csTypeId="urn:microsoft.com/office/officeart/2005/8/colors/colorful1" csCatId="colorful" phldr="1"/>
+      <dgm:prSet loTypeId="urn:microsoft.com/office/officeart/2005/8/layout/pyramid2" loCatId="pyramid" qsTypeId="urn:microsoft.com/office/officeart/2005/8/quickstyle/simple1#1" qsCatId="simple" csTypeId="urn:microsoft.com/office/officeart/2005/8/colors/colorful1#1" csCatId="colorful" phldr="1"/>
       <dgm:spPr/>
       <dgm:t>
         <a:bodyPr/>
@@ -1709,7 +1709,7 @@
 </file>
 
 <file path=ppt/diagrams/quickStyle1.xml><?xml version="1.0" encoding="utf-8"?>
-<dgm:styleDef xmlns:dgm="http://schemas.openxmlformats.org/drawingml/2006/diagram" xmlns:a="http://schemas.openxmlformats.org/drawingml/2006/main" uniqueId="urn:microsoft.com/office/officeart/2005/8/quickstyle/simple1">
+<dgm:styleDef xmlns:dgm="http://schemas.openxmlformats.org/drawingml/2006/diagram" xmlns:a="http://schemas.openxmlformats.org/drawingml/2006/main" uniqueId="urn:microsoft.com/office/officeart/2005/8/quickstyle/simple1#1">
   <dgm:title val=""/>
   <dgm:desc val=""/>
   <dgm:catLst>
@@ -2824,7 +2824,7 @@
           <a:p>
             <a:fld id="{2A92B22A-BE2A-43CB-B312-FF3A0A14567B}" type="datetimeFigureOut">
               <a:rPr lang="en-US" smtClean="0"/>
-              <a:t>7/6/2026</a:t>
+              <a:t>9/28/2026</a:t>
             </a:fld>
             <a:endParaRPr lang="en-US"/>
           </a:p>
@@ -3238,7 +3238,7 @@
           <a:p>
             <a:fld id="{3E22BF2E-04DA-469E-97C5-BB68A0368813}" type="datetimeFigureOut">
               <a:rPr lang="en-US" smtClean="0"/>
-              <a:t>7/6/2026</a:t>
+              <a:t>9/28/2026</a:t>
             </a:fld>
             <a:endParaRPr lang="en-US"/>
           </a:p>
@@ -3436,7 +3436,7 @@
           <a:p>
             <a:fld id="{3E22BF2E-04DA-469E-97C5-BB68A0368813}" type="datetimeFigureOut">
               <a:rPr lang="en-US" smtClean="0"/>
-              <a:t>7/6/2026</a:t>
+              <a:t>9/28/2026</a:t>
             </a:fld>
             <a:endParaRPr lang="en-US"/>
           </a:p>
@@ -3644,7 +3644,7 @@
           <a:p>
             <a:fld id="{3E22BF2E-04DA-469E-97C5-BB68A0368813}" type="datetimeFigureOut">
               <a:rPr lang="en-US" smtClean="0"/>
-              <a:t>7/6/2026</a:t>
+              <a:t>9/28/2026</a:t>
             </a:fld>
             <a:endParaRPr lang="en-US"/>
           </a:p>
@@ -3852,7 +3852,7 @@
           <a:p>
             <a:fld id="{3E22BF2E-04DA-469E-97C5-BB68A0368813}" type="datetimeFigureOut">
               <a:rPr lang="en-US" smtClean="0"/>
-              <a:t>7/6/2026</a:t>
+              <a:t>9/28/2026</a:t>
             </a:fld>
             <a:endParaRPr lang="en-US"/>
           </a:p>
@@ -4127,7 +4127,7 @@
           <a:p>
             <a:fld id="{3E22BF2E-04DA-469E-97C5-BB68A0368813}" type="datetimeFigureOut">
               <a:rPr lang="en-US" smtClean="0"/>
-              <a:t>7/6/2026</a:t>
+              <a:t>9/28/2026</a:t>
             </a:fld>
             <a:endParaRPr lang="en-US"/>
           </a:p>
@@ -4392,7 +4392,7 @@
           <a:p>
             <a:fld id="{3E22BF2E-04DA-469E-97C5-BB68A0368813}" type="datetimeFigureOut">
               <a:rPr lang="en-US" smtClean="0"/>
-              <a:t>7/6/2026</a:t>
+              <a:t>9/28/2026</a:t>
             </a:fld>
             <a:endParaRPr lang="en-US"/>
           </a:p>
@@ -4804,7 +4804,7 @@
           <a:p>
             <a:fld id="{3E22BF2E-04DA-469E-97C5-BB68A0368813}" type="datetimeFigureOut">
               <a:rPr lang="en-US" smtClean="0"/>
-              <a:t>7/6/2026</a:t>
+              <a:t>9/28/2026</a:t>
             </a:fld>
             <a:endParaRPr lang="en-US"/>
           </a:p>
@@ -4945,7 +4945,7 @@
           <a:p>
             <a:fld id="{3E22BF2E-04DA-469E-97C5-BB68A0368813}" type="datetimeFigureOut">
               <a:rPr lang="en-US" smtClean="0"/>
-              <a:t>7/6/2026</a:t>
+              <a:t>9/28/2026</a:t>
             </a:fld>
             <a:endParaRPr lang="en-US"/>
           </a:p>
@@ -5058,7 +5058,7 @@
           <a:p>
             <a:fld id="{3E22BF2E-04DA-469E-97C5-BB68A0368813}" type="datetimeFigureOut">
               <a:rPr lang="en-US" smtClean="0"/>
-              <a:t>7/6/2026</a:t>
+              <a:t>9/28/2026</a:t>
             </a:fld>
             <a:endParaRPr lang="en-US"/>
           </a:p>
@@ -5369,7 +5369,7 @@
           <a:p>
             <a:fld id="{3E22BF2E-04DA-469E-97C5-BB68A0368813}" type="datetimeFigureOut">
               <a:rPr lang="en-US" smtClean="0"/>
-              <a:t>7/6/2026</a:t>
+              <a:t>9/28/2026</a:t>
             </a:fld>
             <a:endParaRPr lang="en-US"/>
           </a:p>
@@ -5657,7 +5657,7 @@
           <a:p>
             <a:fld id="{3E22BF2E-04DA-469E-97C5-BB68A0368813}" type="datetimeFigureOut">
               <a:rPr lang="en-US" smtClean="0"/>
-              <a:t>7/6/2026</a:t>
+              <a:t>9/28/2026</a:t>
             </a:fld>
             <a:endParaRPr lang="en-US"/>
           </a:p>
@@ -5898,7 +5898,7 @@
           <a:p>
             <a:fld id="{3E22BF2E-04DA-469E-97C5-BB68A0368813}" type="datetimeFigureOut">
               <a:rPr lang="en-US" smtClean="0"/>
-              <a:t>7/6/2026</a:t>
+              <a:t>9/28/2026</a:t>
             </a:fld>
             <a:endParaRPr lang="en-US"/>
           </a:p>
@@ -7065,8 +7065,8 @@
           </a:p>
         </p:txBody>
       </p:sp>
-      <mc:AlternateContent xmlns:mc="http://schemas.openxmlformats.org/markup-compatibility/2006" xmlns:a14="http://schemas.microsoft.com/office/drawing/2010/main">
-        <mc:Choice Requires="a14">
+      <mc:AlternateContent xmlns:mc="http://schemas.openxmlformats.org/markup-compatibility/2006">
+        <mc:Choice xmlns:a14="http://schemas.microsoft.com/office/drawing/2010/main" Requires="a14">
           <p:sp>
             <p:nvSpPr>
               <p:cNvPr id="3" name="Content Placeholder 2">
@@ -7085,8 +7085,8 @@
             </p:nvSpPr>
             <p:spPr>
               <a:xfrm>
-                <a:off x="838201" y="1397331"/>
-                <a:ext cx="7405360" cy="4546270"/>
+                <a:off x="838201" y="1195754"/>
+                <a:ext cx="7405360" cy="4747847"/>
               </a:xfrm>
             </p:spPr>
             <p:txBody>
@@ -7312,13 +7312,13 @@
                 </a:r>
                 <a:r>
                   <a:rPr lang="en-US" dirty="0"/>
-                  <a:t>: “Noisy TV problem” agent gets trapped by the reward for staring at a static-filled, always changing unlearnable TV screen! Caused by state descriptions which contain highly stochastic elements.</a:t>
+                  <a:t>: “Noisy TV problem” : the agent gets trapped by the reward for staring at a static-filled, always-changing, unlearnable TV screen! Caused by state descriptions which contain highly stochastic elements.</a:t>
                 </a:r>
               </a:p>
             </p:txBody>
           </p:sp>
         </mc:Choice>
-        <mc:Fallback xmlns="">
+        <mc:Fallback>
           <p:sp>
             <p:nvSpPr>
               <p:cNvPr id="3" name="Content Placeholder 2">
@@ -7337,13 +7337,13 @@
             </p:nvSpPr>
             <p:spPr>
               <a:xfrm>
-                <a:off x="838201" y="1397331"/>
-                <a:ext cx="7405360" cy="4546270"/>
+                <a:off x="838201" y="1195754"/>
+                <a:ext cx="7405360" cy="4747847"/>
               </a:xfrm>
               <a:blipFill>
                 <a:blip r:embed="rId2"/>
                 <a:stretch>
-                  <a:fillRect l="-577" t="-2011" b="-1206"/>
+                  <a:fillRect l="-577" t="-1926" b="-899"/>
                 </a:stretch>
               </a:blipFill>
             </p:spPr>
@@ -7889,6 +7889,227 @@
   <p:clrMapOvr>
     <a:masterClrMapping/>
   </p:clrMapOvr>
+  <p:timing>
+    <p:tnLst>
+      <p:par>
+        <p:cTn id="1" dur="indefinite" restart="never" nodeType="tmRoot">
+          <p:childTnLst>
+            <p:seq concurrent="1" nextAc="seek">
+              <p:cTn id="2" dur="indefinite" nodeType="mainSeq">
+                <p:childTnLst>
+                  <p:par>
+                    <p:cTn id="3" fill="hold">
+                      <p:stCondLst>
+                        <p:cond delay="indefinite"/>
+                      </p:stCondLst>
+                      <p:childTnLst>
+                        <p:par>
+                          <p:cTn id="4" fill="hold">
+                            <p:stCondLst>
+                              <p:cond delay="0"/>
+                            </p:stCondLst>
+                            <p:childTnLst>
+                              <p:par>
+                                <p:cTn id="5" presetID="1" presetClass="entr" presetSubtype="0" fill="hold" nodeType="clickEffect">
+                                  <p:stCondLst>
+                                    <p:cond delay="0"/>
+                                  </p:stCondLst>
+                                  <p:childTnLst>
+                                    <p:set>
+                                      <p:cBhvr>
+                                        <p:cTn id="6" dur="1" fill="hold">
+                                          <p:stCondLst>
+                                            <p:cond delay="0"/>
+                                          </p:stCondLst>
+                                        </p:cTn>
+                                        <p:tgtEl>
+                                          <p:spTgt spid="3">
+                                            <p:txEl>
+                                              <p:pRg st="5" end="5"/>
+                                            </p:txEl>
+                                          </p:spTgt>
+                                        </p:tgtEl>
+                                        <p:attrNameLst>
+                                          <p:attrName>style.visibility</p:attrName>
+                                        </p:attrNameLst>
+                                      </p:cBhvr>
+                                      <p:to>
+                                        <p:strVal val="visible"/>
+                                      </p:to>
+                                    </p:set>
+                                  </p:childTnLst>
+                                </p:cTn>
+                              </p:par>
+                              <p:par>
+                                <p:cTn id="7" presetID="1" presetClass="entr" presetSubtype="0" fill="hold" nodeType="withEffect">
+                                  <p:stCondLst>
+                                    <p:cond delay="0"/>
+                                  </p:stCondLst>
+                                  <p:childTnLst>
+                                    <p:set>
+                                      <p:cBhvr>
+                                        <p:cTn id="8" dur="1" fill="hold">
+                                          <p:stCondLst>
+                                            <p:cond delay="0"/>
+                                          </p:stCondLst>
+                                        </p:cTn>
+                                        <p:tgtEl>
+                                          <p:spTgt spid="3">
+                                            <p:txEl>
+                                              <p:pRg st="6" end="6"/>
+                                            </p:txEl>
+                                          </p:spTgt>
+                                        </p:tgtEl>
+                                        <p:attrNameLst>
+                                          <p:attrName>style.visibility</p:attrName>
+                                        </p:attrNameLst>
+                                      </p:cBhvr>
+                                      <p:to>
+                                        <p:strVal val="visible"/>
+                                      </p:to>
+                                    </p:set>
+                                  </p:childTnLst>
+                                </p:cTn>
+                              </p:par>
+                              <p:par>
+                                <p:cTn id="9" presetID="1" presetClass="entr" presetSubtype="0" fill="hold" nodeType="withEffect">
+                                  <p:stCondLst>
+                                    <p:cond delay="0"/>
+                                  </p:stCondLst>
+                                  <p:childTnLst>
+                                    <p:set>
+                                      <p:cBhvr>
+                                        <p:cTn id="10" dur="1" fill="hold">
+                                          <p:stCondLst>
+                                            <p:cond delay="0"/>
+                                          </p:stCondLst>
+                                        </p:cTn>
+                                        <p:tgtEl>
+                                          <p:spTgt spid="3">
+                                            <p:txEl>
+                                              <p:pRg st="7" end="7"/>
+                                            </p:txEl>
+                                          </p:spTgt>
+                                        </p:tgtEl>
+                                        <p:attrNameLst>
+                                          <p:attrName>style.visibility</p:attrName>
+                                        </p:attrNameLst>
+                                      </p:cBhvr>
+                                      <p:to>
+                                        <p:strVal val="visible"/>
+                                      </p:to>
+                                    </p:set>
+                                  </p:childTnLst>
+                                </p:cTn>
+                              </p:par>
+                              <p:par>
+                                <p:cTn id="11" presetID="1" presetClass="entr" presetSubtype="0" fill="hold" nodeType="withEffect">
+                                  <p:stCondLst>
+                                    <p:cond delay="0"/>
+                                  </p:stCondLst>
+                                  <p:childTnLst>
+                                    <p:set>
+                                      <p:cBhvr>
+                                        <p:cTn id="12" dur="1" fill="hold">
+                                          <p:stCondLst>
+                                            <p:cond delay="0"/>
+                                          </p:stCondLst>
+                                        </p:cTn>
+                                        <p:tgtEl>
+                                          <p:spTgt spid="3">
+                                            <p:txEl>
+                                              <p:pRg st="8" end="8"/>
+                                            </p:txEl>
+                                          </p:spTgt>
+                                        </p:tgtEl>
+                                        <p:attrNameLst>
+                                          <p:attrName>style.visibility</p:attrName>
+                                        </p:attrNameLst>
+                                      </p:cBhvr>
+                                      <p:to>
+                                        <p:strVal val="visible"/>
+                                      </p:to>
+                                    </p:set>
+                                  </p:childTnLst>
+                                </p:cTn>
+                              </p:par>
+                            </p:childTnLst>
+                          </p:cTn>
+                        </p:par>
+                      </p:childTnLst>
+                    </p:cTn>
+                  </p:par>
+                  <p:par>
+                    <p:cTn id="13" fill="hold">
+                      <p:stCondLst>
+                        <p:cond delay="indefinite"/>
+                      </p:stCondLst>
+                      <p:childTnLst>
+                        <p:par>
+                          <p:cTn id="14" fill="hold">
+                            <p:stCondLst>
+                              <p:cond delay="0"/>
+                            </p:stCondLst>
+                            <p:childTnLst>
+                              <p:par>
+                                <p:cTn id="15" presetID="1" presetClass="entr" presetSubtype="0" fill="hold" nodeType="clickEffect">
+                                  <p:stCondLst>
+                                    <p:cond delay="0"/>
+                                  </p:stCondLst>
+                                  <p:childTnLst>
+                                    <p:set>
+                                      <p:cBhvr>
+                                        <p:cTn id="16" dur="1" fill="hold">
+                                          <p:stCondLst>
+                                            <p:cond delay="0"/>
+                                          </p:stCondLst>
+                                        </p:cTn>
+                                        <p:tgtEl>
+                                          <p:spTgt spid="3">
+                                            <p:txEl>
+                                              <p:pRg st="10" end="10"/>
+                                            </p:txEl>
+                                          </p:spTgt>
+                                        </p:tgtEl>
+                                        <p:attrNameLst>
+                                          <p:attrName>style.visibility</p:attrName>
+                                        </p:attrNameLst>
+                                      </p:cBhvr>
+                                      <p:to>
+                                        <p:strVal val="visible"/>
+                                      </p:to>
+                                    </p:set>
+                                  </p:childTnLst>
+                                </p:cTn>
+                              </p:par>
+                            </p:childTnLst>
+                          </p:cTn>
+                        </p:par>
+                      </p:childTnLst>
+                    </p:cTn>
+                  </p:par>
+                </p:childTnLst>
+              </p:cTn>
+              <p:prevCondLst>
+                <p:cond evt="onPrev" delay="0">
+                  <p:tgtEl>
+                    <p:sldTgt/>
+                  </p:tgtEl>
+                </p:cond>
+              </p:prevCondLst>
+              <p:nextCondLst>
+                <p:cond evt="onNext" delay="0">
+                  <p:tgtEl>
+                    <p:sldTgt/>
+                  </p:tgtEl>
+                </p:cond>
+              </p:nextCondLst>
+            </p:seq>
+          </p:childTnLst>
+        </p:cTn>
+      </p:par>
+    </p:tnLst>
+  </p:timing>
 </p:sld>
 </file>
 
@@ -7937,8 +8158,8 @@
           </a:p>
         </p:txBody>
       </p:sp>
-      <mc:AlternateContent xmlns:mc="http://schemas.openxmlformats.org/markup-compatibility/2006" xmlns:a14="http://schemas.microsoft.com/office/drawing/2010/main">
-        <mc:Choice Requires="a14">
+      <mc:AlternateContent xmlns:mc="http://schemas.openxmlformats.org/markup-compatibility/2006">
+        <mc:Choice xmlns:a14="http://schemas.microsoft.com/office/drawing/2010/main" Requires="a14">
           <p:sp>
             <p:nvSpPr>
               <p:cNvPr id="3" name="Content Placeholder 2">
@@ -7963,7 +8184,7 @@
             </p:spPr>
             <p:txBody>
               <a:bodyPr>
-                <a:normAutofit fontScale="55000" lnSpcReduction="20000"/>
+                <a:normAutofit fontScale="62500" lnSpcReduction="20000"/>
               </a:bodyPr>
               <a:lstStyle/>
               <a:p>
@@ -8175,7 +8396,7 @@
                         <m:begChr m:val="["/>
                         <m:endChr m:val="]"/>
                         <m:ctrlPr>
-                          <a:rPr lang="en-US" i="1" smtClean="0">
+                          <a:rPr lang="en-US" b="0" i="1" smtClean="0">
                             <a:latin typeface="Cambria Math" panose="02040503050406030204" pitchFamily="18" charset="0"/>
                             <a:ea typeface="Cambria Math" panose="02040503050406030204" pitchFamily="18" charset="0"/>
                           </a:rPr>
@@ -8375,7 +8596,7 @@
                                 <m:begChr m:val="|"/>
                                 <m:endChr m:val=""/>
                                 <m:ctrlPr>
-                                  <a:rPr lang="en-US" b="0" i="1" smtClean="0">
+                                  <a:rPr lang="en-US" i="1">
                                     <a:latin typeface="Cambria Math" panose="02040503050406030204" pitchFamily="18" charset="0"/>
                                     <a:ea typeface="Cambria Math" panose="02040503050406030204" pitchFamily="18" charset="0"/>
                                   </a:rPr>
@@ -8635,7 +8856,7 @@
                                 <m:begChr m:val="|"/>
                                 <m:endChr m:val=""/>
                                 <m:ctrlPr>
-                                  <a:rPr lang="en-US" i="1" smtClean="0">
+                                  <a:rPr lang="en-US" b="0" i="1" smtClean="0">
                                     <a:latin typeface="Cambria Math" panose="02040503050406030204" pitchFamily="18" charset="0"/>
                                     <a:ea typeface="Cambria Math" panose="02040503050406030204" pitchFamily="18" charset="0"/>
                                   </a:rPr>
@@ -8685,8 +8906,6 @@
                   <a:rPr lang="en-US" dirty="0"/>
                   <a:t>: The problem is “underspecified.” For any given action, there are potentially infinite reward functions that could explain it. Therefore, IRL algorithms usually find the "most likely" or simplest reward function (using regularization) that fits the data.</a:t>
                 </a:r>
-              </a:p>
-              <a:p>
                 <a:endParaRPr lang="en-US" b="1" dirty="0"/>
               </a:p>
               <a:p>
@@ -8773,7 +8992,7 @@
             </p:txBody>
           </p:sp>
         </mc:Choice>
-        <mc:Fallback xmlns="">
+        <mc:Fallback>
           <p:sp>
             <p:nvSpPr>
               <p:cNvPr id="3" name="Content Placeholder 2">
@@ -8798,7 +9017,7 @@
               <a:blipFill>
                 <a:blip r:embed="rId2"/>
                 <a:stretch>
-                  <a:fillRect l="-116" t="-1269"/>
+                  <a:fillRect l="-348" t="-1904" b="-1523"/>
                 </a:stretch>
               </a:blipFill>
             </p:spPr>
@@ -8831,7 +9050,7 @@
         </p:nvSpPr>
         <p:spPr>
           <a:xfrm>
-            <a:off x="9104585" y="2180103"/>
+            <a:off x="9264019" y="2330159"/>
             <a:ext cx="2038205" cy="523220"/>
           </a:xfrm>
           <a:prstGeom prst="rect">
@@ -8991,8 +9210,8 @@
         </p:blipFill>
         <p:spPr>
           <a:xfrm>
-            <a:off x="6080232" y="3481873"/>
-            <a:ext cx="5567510" cy="2509026"/>
+            <a:off x="6649328" y="3738339"/>
+            <a:ext cx="4998413" cy="2252560"/>
           </a:xfrm>
           <a:prstGeom prst="rect">
             <a:avLst/>
@@ -9009,6 +9228,227 @@
   <p:clrMapOvr>
     <a:masterClrMapping/>
   </p:clrMapOvr>
+  <p:timing>
+    <p:tnLst>
+      <p:par>
+        <p:cTn id="1" dur="indefinite" restart="never" nodeType="tmRoot">
+          <p:childTnLst>
+            <p:seq concurrent="1" nextAc="seek">
+              <p:cTn id="2" dur="indefinite" nodeType="mainSeq">
+                <p:childTnLst>
+                  <p:par>
+                    <p:cTn id="3" fill="hold">
+                      <p:stCondLst>
+                        <p:cond delay="indefinite"/>
+                      </p:stCondLst>
+                      <p:childTnLst>
+                        <p:par>
+                          <p:cTn id="4" fill="hold">
+                            <p:stCondLst>
+                              <p:cond delay="0"/>
+                            </p:stCondLst>
+                            <p:childTnLst>
+                              <p:par>
+                                <p:cTn id="5" presetID="1" presetClass="entr" presetSubtype="0" fill="hold" nodeType="clickEffect">
+                                  <p:stCondLst>
+                                    <p:cond delay="0"/>
+                                  </p:stCondLst>
+                                  <p:childTnLst>
+                                    <p:set>
+                                      <p:cBhvr>
+                                        <p:cTn id="6" dur="1" fill="hold">
+                                          <p:stCondLst>
+                                            <p:cond delay="0"/>
+                                          </p:stCondLst>
+                                        </p:cTn>
+                                        <p:tgtEl>
+                                          <p:spTgt spid="3">
+                                            <p:txEl>
+                                              <p:pRg st="4" end="4"/>
+                                            </p:txEl>
+                                          </p:spTgt>
+                                        </p:tgtEl>
+                                        <p:attrNameLst>
+                                          <p:attrName>style.visibility</p:attrName>
+                                        </p:attrNameLst>
+                                      </p:cBhvr>
+                                      <p:to>
+                                        <p:strVal val="visible"/>
+                                      </p:to>
+                                    </p:set>
+                                  </p:childTnLst>
+                                </p:cTn>
+                              </p:par>
+                            </p:childTnLst>
+                          </p:cTn>
+                        </p:par>
+                      </p:childTnLst>
+                    </p:cTn>
+                  </p:par>
+                  <p:par>
+                    <p:cTn id="7" fill="hold">
+                      <p:stCondLst>
+                        <p:cond delay="indefinite"/>
+                      </p:stCondLst>
+                      <p:childTnLst>
+                        <p:par>
+                          <p:cTn id="8" fill="hold">
+                            <p:stCondLst>
+                              <p:cond delay="0"/>
+                            </p:stCondLst>
+                            <p:childTnLst>
+                              <p:par>
+                                <p:cTn id="9" presetID="1" presetClass="entr" presetSubtype="0" fill="hold" nodeType="clickEffect">
+                                  <p:stCondLst>
+                                    <p:cond delay="0"/>
+                                  </p:stCondLst>
+                                  <p:childTnLst>
+                                    <p:set>
+                                      <p:cBhvr>
+                                        <p:cTn id="10" dur="1" fill="hold">
+                                          <p:stCondLst>
+                                            <p:cond delay="0"/>
+                                          </p:stCondLst>
+                                        </p:cTn>
+                                        <p:tgtEl>
+                                          <p:spTgt spid="3">
+                                            <p:txEl>
+                                              <p:pRg st="5" end="5"/>
+                                            </p:txEl>
+                                          </p:spTgt>
+                                        </p:tgtEl>
+                                        <p:attrNameLst>
+                                          <p:attrName>style.visibility</p:attrName>
+                                        </p:attrNameLst>
+                                      </p:cBhvr>
+                                      <p:to>
+                                        <p:strVal val="visible"/>
+                                      </p:to>
+                                    </p:set>
+                                  </p:childTnLst>
+                                </p:cTn>
+                              </p:par>
+                              <p:par>
+                                <p:cTn id="11" presetID="1" presetClass="entr" presetSubtype="0" fill="hold" nodeType="withEffect">
+                                  <p:stCondLst>
+                                    <p:cond delay="0"/>
+                                  </p:stCondLst>
+                                  <p:childTnLst>
+                                    <p:set>
+                                      <p:cBhvr>
+                                        <p:cTn id="12" dur="1" fill="hold">
+                                          <p:stCondLst>
+                                            <p:cond delay="0"/>
+                                          </p:stCondLst>
+                                        </p:cTn>
+                                        <p:tgtEl>
+                                          <p:spTgt spid="3">
+                                            <p:txEl>
+                                              <p:pRg st="6" end="6"/>
+                                            </p:txEl>
+                                          </p:spTgt>
+                                        </p:tgtEl>
+                                        <p:attrNameLst>
+                                          <p:attrName>style.visibility</p:attrName>
+                                        </p:attrNameLst>
+                                      </p:cBhvr>
+                                      <p:to>
+                                        <p:strVal val="visible"/>
+                                      </p:to>
+                                    </p:set>
+                                  </p:childTnLst>
+                                </p:cTn>
+                              </p:par>
+                              <p:par>
+                                <p:cTn id="13" presetID="1" presetClass="entr" presetSubtype="0" fill="hold" nodeType="withEffect">
+                                  <p:stCondLst>
+                                    <p:cond delay="0"/>
+                                  </p:stCondLst>
+                                  <p:childTnLst>
+                                    <p:set>
+                                      <p:cBhvr>
+                                        <p:cTn id="14" dur="1" fill="hold">
+                                          <p:stCondLst>
+                                            <p:cond delay="0"/>
+                                          </p:stCondLst>
+                                        </p:cTn>
+                                        <p:tgtEl>
+                                          <p:spTgt spid="3">
+                                            <p:txEl>
+                                              <p:pRg st="7" end="7"/>
+                                            </p:txEl>
+                                          </p:spTgt>
+                                        </p:tgtEl>
+                                        <p:attrNameLst>
+                                          <p:attrName>style.visibility</p:attrName>
+                                        </p:attrNameLst>
+                                      </p:cBhvr>
+                                      <p:to>
+                                        <p:strVal val="visible"/>
+                                      </p:to>
+                                    </p:set>
+                                  </p:childTnLst>
+                                </p:cTn>
+                              </p:par>
+                              <p:par>
+                                <p:cTn id="15" presetID="1" presetClass="entr" presetSubtype="0" fill="hold" nodeType="withEffect">
+                                  <p:stCondLst>
+                                    <p:cond delay="0"/>
+                                  </p:stCondLst>
+                                  <p:childTnLst>
+                                    <p:set>
+                                      <p:cBhvr>
+                                        <p:cTn id="16" dur="1" fill="hold">
+                                          <p:stCondLst>
+                                            <p:cond delay="0"/>
+                                          </p:stCondLst>
+                                        </p:cTn>
+                                        <p:tgtEl>
+                                          <p:spTgt spid="3">
+                                            <p:txEl>
+                                              <p:pRg st="8" end="8"/>
+                                            </p:txEl>
+                                          </p:spTgt>
+                                        </p:tgtEl>
+                                        <p:attrNameLst>
+                                          <p:attrName>style.visibility</p:attrName>
+                                        </p:attrNameLst>
+                                      </p:cBhvr>
+                                      <p:to>
+                                        <p:strVal val="visible"/>
+                                      </p:to>
+                                    </p:set>
+                                  </p:childTnLst>
+                                </p:cTn>
+                              </p:par>
+                            </p:childTnLst>
+                          </p:cTn>
+                        </p:par>
+                      </p:childTnLst>
+                    </p:cTn>
+                  </p:par>
+                </p:childTnLst>
+              </p:cTn>
+              <p:prevCondLst>
+                <p:cond evt="onPrev" delay="0">
+                  <p:tgtEl>
+                    <p:sldTgt/>
+                  </p:tgtEl>
+                </p:cond>
+              </p:prevCondLst>
+              <p:nextCondLst>
+                <p:cond evt="onNext" delay="0">
+                  <p:tgtEl>
+                    <p:sldTgt/>
+                  </p:tgtEl>
+                </p:cond>
+              </p:nextCondLst>
+            </p:seq>
+          </p:childTnLst>
+        </p:cTn>
+      </p:par>
+    </p:tnLst>
+  </p:timing>
 </p:sld>
 </file>
 
@@ -11629,7 +12069,7 @@
             </a:r>
             <a:r>
               <a:rPr lang="en-US" dirty="0"/>
-              <a:t>: Typically have direct and near immediate feedback.</a:t>
+              <a:t>: Typically have direct and near-immediate feedback that can be used as reward.</a:t>
             </a:r>
           </a:p>
           <a:p>
@@ -11646,11 +12086,11 @@
             <a:pPr lvl="1"/>
             <a:r>
               <a:rPr lang="en-US" b="1" dirty="0"/>
-              <a:t>Sparse rewards </a:t>
+              <a:t>Sparse rewards: </a:t>
             </a:r>
             <a:r>
               <a:rPr lang="en-US" dirty="0"/>
-              <a:t>(e.g., only when a game is won). Leads to slow learning, excessive exploration, credit assignment problem.</a:t>
+              <a:t>E.g., only when a game is won. Leads to slow learning, excessive exploration, and the credit assignment problem.</a:t>
             </a:r>
           </a:p>
           <a:p>
@@ -11744,6 +12184,350 @@
   <p:clrMapOvr>
     <a:masterClrMapping/>
   </p:clrMapOvr>
+  <p:timing>
+    <p:tnLst>
+      <p:par>
+        <p:cTn id="1" dur="indefinite" restart="never" nodeType="tmRoot">
+          <p:childTnLst>
+            <p:seq concurrent="1" nextAc="seek">
+              <p:cTn id="2" dur="indefinite" nodeType="mainSeq">
+                <p:childTnLst>
+                  <p:par>
+                    <p:cTn id="3" fill="hold">
+                      <p:stCondLst>
+                        <p:cond delay="indefinite"/>
+                      </p:stCondLst>
+                      <p:childTnLst>
+                        <p:par>
+                          <p:cTn id="4" fill="hold">
+                            <p:stCondLst>
+                              <p:cond delay="0"/>
+                            </p:stCondLst>
+                            <p:childTnLst>
+                              <p:par>
+                                <p:cTn id="5" presetID="1" presetClass="entr" presetSubtype="0" fill="hold" nodeType="clickEffect">
+                                  <p:stCondLst>
+                                    <p:cond delay="0"/>
+                                  </p:stCondLst>
+                                  <p:childTnLst>
+                                    <p:set>
+                                      <p:cBhvr>
+                                        <p:cTn id="6" dur="1" fill="hold">
+                                          <p:stCondLst>
+                                            <p:cond delay="0"/>
+                                          </p:stCondLst>
+                                        </p:cTn>
+                                        <p:tgtEl>
+                                          <p:spTgt spid="3">
+                                            <p:txEl>
+                                              <p:pRg st="4" end="4"/>
+                                            </p:txEl>
+                                          </p:spTgt>
+                                        </p:tgtEl>
+                                        <p:attrNameLst>
+                                          <p:attrName>style.visibility</p:attrName>
+                                        </p:attrNameLst>
+                                      </p:cBhvr>
+                                      <p:to>
+                                        <p:strVal val="visible"/>
+                                      </p:to>
+                                    </p:set>
+                                  </p:childTnLst>
+                                </p:cTn>
+                              </p:par>
+                              <p:par>
+                                <p:cTn id="7" presetID="1" presetClass="entr" presetSubtype="0" fill="hold" nodeType="withEffect">
+                                  <p:stCondLst>
+                                    <p:cond delay="0"/>
+                                  </p:stCondLst>
+                                  <p:childTnLst>
+                                    <p:set>
+                                      <p:cBhvr>
+                                        <p:cTn id="8" dur="1" fill="hold">
+                                          <p:stCondLst>
+                                            <p:cond delay="0"/>
+                                          </p:stCondLst>
+                                        </p:cTn>
+                                        <p:tgtEl>
+                                          <p:spTgt spid="3">
+                                            <p:txEl>
+                                              <p:pRg st="5" end="5"/>
+                                            </p:txEl>
+                                          </p:spTgt>
+                                        </p:tgtEl>
+                                        <p:attrNameLst>
+                                          <p:attrName>style.visibility</p:attrName>
+                                        </p:attrNameLst>
+                                      </p:cBhvr>
+                                      <p:to>
+                                        <p:strVal val="visible"/>
+                                      </p:to>
+                                    </p:set>
+                                  </p:childTnLst>
+                                </p:cTn>
+                              </p:par>
+                              <p:par>
+                                <p:cTn id="9" presetID="1" presetClass="entr" presetSubtype="0" fill="hold" nodeType="withEffect">
+                                  <p:stCondLst>
+                                    <p:cond delay="0"/>
+                                  </p:stCondLst>
+                                  <p:childTnLst>
+                                    <p:set>
+                                      <p:cBhvr>
+                                        <p:cTn id="10" dur="1" fill="hold">
+                                          <p:stCondLst>
+                                            <p:cond delay="0"/>
+                                          </p:stCondLst>
+                                        </p:cTn>
+                                        <p:tgtEl>
+                                          <p:spTgt spid="3">
+                                            <p:txEl>
+                                              <p:pRg st="6" end="6"/>
+                                            </p:txEl>
+                                          </p:spTgt>
+                                        </p:tgtEl>
+                                        <p:attrNameLst>
+                                          <p:attrName>style.visibility</p:attrName>
+                                        </p:attrNameLst>
+                                      </p:cBhvr>
+                                      <p:to>
+                                        <p:strVal val="visible"/>
+                                      </p:to>
+                                    </p:set>
+                                  </p:childTnLst>
+                                </p:cTn>
+                              </p:par>
+                              <p:par>
+                                <p:cTn id="11" presetID="1" presetClass="entr" presetSubtype="0" fill="hold" grpId="0" nodeType="withEffect">
+                                  <p:stCondLst>
+                                    <p:cond delay="0"/>
+                                  </p:stCondLst>
+                                  <p:childTnLst>
+                                    <p:set>
+                                      <p:cBhvr>
+                                        <p:cTn id="12" dur="1" fill="hold">
+                                          <p:stCondLst>
+                                            <p:cond delay="0"/>
+                                          </p:stCondLst>
+                                        </p:cTn>
+                                        <p:tgtEl>
+                                          <p:spTgt spid="4"/>
+                                        </p:tgtEl>
+                                        <p:attrNameLst>
+                                          <p:attrName>style.visibility</p:attrName>
+                                        </p:attrNameLst>
+                                      </p:cBhvr>
+                                      <p:to>
+                                        <p:strVal val="visible"/>
+                                      </p:to>
+                                    </p:set>
+                                  </p:childTnLst>
+                                </p:cTn>
+                              </p:par>
+                            </p:childTnLst>
+                          </p:cTn>
+                        </p:par>
+                      </p:childTnLst>
+                    </p:cTn>
+                  </p:par>
+                  <p:par>
+                    <p:cTn id="13" fill="hold">
+                      <p:stCondLst>
+                        <p:cond delay="indefinite"/>
+                      </p:stCondLst>
+                      <p:childTnLst>
+                        <p:par>
+                          <p:cTn id="14" fill="hold">
+                            <p:stCondLst>
+                              <p:cond delay="0"/>
+                            </p:stCondLst>
+                            <p:childTnLst>
+                              <p:par>
+                                <p:cTn id="15" presetID="1" presetClass="entr" presetSubtype="0" fill="hold" nodeType="clickEffect">
+                                  <p:stCondLst>
+                                    <p:cond delay="0"/>
+                                  </p:stCondLst>
+                                  <p:childTnLst>
+                                    <p:set>
+                                      <p:cBhvr>
+                                        <p:cTn id="16" dur="1" fill="hold">
+                                          <p:stCondLst>
+                                            <p:cond delay="0"/>
+                                          </p:stCondLst>
+                                        </p:cTn>
+                                        <p:tgtEl>
+                                          <p:spTgt spid="3">
+                                            <p:txEl>
+                                              <p:pRg st="8" end="8"/>
+                                            </p:txEl>
+                                          </p:spTgt>
+                                        </p:tgtEl>
+                                        <p:attrNameLst>
+                                          <p:attrName>style.visibility</p:attrName>
+                                        </p:attrNameLst>
+                                      </p:cBhvr>
+                                      <p:to>
+                                        <p:strVal val="visible"/>
+                                      </p:to>
+                                    </p:set>
+                                  </p:childTnLst>
+                                </p:cTn>
+                              </p:par>
+                              <p:par>
+                                <p:cTn id="17" presetID="1" presetClass="entr" presetSubtype="0" fill="hold" nodeType="withEffect">
+                                  <p:stCondLst>
+                                    <p:cond delay="0"/>
+                                  </p:stCondLst>
+                                  <p:childTnLst>
+                                    <p:set>
+                                      <p:cBhvr>
+                                        <p:cTn id="18" dur="1" fill="hold">
+                                          <p:stCondLst>
+                                            <p:cond delay="0"/>
+                                          </p:stCondLst>
+                                        </p:cTn>
+                                        <p:tgtEl>
+                                          <p:spTgt spid="3">
+                                            <p:txEl>
+                                              <p:pRg st="9" end="9"/>
+                                            </p:txEl>
+                                          </p:spTgt>
+                                        </p:tgtEl>
+                                        <p:attrNameLst>
+                                          <p:attrName>style.visibility</p:attrName>
+                                        </p:attrNameLst>
+                                      </p:cBhvr>
+                                      <p:to>
+                                        <p:strVal val="visible"/>
+                                      </p:to>
+                                    </p:set>
+                                  </p:childTnLst>
+                                </p:cTn>
+                              </p:par>
+                              <p:par>
+                                <p:cTn id="19" presetID="1" presetClass="entr" presetSubtype="0" fill="hold" nodeType="withEffect">
+                                  <p:stCondLst>
+                                    <p:cond delay="0"/>
+                                  </p:stCondLst>
+                                  <p:childTnLst>
+                                    <p:set>
+                                      <p:cBhvr>
+                                        <p:cTn id="20" dur="1" fill="hold">
+                                          <p:stCondLst>
+                                            <p:cond delay="0"/>
+                                          </p:stCondLst>
+                                        </p:cTn>
+                                        <p:tgtEl>
+                                          <p:spTgt spid="3">
+                                            <p:txEl>
+                                              <p:pRg st="10" end="10"/>
+                                            </p:txEl>
+                                          </p:spTgt>
+                                        </p:tgtEl>
+                                        <p:attrNameLst>
+                                          <p:attrName>style.visibility</p:attrName>
+                                        </p:attrNameLst>
+                                      </p:cBhvr>
+                                      <p:to>
+                                        <p:strVal val="visible"/>
+                                      </p:to>
+                                    </p:set>
+                                  </p:childTnLst>
+                                </p:cTn>
+                              </p:par>
+                              <p:par>
+                                <p:cTn id="21" presetID="1" presetClass="entr" presetSubtype="0" fill="hold" nodeType="withEffect">
+                                  <p:stCondLst>
+                                    <p:cond delay="0"/>
+                                  </p:stCondLst>
+                                  <p:childTnLst>
+                                    <p:set>
+                                      <p:cBhvr>
+                                        <p:cTn id="22" dur="1" fill="hold">
+                                          <p:stCondLst>
+                                            <p:cond delay="0"/>
+                                          </p:stCondLst>
+                                        </p:cTn>
+                                        <p:tgtEl>
+                                          <p:spTgt spid="3">
+                                            <p:txEl>
+                                              <p:pRg st="11" end="11"/>
+                                            </p:txEl>
+                                          </p:spTgt>
+                                        </p:tgtEl>
+                                        <p:attrNameLst>
+                                          <p:attrName>style.visibility</p:attrName>
+                                        </p:attrNameLst>
+                                      </p:cBhvr>
+                                      <p:to>
+                                        <p:strVal val="visible"/>
+                                      </p:to>
+                                    </p:set>
+                                  </p:childTnLst>
+                                </p:cTn>
+                              </p:par>
+                              <p:par>
+                                <p:cTn id="23" presetID="1" presetClass="entr" presetSubtype="0" fill="hold" nodeType="withEffect">
+                                  <p:stCondLst>
+                                    <p:cond delay="0"/>
+                                  </p:stCondLst>
+                                  <p:childTnLst>
+                                    <p:set>
+                                      <p:cBhvr>
+                                        <p:cTn id="24" dur="1" fill="hold">
+                                          <p:stCondLst>
+                                            <p:cond delay="0"/>
+                                          </p:stCondLst>
+                                        </p:cTn>
+                                        <p:tgtEl>
+                                          <p:spTgt spid="3">
+                                            <p:txEl>
+                                              <p:pRg st="12" end="12"/>
+                                            </p:txEl>
+                                          </p:spTgt>
+                                        </p:tgtEl>
+                                        <p:attrNameLst>
+                                          <p:attrName>style.visibility</p:attrName>
+                                        </p:attrNameLst>
+                                      </p:cBhvr>
+                                      <p:to>
+                                        <p:strVal val="visible"/>
+                                      </p:to>
+                                    </p:set>
+                                  </p:childTnLst>
+                                </p:cTn>
+                              </p:par>
+                            </p:childTnLst>
+                          </p:cTn>
+                        </p:par>
+                      </p:childTnLst>
+                    </p:cTn>
+                  </p:par>
+                </p:childTnLst>
+              </p:cTn>
+              <p:prevCondLst>
+                <p:cond evt="onPrev" delay="0">
+                  <p:tgtEl>
+                    <p:sldTgt/>
+                  </p:tgtEl>
+                </p:cond>
+              </p:prevCondLst>
+              <p:nextCondLst>
+                <p:cond evt="onNext" delay="0">
+                  <p:tgtEl>
+                    <p:sldTgt/>
+                  </p:tgtEl>
+                </p:cond>
+              </p:nextCondLst>
+            </p:seq>
+          </p:childTnLst>
+        </p:cTn>
+      </p:par>
+    </p:tnLst>
+    <p:bldLst>
+      <p:bldP spid="4" grpId="0" animBg="1"/>
+    </p:bldLst>
+  </p:timing>
 </p:sld>
 </file>
 
@@ -11792,8 +12576,8 @@
           </a:p>
         </p:txBody>
       </p:sp>
-      <mc:AlternateContent xmlns:mc="http://schemas.openxmlformats.org/markup-compatibility/2006" xmlns:a14="http://schemas.microsoft.com/office/drawing/2010/main">
-        <mc:Choice Requires="a14">
+      <mc:AlternateContent xmlns:mc="http://schemas.openxmlformats.org/markup-compatibility/2006">
+        <mc:Choice xmlns:a14="http://schemas.microsoft.com/office/drawing/2010/main" Requires="a14">
           <p:sp>
             <p:nvSpPr>
               <p:cNvPr id="3" name="Content Placeholder 2">
@@ -11919,7 +12703,7 @@
               <a:p>
                 <a:r>
                   <a:rPr lang="en-US" dirty="0"/>
-                  <a:t>The reward used for learning is then</a:t>
+                  <a:t>The reward used for learning is</a:t>
                 </a:r>
                 <a:br>
                   <a:rPr lang="en-US" dirty="0"/>
@@ -12074,7 +12858,7 @@
                 </a:r>
                 <a:r>
                   <a:rPr lang="en-US" dirty="0"/>
-                  <a:t>: Exploit loophole in reward structure.</a:t>
+                  <a:t>: Exploit a loophole in the reward structure.</a:t>
                 </a:r>
               </a:p>
               <a:p>
@@ -12102,7 +12886,7 @@
             </p:txBody>
           </p:sp>
         </mc:Choice>
-        <mc:Fallback xmlns="">
+        <mc:Fallback>
           <p:sp>
             <p:nvSpPr>
               <p:cNvPr id="3" name="Content Placeholder 2">
@@ -12286,10 +13070,7 @@
                       <a:pPr/>
                       <a14:m>
                         <m:oMathPara xmlns:m="http://schemas.openxmlformats.org/officeDocument/2006/math">
-                          <m:oMathParaPr>
-                            <m:jc m:val="centerGroup"/>
-                          </m:oMathParaPr>
-                          <m:oMath xmlns:m="http://schemas.openxmlformats.org/officeDocument/2006/math">
+                          <m:oMath>
                             <m:sSub>
                               <m:sSubPr>
                                 <m:ctrlPr>
@@ -12414,14 +13195,11 @@
                       <a:pPr/>
                       <a14:m>
                         <m:oMathPara xmlns:m="http://schemas.openxmlformats.org/officeDocument/2006/math">
-                          <m:oMathParaPr>
-                            <m:jc m:val="centerGroup"/>
-                          </m:oMathParaPr>
-                          <m:oMath xmlns:m="http://schemas.openxmlformats.org/officeDocument/2006/math">
+                          <m:oMath>
                             <m:sSub>
                               <m:sSubPr>
                                 <m:ctrlPr>
-                                  <a:rPr lang="en-US" b="0" i="1" dirty="0" smtClean="0">
+                                  <a:rPr lang="en-US" i="1" dirty="0" smtClean="0">
                                     <a:solidFill>
                                       <a:srgbClr val="FF0000"/>
                                     </a:solidFill>
@@ -12538,10 +13316,7 @@
                       <a:pPr/>
                       <a14:m>
                         <m:oMathPara xmlns:m="http://schemas.openxmlformats.org/officeDocument/2006/math">
-                          <m:oMathParaPr>
-                            <m:jc m:val="centerGroup"/>
-                          </m:oMathParaPr>
-                          <m:oMath xmlns:m="http://schemas.openxmlformats.org/officeDocument/2006/math">
+                          <m:oMath>
                             <m:sSub>
                               <m:sSubPr>
                                 <m:ctrlPr>
@@ -12705,7 +13480,7 @@
                       <m:sSubSup>
                         <m:sSubSupPr>
                           <m:ctrlPr>
-                            <a:rPr lang="en-US" i="1" dirty="0" smtClean="0">
+                            <a:rPr lang="en-US" b="0" i="1" dirty="0" smtClean="0">
                               <a:solidFill>
                                 <a:schemeClr val="tx1"/>
                               </a:solidFill>
@@ -12839,10 +13614,7 @@
                   <a:pPr/>
                   <a14:m>
                     <m:oMathPara xmlns:m="http://schemas.openxmlformats.org/officeDocument/2006/math">
-                      <m:oMathParaPr>
-                        <m:jc m:val="centerGroup"/>
-                      </m:oMathParaPr>
-                      <m:oMath xmlns:m="http://schemas.openxmlformats.org/officeDocument/2006/math">
+                      <m:oMath>
                         <m:sSub>
                           <m:sSubPr>
                             <m:ctrlPr>
@@ -13098,10 +13870,7 @@
                 <a:pPr/>
                 <a14:m>
                   <m:oMathPara xmlns:m="http://schemas.openxmlformats.org/officeDocument/2006/math">
-                    <m:oMathParaPr>
-                      <m:jc m:val="centerGroup"/>
-                    </m:oMathParaPr>
-                    <m:oMath xmlns:m="http://schemas.openxmlformats.org/officeDocument/2006/math">
+                    <m:oMath>
                       <m:sSubSup>
                         <m:sSubSupPr>
                           <m:ctrlPr>
@@ -13248,10 +14017,7 @@
                 <a:pPr algn="ctr"/>
                 <a14:m>
                   <m:oMathPara xmlns:m="http://schemas.openxmlformats.org/officeDocument/2006/math">
-                    <m:oMathParaPr>
-                      <m:jc m:val="centerGroup"/>
-                    </m:oMathParaPr>
-                    <m:oMath xmlns:m="http://schemas.openxmlformats.org/officeDocument/2006/math">
+                    <m:oMath>
                       <m:sSubSup>
                         <m:sSubSupPr>
                           <m:ctrlPr>
@@ -13364,6 +14130,258 @@
   <p:clrMapOvr>
     <a:masterClrMapping/>
   </p:clrMapOvr>
+  <p:timing>
+    <p:tnLst>
+      <p:par>
+        <p:cTn id="1" dur="indefinite" restart="never" nodeType="tmRoot">
+          <p:childTnLst>
+            <p:seq concurrent="1" nextAc="seek">
+              <p:cTn id="2" dur="indefinite" nodeType="mainSeq">
+                <p:childTnLst>
+                  <p:par>
+                    <p:cTn id="3" fill="hold">
+                      <p:stCondLst>
+                        <p:cond delay="indefinite"/>
+                      </p:stCondLst>
+                      <p:childTnLst>
+                        <p:par>
+                          <p:cTn id="4" fill="hold">
+                            <p:stCondLst>
+                              <p:cond delay="0"/>
+                            </p:stCondLst>
+                            <p:childTnLst>
+                              <p:par>
+                                <p:cTn id="5" presetID="1" presetClass="entr" presetSubtype="0" fill="hold" nodeType="clickEffect">
+                                  <p:stCondLst>
+                                    <p:cond delay="0"/>
+                                  </p:stCondLst>
+                                  <p:childTnLst>
+                                    <p:set>
+                                      <p:cBhvr>
+                                        <p:cTn id="6" dur="1" fill="hold">
+                                          <p:stCondLst>
+                                            <p:cond delay="0"/>
+                                          </p:stCondLst>
+                                        </p:cTn>
+                                        <p:tgtEl>
+                                          <p:spTgt spid="3">
+                                            <p:txEl>
+                                              <p:pRg st="5" end="5"/>
+                                            </p:txEl>
+                                          </p:spTgt>
+                                        </p:tgtEl>
+                                        <p:attrNameLst>
+                                          <p:attrName>style.visibility</p:attrName>
+                                        </p:attrNameLst>
+                                      </p:cBhvr>
+                                      <p:to>
+                                        <p:strVal val="visible"/>
+                                      </p:to>
+                                    </p:set>
+                                  </p:childTnLst>
+                                </p:cTn>
+                              </p:par>
+                            </p:childTnLst>
+                          </p:cTn>
+                        </p:par>
+                      </p:childTnLst>
+                    </p:cTn>
+                  </p:par>
+                  <p:par>
+                    <p:cTn id="7" fill="hold">
+                      <p:stCondLst>
+                        <p:cond delay="indefinite"/>
+                      </p:stCondLst>
+                      <p:childTnLst>
+                        <p:par>
+                          <p:cTn id="8" fill="hold">
+                            <p:stCondLst>
+                              <p:cond delay="0"/>
+                            </p:stCondLst>
+                            <p:childTnLst>
+                              <p:par>
+                                <p:cTn id="9" presetID="1" presetClass="entr" presetSubtype="0" fill="hold" nodeType="clickEffect">
+                                  <p:stCondLst>
+                                    <p:cond delay="0"/>
+                                  </p:stCondLst>
+                                  <p:childTnLst>
+                                    <p:set>
+                                      <p:cBhvr>
+                                        <p:cTn id="10" dur="1" fill="hold">
+                                          <p:stCondLst>
+                                            <p:cond delay="0"/>
+                                          </p:stCondLst>
+                                        </p:cTn>
+                                        <p:tgtEl>
+                                          <p:spTgt spid="3">
+                                            <p:txEl>
+                                              <p:pRg st="7" end="7"/>
+                                            </p:txEl>
+                                          </p:spTgt>
+                                        </p:tgtEl>
+                                        <p:attrNameLst>
+                                          <p:attrName>style.visibility</p:attrName>
+                                        </p:attrNameLst>
+                                      </p:cBhvr>
+                                      <p:to>
+                                        <p:strVal val="visible"/>
+                                      </p:to>
+                                    </p:set>
+                                  </p:childTnLst>
+                                </p:cTn>
+                              </p:par>
+                              <p:par>
+                                <p:cTn id="11" presetID="1" presetClass="entr" presetSubtype="0" fill="hold" nodeType="withEffect">
+                                  <p:stCondLst>
+                                    <p:cond delay="0"/>
+                                  </p:stCondLst>
+                                  <p:childTnLst>
+                                    <p:set>
+                                      <p:cBhvr>
+                                        <p:cTn id="12" dur="1" fill="hold">
+                                          <p:stCondLst>
+                                            <p:cond delay="0"/>
+                                          </p:stCondLst>
+                                        </p:cTn>
+                                        <p:tgtEl>
+                                          <p:spTgt spid="3">
+                                            <p:txEl>
+                                              <p:pRg st="8" end="8"/>
+                                            </p:txEl>
+                                          </p:spTgt>
+                                        </p:tgtEl>
+                                        <p:attrNameLst>
+                                          <p:attrName>style.visibility</p:attrName>
+                                        </p:attrNameLst>
+                                      </p:cBhvr>
+                                      <p:to>
+                                        <p:strVal val="visible"/>
+                                      </p:to>
+                                    </p:set>
+                                  </p:childTnLst>
+                                </p:cTn>
+                              </p:par>
+                              <p:par>
+                                <p:cTn id="13" presetID="1" presetClass="entr" presetSubtype="0" fill="hold" nodeType="withEffect">
+                                  <p:stCondLst>
+                                    <p:cond delay="0"/>
+                                  </p:stCondLst>
+                                  <p:childTnLst>
+                                    <p:set>
+                                      <p:cBhvr>
+                                        <p:cTn id="14" dur="1" fill="hold">
+                                          <p:stCondLst>
+                                            <p:cond delay="0"/>
+                                          </p:stCondLst>
+                                        </p:cTn>
+                                        <p:tgtEl>
+                                          <p:spTgt spid="3">
+                                            <p:txEl>
+                                              <p:pRg st="9" end="9"/>
+                                            </p:txEl>
+                                          </p:spTgt>
+                                        </p:tgtEl>
+                                        <p:attrNameLst>
+                                          <p:attrName>style.visibility</p:attrName>
+                                        </p:attrNameLst>
+                                      </p:cBhvr>
+                                      <p:to>
+                                        <p:strVal val="visible"/>
+                                      </p:to>
+                                    </p:set>
+                                  </p:childTnLst>
+                                </p:cTn>
+                              </p:par>
+                              <p:par>
+                                <p:cTn id="15" presetID="1" presetClass="entr" presetSubtype="0" fill="hold" nodeType="withEffect">
+                                  <p:stCondLst>
+                                    <p:cond delay="0"/>
+                                  </p:stCondLst>
+                                  <p:childTnLst>
+                                    <p:set>
+                                      <p:cBhvr>
+                                        <p:cTn id="16" dur="1" fill="hold">
+                                          <p:stCondLst>
+                                            <p:cond delay="0"/>
+                                          </p:stCondLst>
+                                        </p:cTn>
+                                        <p:tgtEl>
+                                          <p:spTgt spid="3">
+                                            <p:txEl>
+                                              <p:pRg st="10" end="10"/>
+                                            </p:txEl>
+                                          </p:spTgt>
+                                        </p:tgtEl>
+                                        <p:attrNameLst>
+                                          <p:attrName>style.visibility</p:attrName>
+                                        </p:attrNameLst>
+                                      </p:cBhvr>
+                                      <p:to>
+                                        <p:strVal val="visible"/>
+                                      </p:to>
+                                    </p:set>
+                                  </p:childTnLst>
+                                </p:cTn>
+                              </p:par>
+                              <p:par>
+                                <p:cTn id="17" presetID="1" presetClass="entr" presetSubtype="0" fill="hold" nodeType="withEffect">
+                                  <p:stCondLst>
+                                    <p:cond delay="0"/>
+                                  </p:stCondLst>
+                                  <p:childTnLst>
+                                    <p:set>
+                                      <p:cBhvr>
+                                        <p:cTn id="18" dur="1" fill="hold">
+                                          <p:stCondLst>
+                                            <p:cond delay="0"/>
+                                          </p:stCondLst>
+                                        </p:cTn>
+                                        <p:tgtEl>
+                                          <p:spTgt spid="3">
+                                            <p:txEl>
+                                              <p:pRg st="11" end="11"/>
+                                            </p:txEl>
+                                          </p:spTgt>
+                                        </p:tgtEl>
+                                        <p:attrNameLst>
+                                          <p:attrName>style.visibility</p:attrName>
+                                        </p:attrNameLst>
+                                      </p:cBhvr>
+                                      <p:to>
+                                        <p:strVal val="visible"/>
+                                      </p:to>
+                                    </p:set>
+                                  </p:childTnLst>
+                                </p:cTn>
+                              </p:par>
+                            </p:childTnLst>
+                          </p:cTn>
+                        </p:par>
+                      </p:childTnLst>
+                    </p:cTn>
+                  </p:par>
+                </p:childTnLst>
+              </p:cTn>
+              <p:prevCondLst>
+                <p:cond evt="onPrev" delay="0">
+                  <p:tgtEl>
+                    <p:sldTgt/>
+                  </p:tgtEl>
+                </p:cond>
+              </p:prevCondLst>
+              <p:nextCondLst>
+                <p:cond evt="onNext" delay="0">
+                  <p:tgtEl>
+                    <p:sldTgt/>
+                  </p:tgtEl>
+                </p:cond>
+              </p:nextCondLst>
+            </p:seq>
+          </p:childTnLst>
+        </p:cTn>
+      </p:par>
+    </p:tnLst>
+  </p:timing>
 </p:sld>
 </file>
 
@@ -13552,18 +14570,63 @@
         </p:nvSpPr>
         <p:spPr>
           <a:xfrm>
-            <a:off x="1524000" y="4159404"/>
-            <a:ext cx="9144000" cy="1098395"/>
+            <a:off x="3409070" y="4159404"/>
+            <a:ext cx="7258929" cy="1098395"/>
           </a:xfrm>
         </p:spPr>
         <p:txBody>
           <a:bodyPr vert="horz" lIns="91440" tIns="45720" rIns="91440" bIns="45720" rtlCol="0">
-            <a:normAutofit/>
+            <a:normAutofit fontScale="92500" lnSpcReduction="20000"/>
           </a:bodyPr>
           <a:lstStyle/>
           <a:p>
-            <a:pPr algn="ctr"/>
-            <a:endParaRPr lang="en-US">
+            <a:pPr marL="342900" indent="-342900">
+              <a:buFont typeface="Arial" panose="020B0604020202020204" pitchFamily="34" charset="0"/>
+              <a:buChar char="•"/>
+            </a:pPr>
+            <a:r>
+              <a:rPr lang="en-US" dirty="0">
+                <a:solidFill>
+                  <a:srgbClr val="FFFFFF"/>
+                </a:solidFill>
+              </a:rPr>
+              <a:t>Potential-based Reward Shaping</a:t>
+            </a:r>
+          </a:p>
+          <a:p>
+            <a:pPr marL="342900" indent="-342900">
+              <a:buFont typeface="Arial" panose="020B0604020202020204" pitchFamily="34" charset="0"/>
+              <a:buChar char="•"/>
+            </a:pPr>
+            <a:r>
+              <a:rPr lang="en-US" dirty="0">
+                <a:solidFill>
+                  <a:srgbClr val="FFFFFF"/>
+                </a:solidFill>
+              </a:rPr>
+              <a:t>Immediate Milestone Rewards</a:t>
+            </a:r>
+          </a:p>
+          <a:p>
+            <a:pPr marL="342900" indent="-342900">
+              <a:buFont typeface="Arial" panose="020B0604020202020204" pitchFamily="34" charset="0"/>
+              <a:buChar char="•"/>
+            </a:pPr>
+            <a:r>
+              <a:rPr lang="en-US" dirty="0">
+                <a:solidFill>
+                  <a:srgbClr val="FFFFFF"/>
+                </a:solidFill>
+              </a:rPr>
+              <a:t>Intrinsic Motivation</a:t>
+            </a:r>
+          </a:p>
+          <a:p>
+            <a:pPr marL="342900" indent="-342900">
+              <a:buFont typeface="Arial" panose="020B0604020202020204" pitchFamily="34" charset="0"/>
+              <a:buChar char="•"/>
+            </a:pPr>
+            <a:endParaRPr lang="en-US" dirty="0">
               <a:solidFill>
                 <a:srgbClr val="FFFFFF"/>
               </a:solidFill>
@@ -13629,8 +14692,8 @@
           </a:p>
         </p:txBody>
       </p:sp>
-      <mc:AlternateContent xmlns:mc="http://schemas.openxmlformats.org/markup-compatibility/2006" xmlns:a14="http://schemas.microsoft.com/office/drawing/2010/main">
-        <mc:Choice Requires="a14">
+      <mc:AlternateContent xmlns:mc="http://schemas.openxmlformats.org/markup-compatibility/2006">
+        <mc:Choice xmlns:a14="http://schemas.microsoft.com/office/drawing/2010/main" Requires="a14">
           <p:sp>
             <p:nvSpPr>
               <p:cNvPr id="3" name="Content Placeholder 2">
@@ -13799,10 +14862,7 @@
                 </a:br>
                 <a14:m>
                   <m:oMathPara xmlns:m="http://schemas.openxmlformats.org/officeDocument/2006/math">
-                    <m:oMathParaPr>
-                      <m:jc m:val="centerGroup"/>
-                    </m:oMathParaPr>
-                    <m:oMath xmlns:m="http://schemas.openxmlformats.org/officeDocument/2006/math">
+                    <m:oMath>
                       <m:sSup>
                         <m:sSupPr>
                           <m:ctrlPr>
@@ -13975,7 +15035,7 @@
                       <m:d>
                         <m:dPr>
                           <m:ctrlPr>
-                            <a:rPr lang="en-US" b="0" i="1" smtClean="0">
+                            <a:rPr lang="en-US" i="1">
                               <a:latin typeface="Cambria Math" panose="02040503050406030204" pitchFamily="18" charset="0"/>
                             </a:rPr>
                           </m:ctrlPr>
@@ -14101,8 +15161,12 @@
               </a:p>
               <a:p>
                 <a:r>
+                  <a:rPr lang="en-US" b="1" dirty="0"/>
+                  <a:t>Requirement</a:t>
+                </a:r>
+                <a:r>
                   <a:rPr lang="en-US" dirty="0"/>
-                  <a:t>Requirement: The agent needs a good heuristic for </a:t>
+                  <a:t>: The agent needs a good heuristic for </a:t>
                 </a:r>
                 <a14:m>
                   <m:oMath xmlns:m="http://schemas.openxmlformats.org/officeDocument/2006/math">
@@ -14148,7 +15212,7 @@
             </p:txBody>
           </p:sp>
         </mc:Choice>
-        <mc:Fallback xmlns="">
+        <mc:Fallback>
           <p:sp>
             <p:nvSpPr>
               <p:cNvPr id="3" name="Content Placeholder 2">
@@ -14481,10 +15545,7 @@
                     <a:pPr/>
                     <a14:m>
                       <m:oMathPara xmlns:m="http://schemas.openxmlformats.org/officeDocument/2006/math">
-                        <m:oMathParaPr>
-                          <m:jc m:val="centerGroup"/>
-                        </m:oMathParaPr>
-                        <m:oMath xmlns:m="http://schemas.openxmlformats.org/officeDocument/2006/math">
+                        <m:oMath>
                           <m:sSub>
                             <m:sSubPr>
                               <m:ctrlPr>
@@ -14596,10 +15657,7 @@
                     <a:pPr/>
                     <a14:m>
                       <m:oMathPara xmlns:m="http://schemas.openxmlformats.org/officeDocument/2006/math">
-                        <m:oMathParaPr>
-                          <m:jc m:val="centerGroup"/>
-                        </m:oMathParaPr>
-                        <m:oMath xmlns:m="http://schemas.openxmlformats.org/officeDocument/2006/math">
+                        <m:oMath>
                           <m:r>
                             <a:rPr lang="en-US" b="0" i="1" smtClean="0">
                               <a:latin typeface="Cambria Math" panose="02040503050406030204" pitchFamily="18" charset="0"/>
@@ -14806,6 +15864,319 @@
   <p:clrMapOvr>
     <a:masterClrMapping/>
   </p:clrMapOvr>
+  <p:timing>
+    <p:tnLst>
+      <p:par>
+        <p:cTn id="1" dur="indefinite" restart="never" nodeType="tmRoot">
+          <p:childTnLst>
+            <p:seq concurrent="1" nextAc="seek">
+              <p:cTn id="2" dur="indefinite" nodeType="mainSeq">
+                <p:childTnLst>
+                  <p:par>
+                    <p:cTn id="3" fill="hold">
+                      <p:stCondLst>
+                        <p:cond delay="indefinite"/>
+                      </p:stCondLst>
+                      <p:childTnLst>
+                        <p:par>
+                          <p:cTn id="4" fill="hold">
+                            <p:stCondLst>
+                              <p:cond delay="0"/>
+                            </p:stCondLst>
+                            <p:childTnLst>
+                              <p:par>
+                                <p:cTn id="5" presetID="1" presetClass="entr" presetSubtype="0" fill="hold" nodeType="clickEffect">
+                                  <p:stCondLst>
+                                    <p:cond delay="0"/>
+                                  </p:stCondLst>
+                                  <p:childTnLst>
+                                    <p:set>
+                                      <p:cBhvr>
+                                        <p:cTn id="6" dur="1" fill="hold">
+                                          <p:stCondLst>
+                                            <p:cond delay="0"/>
+                                          </p:stCondLst>
+                                        </p:cTn>
+                                        <p:tgtEl>
+                                          <p:spTgt spid="3">
+                                            <p:txEl>
+                                              <p:pRg st="4" end="4"/>
+                                            </p:txEl>
+                                          </p:spTgt>
+                                        </p:tgtEl>
+                                        <p:attrNameLst>
+                                          <p:attrName>style.visibility</p:attrName>
+                                        </p:attrNameLst>
+                                      </p:cBhvr>
+                                      <p:to>
+                                        <p:strVal val="visible"/>
+                                      </p:to>
+                                    </p:set>
+                                  </p:childTnLst>
+                                </p:cTn>
+                              </p:par>
+                              <p:par>
+                                <p:cTn id="7" presetID="1" presetClass="entr" presetSubtype="0" fill="hold" nodeType="withEffect">
+                                  <p:stCondLst>
+                                    <p:cond delay="0"/>
+                                  </p:stCondLst>
+                                  <p:childTnLst>
+                                    <p:set>
+                                      <p:cBhvr>
+                                        <p:cTn id="8" dur="1" fill="hold">
+                                          <p:stCondLst>
+                                            <p:cond delay="0"/>
+                                          </p:stCondLst>
+                                        </p:cTn>
+                                        <p:tgtEl>
+                                          <p:spTgt spid="3">
+                                            <p:txEl>
+                                              <p:pRg st="5" end="5"/>
+                                            </p:txEl>
+                                          </p:spTgt>
+                                        </p:tgtEl>
+                                        <p:attrNameLst>
+                                          <p:attrName>style.visibility</p:attrName>
+                                        </p:attrNameLst>
+                                      </p:cBhvr>
+                                      <p:to>
+                                        <p:strVal val="visible"/>
+                                      </p:to>
+                                    </p:set>
+                                  </p:childTnLst>
+                                </p:cTn>
+                              </p:par>
+                              <p:par>
+                                <p:cTn id="9" presetID="1" presetClass="entr" presetSubtype="0" fill="hold" grpId="0" nodeType="withEffect">
+                                  <p:stCondLst>
+                                    <p:cond delay="0"/>
+                                  </p:stCondLst>
+                                  <p:childTnLst>
+                                    <p:set>
+                                      <p:cBhvr>
+                                        <p:cTn id="10" dur="1" fill="hold">
+                                          <p:stCondLst>
+                                            <p:cond delay="0"/>
+                                          </p:stCondLst>
+                                        </p:cTn>
+                                        <p:tgtEl>
+                                          <p:spTgt spid="15"/>
+                                        </p:tgtEl>
+                                        <p:attrNameLst>
+                                          <p:attrName>style.visibility</p:attrName>
+                                        </p:attrNameLst>
+                                      </p:cBhvr>
+                                      <p:to>
+                                        <p:strVal val="visible"/>
+                                      </p:to>
+                                    </p:set>
+                                  </p:childTnLst>
+                                </p:cTn>
+                              </p:par>
+                            </p:childTnLst>
+                          </p:cTn>
+                        </p:par>
+                      </p:childTnLst>
+                    </p:cTn>
+                  </p:par>
+                  <p:par>
+                    <p:cTn id="11" fill="hold">
+                      <p:stCondLst>
+                        <p:cond delay="indefinite"/>
+                      </p:stCondLst>
+                      <p:childTnLst>
+                        <p:par>
+                          <p:cTn id="12" fill="hold">
+                            <p:stCondLst>
+                              <p:cond delay="0"/>
+                            </p:stCondLst>
+                            <p:childTnLst>
+                              <p:par>
+                                <p:cTn id="13" presetID="1" presetClass="entr" presetSubtype="0" fill="hold" nodeType="clickEffect">
+                                  <p:stCondLst>
+                                    <p:cond delay="0"/>
+                                  </p:stCondLst>
+                                  <p:childTnLst>
+                                    <p:set>
+                                      <p:cBhvr>
+                                        <p:cTn id="14" dur="1" fill="hold">
+                                          <p:stCondLst>
+                                            <p:cond delay="0"/>
+                                          </p:stCondLst>
+                                        </p:cTn>
+                                        <p:tgtEl>
+                                          <p:spTgt spid="3">
+                                            <p:txEl>
+                                              <p:pRg st="7" end="7"/>
+                                            </p:txEl>
+                                          </p:spTgt>
+                                        </p:tgtEl>
+                                        <p:attrNameLst>
+                                          <p:attrName>style.visibility</p:attrName>
+                                        </p:attrNameLst>
+                                      </p:cBhvr>
+                                      <p:to>
+                                        <p:strVal val="visible"/>
+                                      </p:to>
+                                    </p:set>
+                                  </p:childTnLst>
+                                </p:cTn>
+                              </p:par>
+                              <p:par>
+                                <p:cTn id="15" presetID="1" presetClass="entr" presetSubtype="0" fill="hold" nodeType="withEffect">
+                                  <p:stCondLst>
+                                    <p:cond delay="0"/>
+                                  </p:stCondLst>
+                                  <p:childTnLst>
+                                    <p:set>
+                                      <p:cBhvr>
+                                        <p:cTn id="16" dur="1" fill="hold">
+                                          <p:stCondLst>
+                                            <p:cond delay="0"/>
+                                          </p:stCondLst>
+                                        </p:cTn>
+                                        <p:tgtEl>
+                                          <p:spTgt spid="3">
+                                            <p:txEl>
+                                              <p:pRg st="8" end="8"/>
+                                            </p:txEl>
+                                          </p:spTgt>
+                                        </p:tgtEl>
+                                        <p:attrNameLst>
+                                          <p:attrName>style.visibility</p:attrName>
+                                        </p:attrNameLst>
+                                      </p:cBhvr>
+                                      <p:to>
+                                        <p:strVal val="visible"/>
+                                      </p:to>
+                                    </p:set>
+                                  </p:childTnLst>
+                                </p:cTn>
+                              </p:par>
+                              <p:par>
+                                <p:cTn id="17" presetID="1" presetClass="entr" presetSubtype="0" fill="hold" nodeType="withEffect">
+                                  <p:stCondLst>
+                                    <p:cond delay="0"/>
+                                  </p:stCondLst>
+                                  <p:childTnLst>
+                                    <p:set>
+                                      <p:cBhvr>
+                                        <p:cTn id="18" dur="1" fill="hold">
+                                          <p:stCondLst>
+                                            <p:cond delay="0"/>
+                                          </p:stCondLst>
+                                        </p:cTn>
+                                        <p:tgtEl>
+                                          <p:spTgt spid="3">
+                                            <p:txEl>
+                                              <p:pRg st="9" end="9"/>
+                                            </p:txEl>
+                                          </p:spTgt>
+                                        </p:tgtEl>
+                                        <p:attrNameLst>
+                                          <p:attrName>style.visibility</p:attrName>
+                                        </p:attrNameLst>
+                                      </p:cBhvr>
+                                      <p:to>
+                                        <p:strVal val="visible"/>
+                                      </p:to>
+                                    </p:set>
+                                  </p:childTnLst>
+                                </p:cTn>
+                              </p:par>
+                              <p:par>
+                                <p:cTn id="19" presetID="1" presetClass="entr" presetSubtype="0" fill="hold" nodeType="withEffect">
+                                  <p:stCondLst>
+                                    <p:cond delay="0"/>
+                                  </p:stCondLst>
+                                  <p:childTnLst>
+                                    <p:set>
+                                      <p:cBhvr>
+                                        <p:cTn id="20" dur="1" fill="hold">
+                                          <p:stCondLst>
+                                            <p:cond delay="0"/>
+                                          </p:stCondLst>
+                                        </p:cTn>
+                                        <p:tgtEl>
+                                          <p:spTgt spid="3">
+                                            <p:txEl>
+                                              <p:pRg st="10" end="10"/>
+                                            </p:txEl>
+                                          </p:spTgt>
+                                        </p:tgtEl>
+                                        <p:attrNameLst>
+                                          <p:attrName>style.visibility</p:attrName>
+                                        </p:attrNameLst>
+                                      </p:cBhvr>
+                                      <p:to>
+                                        <p:strVal val="visible"/>
+                                      </p:to>
+                                    </p:set>
+                                  </p:childTnLst>
+                                </p:cTn>
+                              </p:par>
+                              <p:par>
+                                <p:cTn id="21" presetID="1" presetClass="entr" presetSubtype="0" fill="hold" nodeType="withEffect">
+                                  <p:stCondLst>
+                                    <p:cond delay="0"/>
+                                  </p:stCondLst>
+                                  <p:childTnLst>
+                                    <p:set>
+                                      <p:cBhvr>
+                                        <p:cTn id="22" dur="1" fill="hold">
+                                          <p:stCondLst>
+                                            <p:cond delay="0"/>
+                                          </p:stCondLst>
+                                        </p:cTn>
+                                        <p:tgtEl>
+                                          <p:spTgt spid="3">
+                                            <p:txEl>
+                                              <p:pRg st="12" end="12"/>
+                                            </p:txEl>
+                                          </p:spTgt>
+                                        </p:tgtEl>
+                                        <p:attrNameLst>
+                                          <p:attrName>style.visibility</p:attrName>
+                                        </p:attrNameLst>
+                                      </p:cBhvr>
+                                      <p:to>
+                                        <p:strVal val="visible"/>
+                                      </p:to>
+                                    </p:set>
+                                  </p:childTnLst>
+                                </p:cTn>
+                              </p:par>
+                            </p:childTnLst>
+                          </p:cTn>
+                        </p:par>
+                      </p:childTnLst>
+                    </p:cTn>
+                  </p:par>
+                </p:childTnLst>
+              </p:cTn>
+              <p:prevCondLst>
+                <p:cond evt="onPrev" delay="0">
+                  <p:tgtEl>
+                    <p:sldTgt/>
+                  </p:tgtEl>
+                </p:cond>
+              </p:prevCondLst>
+              <p:nextCondLst>
+                <p:cond evt="onNext" delay="0">
+                  <p:tgtEl>
+                    <p:sldTgt/>
+                  </p:tgtEl>
+                </p:cond>
+              </p:nextCondLst>
+            </p:seq>
+          </p:childTnLst>
+        </p:cTn>
+      </p:par>
+    </p:tnLst>
+    <p:bldLst>
+      <p:bldP spid="15" grpId="0" animBg="1"/>
+    </p:bldLst>
+  </p:timing>
 </p:sld>
 </file>
 
@@ -14854,8 +16225,8 @@
           </a:p>
         </p:txBody>
       </p:sp>
-      <mc:AlternateContent xmlns:mc="http://schemas.openxmlformats.org/markup-compatibility/2006" xmlns:a14="http://schemas.microsoft.com/office/drawing/2010/main">
-        <mc:Choice Requires="a14">
+      <mc:AlternateContent xmlns:mc="http://schemas.openxmlformats.org/markup-compatibility/2006">
+        <mc:Choice xmlns:a14="http://schemas.microsoft.com/office/drawing/2010/main" Requires="a14">
           <p:sp>
             <p:nvSpPr>
               <p:cNvPr id="3" name="Content Placeholder 2">
@@ -14885,8 +16256,12 @@
               <a:lstStyle/>
               <a:p>
                 <a:r>
+                  <a:rPr lang="en-US" b="1" dirty="0"/>
+                  <a:t>Idea</a:t>
+                </a:r>
+                <a:r>
                   <a:rPr lang="en-US" dirty="0"/>
-                  <a:t>Add small one-time rewards for solving an important subtask:</a:t>
+                  <a:t>: Add small one-time rewards for solving an important subtask:</a:t>
                 </a:r>
                 <a:br>
                   <a:rPr lang="en-US" dirty="0"/>
@@ -15192,7 +16567,7 @@
               <a:p>
                 <a:r>
                   <a:rPr lang="en-US" dirty="0"/>
-                  <a:t>Subtask completion  can be represented as reaching a state for the first time.</a:t>
+                  <a:t>Subtask completion can be represented as reaching a state for the first time.</a:t>
                 </a:r>
               </a:p>
               <a:p>
@@ -15211,7 +16586,7 @@
                 </a:r>
                 <a:r>
                   <a:rPr lang="en-US" dirty="0"/>
-                  <a:t>: This can be seen as simplified version of PBRS.</a:t>
+                  <a:t>: This can be seen as a simplified version of PBRS.</a:t>
                 </a:r>
               </a:p>
               <a:p>
@@ -15244,7 +16619,7 @@
             </p:txBody>
           </p:sp>
         </mc:Choice>
-        <mc:Fallback xmlns="">
+        <mc:Fallback>
           <p:sp>
             <p:nvSpPr>
               <p:cNvPr id="3" name="Content Placeholder 2">
@@ -15269,7 +16644,7 @@
               <a:blipFill>
                 <a:blip r:embed="rId2"/>
                 <a:stretch>
-                  <a:fillRect l="-958" t="-2361" r="-1198"/>
+                  <a:fillRect l="-958" t="-2361" r="-479"/>
                 </a:stretch>
               </a:blipFill>
             </p:spPr>
@@ -15964,6 +17339,147 @@
   <p:clrMapOvr>
     <a:masterClrMapping/>
   </p:clrMapOvr>
+  <p:timing>
+    <p:tnLst>
+      <p:par>
+        <p:cTn id="1" dur="indefinite" restart="never" nodeType="tmRoot">
+          <p:childTnLst>
+            <p:seq concurrent="1" nextAc="seek">
+              <p:cTn id="2" dur="indefinite" nodeType="mainSeq">
+                <p:childTnLst>
+                  <p:par>
+                    <p:cTn id="3" fill="hold">
+                      <p:stCondLst>
+                        <p:cond delay="indefinite"/>
+                      </p:stCondLst>
+                      <p:childTnLst>
+                        <p:par>
+                          <p:cTn id="4" fill="hold">
+                            <p:stCondLst>
+                              <p:cond delay="0"/>
+                            </p:stCondLst>
+                            <p:childTnLst>
+                              <p:par>
+                                <p:cTn id="5" presetID="1" presetClass="entr" presetSubtype="0" fill="hold" nodeType="clickEffect">
+                                  <p:stCondLst>
+                                    <p:cond delay="0"/>
+                                  </p:stCondLst>
+                                  <p:childTnLst>
+                                    <p:set>
+                                      <p:cBhvr>
+                                        <p:cTn id="6" dur="1" fill="hold">
+                                          <p:stCondLst>
+                                            <p:cond delay="0"/>
+                                          </p:stCondLst>
+                                        </p:cTn>
+                                        <p:tgtEl>
+                                          <p:spTgt spid="3">
+                                            <p:txEl>
+                                              <p:pRg st="6" end="6"/>
+                                            </p:txEl>
+                                          </p:spTgt>
+                                        </p:tgtEl>
+                                        <p:attrNameLst>
+                                          <p:attrName>style.visibility</p:attrName>
+                                        </p:attrNameLst>
+                                      </p:cBhvr>
+                                      <p:to>
+                                        <p:strVal val="visible"/>
+                                      </p:to>
+                                    </p:set>
+                                  </p:childTnLst>
+                                </p:cTn>
+                              </p:par>
+                              <p:par>
+                                <p:cTn id="7" presetID="1" presetClass="entr" presetSubtype="0" fill="hold" nodeType="withEffect">
+                                  <p:stCondLst>
+                                    <p:cond delay="0"/>
+                                  </p:stCondLst>
+                                  <p:childTnLst>
+                                    <p:set>
+                                      <p:cBhvr>
+                                        <p:cTn id="8" dur="1" fill="hold">
+                                          <p:stCondLst>
+                                            <p:cond delay="0"/>
+                                          </p:stCondLst>
+                                        </p:cTn>
+                                        <p:tgtEl>
+                                          <p:spTgt spid="3">
+                                            <p:txEl>
+                                              <p:pRg st="7" end="7"/>
+                                            </p:txEl>
+                                          </p:spTgt>
+                                        </p:tgtEl>
+                                        <p:attrNameLst>
+                                          <p:attrName>style.visibility</p:attrName>
+                                        </p:attrNameLst>
+                                      </p:cBhvr>
+                                      <p:to>
+                                        <p:strVal val="visible"/>
+                                      </p:to>
+                                    </p:set>
+                                  </p:childTnLst>
+                                </p:cTn>
+                              </p:par>
+                              <p:par>
+                                <p:cTn id="9" presetID="1" presetClass="entr" presetSubtype="0" fill="hold" nodeType="withEffect">
+                                  <p:stCondLst>
+                                    <p:cond delay="0"/>
+                                  </p:stCondLst>
+                                  <p:childTnLst>
+                                    <p:set>
+                                      <p:cBhvr>
+                                        <p:cTn id="10" dur="1" fill="hold">
+                                          <p:stCondLst>
+                                            <p:cond delay="0"/>
+                                          </p:stCondLst>
+                                        </p:cTn>
+                                        <p:tgtEl>
+                                          <p:spTgt spid="3">
+                                            <p:txEl>
+                                              <p:pRg st="8" end="8"/>
+                                            </p:txEl>
+                                          </p:spTgt>
+                                        </p:tgtEl>
+                                        <p:attrNameLst>
+                                          <p:attrName>style.visibility</p:attrName>
+                                        </p:attrNameLst>
+                                      </p:cBhvr>
+                                      <p:to>
+                                        <p:strVal val="visible"/>
+                                      </p:to>
+                                    </p:set>
+                                  </p:childTnLst>
+                                </p:cTn>
+                              </p:par>
+                            </p:childTnLst>
+                          </p:cTn>
+                        </p:par>
+                      </p:childTnLst>
+                    </p:cTn>
+                  </p:par>
+                </p:childTnLst>
+              </p:cTn>
+              <p:prevCondLst>
+                <p:cond evt="onPrev" delay="0">
+                  <p:tgtEl>
+                    <p:sldTgt/>
+                  </p:tgtEl>
+                </p:cond>
+              </p:prevCondLst>
+              <p:nextCondLst>
+                <p:cond evt="onNext" delay="0">
+                  <p:tgtEl>
+                    <p:sldTgt/>
+                  </p:tgtEl>
+                </p:cond>
+              </p:nextCondLst>
+            </p:seq>
+          </p:childTnLst>
+        </p:cTn>
+      </p:par>
+    </p:tnLst>
+  </p:timing>
 </p:sld>
 </file>
 

--- a/slides/Lecture_Reward_Engineering.pptx
+++ b/slides/Lecture_Reward_Engineering.pptx
@@ -18,8 +18,8 @@
     <p:sldId id="483" r:id="rId9"/>
     <p:sldId id="484" r:id="rId10"/>
     <p:sldId id="486" r:id="rId11"/>
-    <p:sldId id="489" r:id="rId12"/>
-    <p:sldId id="493" r:id="rId13"/>
+    <p:sldId id="493" r:id="rId12"/>
+    <p:sldId id="489" r:id="rId13"/>
     <p:sldId id="485" r:id="rId14"/>
     <p:sldId id="490" r:id="rId15"/>
     <p:sldId id="400" r:id="rId16"/>
@@ -144,12 +144,12 @@
             <p14:sldId id="483"/>
             <p14:sldId id="484"/>
             <p14:sldId id="486"/>
-            <p14:sldId id="489"/>
           </p14:sldIdLst>
         </p14:section>
         <p14:section name="Related Techniques" id="{DD4220DD-3082-42D2-BCED-46D36CEB56B2}">
           <p14:sldIdLst>
             <p14:sldId id="493"/>
+            <p14:sldId id="489"/>
             <p14:sldId id="485"/>
             <p14:sldId id="490"/>
             <p14:sldId id="400"/>
@@ -1106,7 +1106,7 @@
         <a:p>
           <a:r>
             <a:rPr lang="en-US" dirty="0"/>
-            <a:t>Original environment</a:t>
+            <a:t>3. Original environment</a:t>
           </a:r>
         </a:p>
       </dgm:t>
@@ -1142,7 +1142,7 @@
         <a:p>
           <a:r>
             <a:rPr lang="en-US" dirty="0"/>
-            <a:t>More complex environment</a:t>
+            <a:t>2. More complex environment</a:t>
           </a:r>
         </a:p>
       </dgm:t>
@@ -1178,7 +1178,7 @@
         <a:p>
           <a:r>
             <a:rPr lang="en-US" dirty="0"/>
-            <a:t>Simplified environment</a:t>
+            <a:t>1. Simplified environment</a:t>
           </a:r>
         </a:p>
       </dgm:t>
@@ -1412,7 +1412,7 @@
           </a:pPr>
           <a:r>
             <a:rPr lang="en-US" sz="1700" kern="1200" dirty="0"/>
-            <a:t>Original environment</a:t>
+            <a:t>3. Original environment</a:t>
           </a:r>
         </a:p>
       </dsp:txBody>
@@ -1489,7 +1489,7 @@
           </a:pPr>
           <a:r>
             <a:rPr lang="en-US" sz="1700" kern="1200" dirty="0"/>
-            <a:t>More complex environment</a:t>
+            <a:t>2. More complex environment</a:t>
           </a:r>
         </a:p>
       </dsp:txBody>
@@ -1566,7 +1566,7 @@
           </a:pPr>
           <a:r>
             <a:rPr lang="en-US" sz="1700" kern="1200" dirty="0"/>
-            <a:t>Simplified environment</a:t>
+            <a:t>1. Simplified environment</a:t>
           </a:r>
         </a:p>
       </dsp:txBody>
@@ -8116,6 +8116,262 @@
 <file path=ppt/slides/slide11.xml><?xml version="1.0" encoding="utf-8"?>
 <p:sld xmlns:a="http://schemas.openxmlformats.org/drawingml/2006/main" xmlns:r="http://schemas.openxmlformats.org/officeDocument/2006/relationships" xmlns:p="http://schemas.openxmlformats.org/presentationml/2006/main">
   <p:cSld>
+    <p:bg>
+      <p:bgPr>
+        <a:solidFill>
+          <a:srgbClr val="000000"/>
+        </a:solidFill>
+        <a:effectLst/>
+      </p:bgPr>
+    </p:bg>
+    <p:spTree>
+      <p:nvGrpSpPr>
+        <p:cNvPr id="1" name="">
+          <a:extLst>
+            <a:ext uri="{FF2B5EF4-FFF2-40B4-BE49-F238E27FC236}">
+              <a16:creationId xmlns:a16="http://schemas.microsoft.com/office/drawing/2014/main" id="{F5A0B838-82F4-AD35-0201-723F3CC26FFF}"/>
+            </a:ext>
+          </a:extLst>
+        </p:cNvPr>
+        <p:cNvGrpSpPr/>
+        <p:nvPr/>
+      </p:nvGrpSpPr>
+      <p:grpSpPr>
+        <a:xfrm>
+          <a:off x="0" y="0"/>
+          <a:ext cx="0" cy="0"/>
+          <a:chOff x="0" y="0"/>
+          <a:chExt cx="0" cy="0"/>
+        </a:xfrm>
+      </p:grpSpPr>
+      <p:sp>
+        <p:nvSpPr>
+          <p:cNvPr id="16" name="Rectangle 15">
+            <a:extLst>
+              <a:ext uri="{FF2B5EF4-FFF2-40B4-BE49-F238E27FC236}">
+                <a16:creationId xmlns:a16="http://schemas.microsoft.com/office/drawing/2014/main" id="{71B2258F-86CA-4D4D-8270-BC05FCDEBFB3}"/>
+              </a:ext>
+              <a:ext uri="{C183D7F6-B498-43B3-948B-1728B52AA6E4}">
+                <adec:decorative xmlns:adec="http://schemas.microsoft.com/office/drawing/2017/decorative" val="1"/>
+              </a:ext>
+            </a:extLst>
+          </p:cNvPr>
+          <p:cNvSpPr>
+            <a:spLocks noGrp="1" noRot="1" noChangeAspect="1" noMove="1" noResize="1" noEditPoints="1" noAdjustHandles="1" noChangeArrowheads="1" noChangeShapeType="1" noTextEdit="1"/>
+          </p:cNvSpPr>
+          <p:nvPr>
+            <p:extLst>
+              <p:ext uri="{386F3935-93C4-4BCD-93E2-E3B085C9AB24}">
+                <p16:designElem xmlns:p16="http://schemas.microsoft.com/office/powerpoint/2015/main" val="1"/>
+              </p:ext>
+            </p:extLst>
+          </p:nvPr>
+        </p:nvSpPr>
+        <p:spPr>
+          <a:xfrm>
+            <a:off x="0" y="0"/>
+            <a:ext cx="12192000" cy="6857999"/>
+          </a:xfrm>
+          <a:prstGeom prst="rect">
+            <a:avLst/>
+          </a:prstGeom>
+          <a:solidFill>
+            <a:srgbClr val="000000"/>
+          </a:solidFill>
+          <a:ln>
+            <a:noFill/>
+          </a:ln>
+        </p:spPr>
+        <p:style>
+          <a:lnRef idx="2">
+            <a:schemeClr val="accent1">
+              <a:shade val="50000"/>
+            </a:schemeClr>
+          </a:lnRef>
+          <a:fillRef idx="1">
+            <a:schemeClr val="accent1"/>
+          </a:fillRef>
+          <a:effectRef idx="0">
+            <a:schemeClr val="accent1"/>
+          </a:effectRef>
+          <a:fontRef idx="minor">
+            <a:schemeClr val="lt1"/>
+          </a:fontRef>
+        </p:style>
+        <p:txBody>
+          <a:bodyPr rtlCol="0" anchor="ctr"/>
+          <a:lstStyle/>
+          <a:p>
+            <a:pPr algn="ctr"/>
+            <a:endParaRPr lang="en-US"/>
+          </a:p>
+        </p:txBody>
+      </p:sp>
+      <p:pic>
+        <p:nvPicPr>
+          <p:cNvPr id="7" name="Picture 6">
+            <a:extLst>
+              <a:ext uri="{FF2B5EF4-FFF2-40B4-BE49-F238E27FC236}">
+                <a16:creationId xmlns:a16="http://schemas.microsoft.com/office/drawing/2014/main" id="{1B8DA306-1697-AFFB-9D44-7921CC19F108}"/>
+              </a:ext>
+            </a:extLst>
+          </p:cNvPr>
+          <p:cNvPicPr>
+            <a:picLocks noChangeAspect="1"/>
+          </p:cNvPicPr>
+          <p:nvPr/>
+        </p:nvPicPr>
+        <p:blipFill>
+          <a:blip r:embed="rId2">
+            <a:alphaModFix amt="50000"/>
+          </a:blip>
+          <a:srcRect/>
+          <a:stretch>
+            <a:fillRect/>
+          </a:stretch>
+        </p:blipFill>
+        <p:spPr>
+          <a:xfrm>
+            <a:off x="20" y="1"/>
+            <a:ext cx="12191980" cy="6857999"/>
+          </a:xfrm>
+          <a:prstGeom prst="rect">
+            <a:avLst/>
+          </a:prstGeom>
+        </p:spPr>
+      </p:pic>
+      <p:sp>
+        <p:nvSpPr>
+          <p:cNvPr id="4" name="Title 3">
+            <a:extLst>
+              <a:ext uri="{FF2B5EF4-FFF2-40B4-BE49-F238E27FC236}">
+                <a16:creationId xmlns:a16="http://schemas.microsoft.com/office/drawing/2014/main" id="{A4A6CBBE-E9CD-835B-0CAD-7FC4571B229C}"/>
+              </a:ext>
+            </a:extLst>
+          </p:cNvPr>
+          <p:cNvSpPr>
+            <a:spLocks noGrp="1"/>
+          </p:cNvSpPr>
+          <p:nvPr>
+            <p:ph type="title"/>
+          </p:nvPr>
+        </p:nvSpPr>
+        <p:spPr>
+          <a:xfrm>
+            <a:off x="1524000" y="1122362"/>
+            <a:ext cx="9144000" cy="2900518"/>
+          </a:xfrm>
+        </p:spPr>
+        <p:txBody>
+          <a:bodyPr vert="horz" lIns="91440" tIns="45720" rIns="91440" bIns="45720" rtlCol="0" anchor="b">
+            <a:normAutofit/>
+          </a:bodyPr>
+          <a:lstStyle/>
+          <a:p>
+            <a:pPr algn="ctr"/>
+            <a:r>
+              <a:rPr lang="en-US">
+                <a:solidFill>
+                  <a:srgbClr val="FFFFFF"/>
+                </a:solidFill>
+              </a:rPr>
+              <a:t>Related Training Techniques</a:t>
+            </a:r>
+            <a:endParaRPr lang="en-US" dirty="0">
+              <a:solidFill>
+                <a:srgbClr val="FFFFFF"/>
+              </a:solidFill>
+            </a:endParaRPr>
+          </a:p>
+        </p:txBody>
+      </p:sp>
+      <p:sp>
+        <p:nvSpPr>
+          <p:cNvPr id="5" name="Text Placeholder 4">
+            <a:extLst>
+              <a:ext uri="{FF2B5EF4-FFF2-40B4-BE49-F238E27FC236}">
+                <a16:creationId xmlns:a16="http://schemas.microsoft.com/office/drawing/2014/main" id="{B7BFAEF4-793E-F68F-C79B-B4B3889F08FB}"/>
+              </a:ext>
+            </a:extLst>
+          </p:cNvPr>
+          <p:cNvSpPr>
+            <a:spLocks noGrp="1"/>
+          </p:cNvSpPr>
+          <p:nvPr>
+            <p:ph type="body" idx="1"/>
+          </p:nvPr>
+        </p:nvSpPr>
+        <p:spPr>
+          <a:xfrm>
+            <a:off x="7066672" y="4342044"/>
+            <a:ext cx="3601328" cy="1098395"/>
+          </a:xfrm>
+        </p:spPr>
+        <p:txBody>
+          <a:bodyPr vert="horz" lIns="91440" tIns="45720" rIns="91440" bIns="45720" rtlCol="0">
+            <a:normAutofit fontScale="92500" lnSpcReduction="20000"/>
+          </a:bodyPr>
+          <a:lstStyle/>
+          <a:p>
+            <a:pPr marL="342900" indent="-342900">
+              <a:buFont typeface="Arial" panose="020B0604020202020204" pitchFamily="34" charset="0"/>
+              <a:buChar char="•"/>
+            </a:pPr>
+            <a:r>
+              <a:rPr lang="en-US" dirty="0">
+                <a:solidFill>
+                  <a:srgbClr val="FFFFFF"/>
+                </a:solidFill>
+              </a:rPr>
+              <a:t>Inverse RL</a:t>
+            </a:r>
+          </a:p>
+          <a:p>
+            <a:pPr marL="342900" indent="-342900">
+              <a:buFont typeface="Arial" panose="020B0604020202020204" pitchFamily="34" charset="0"/>
+              <a:buChar char="•"/>
+            </a:pPr>
+            <a:r>
+              <a:rPr lang="en-US" dirty="0">
+                <a:solidFill>
+                  <a:srgbClr val="FFFFFF"/>
+                </a:solidFill>
+              </a:rPr>
+              <a:t>Curriculum Learning</a:t>
+            </a:r>
+          </a:p>
+          <a:p>
+            <a:pPr marL="342900" indent="-342900">
+              <a:buFont typeface="Arial" panose="020B0604020202020204" pitchFamily="34" charset="0"/>
+              <a:buChar char="•"/>
+            </a:pPr>
+            <a:r>
+              <a:rPr lang="en-US" dirty="0">
+                <a:solidFill>
+                  <a:srgbClr val="FFFFFF"/>
+                </a:solidFill>
+              </a:rPr>
+              <a:t>Robust RL</a:t>
+            </a:r>
+          </a:p>
+        </p:txBody>
+      </p:sp>
+    </p:spTree>
+    <p:extLst>
+      <p:ext uri="{BB962C8B-B14F-4D97-AF65-F5344CB8AC3E}">
+        <p14:creationId xmlns:p14="http://schemas.microsoft.com/office/powerpoint/2010/main" val="3879625714"/>
+      </p:ext>
+    </p:extLst>
+  </p:cSld>
+  <p:clrMapOvr>
+    <a:overrideClrMapping bg1="dk1" tx1="lt1" bg2="dk2" tx2="lt2" accent1="accent1" accent2="accent2" accent3="accent3" accent4="accent4" accent5="accent5" accent6="accent6" hlink="hlink" folHlink="folHlink"/>
+  </p:clrMapOvr>
+</p:sld>
+</file>
+
+<file path=ppt/slides/slide12.xml><?xml version="1.0" encoding="utf-8"?>
+<p:sld xmlns:a="http://schemas.openxmlformats.org/drawingml/2006/main" xmlns:r="http://schemas.openxmlformats.org/officeDocument/2006/relationships" xmlns:p="http://schemas.openxmlformats.org/presentationml/2006/main">
+  <p:cSld>
     <p:spTree>
       <p:nvGrpSpPr>
         <p:cNvPr id="1" name=""/>
@@ -8194,7 +8450,7 @@
                 </a:r>
                 <a:r>
                   <a:rPr lang="en-US" dirty="0"/>
-                  <a:t>: Learn the hard to define reward function from demonstrations by an expert.</a:t>
+                  <a:t>: Learn a hard to define reward function from demonstrations by an expert.</a:t>
                 </a:r>
               </a:p>
               <a:p>
@@ -9452,228 +9708,6 @@
 </p:sld>
 </file>
 
-<file path=ppt/slides/slide12.xml><?xml version="1.0" encoding="utf-8"?>
-<p:sld xmlns:a="http://schemas.openxmlformats.org/drawingml/2006/main" xmlns:r="http://schemas.openxmlformats.org/officeDocument/2006/relationships" xmlns:p="http://schemas.openxmlformats.org/presentationml/2006/main">
-  <p:cSld>
-    <p:bg>
-      <p:bgPr>
-        <a:solidFill>
-          <a:srgbClr val="000000"/>
-        </a:solidFill>
-        <a:effectLst/>
-      </p:bgPr>
-    </p:bg>
-    <p:spTree>
-      <p:nvGrpSpPr>
-        <p:cNvPr id="1" name="">
-          <a:extLst>
-            <a:ext uri="{FF2B5EF4-FFF2-40B4-BE49-F238E27FC236}">
-              <a16:creationId xmlns:a16="http://schemas.microsoft.com/office/drawing/2014/main" id="{F5A0B838-82F4-AD35-0201-723F3CC26FFF}"/>
-            </a:ext>
-          </a:extLst>
-        </p:cNvPr>
-        <p:cNvGrpSpPr/>
-        <p:nvPr/>
-      </p:nvGrpSpPr>
-      <p:grpSpPr>
-        <a:xfrm>
-          <a:off x="0" y="0"/>
-          <a:ext cx="0" cy="0"/>
-          <a:chOff x="0" y="0"/>
-          <a:chExt cx="0" cy="0"/>
-        </a:xfrm>
-      </p:grpSpPr>
-      <p:sp>
-        <p:nvSpPr>
-          <p:cNvPr id="16" name="Rectangle 15">
-            <a:extLst>
-              <a:ext uri="{FF2B5EF4-FFF2-40B4-BE49-F238E27FC236}">
-                <a16:creationId xmlns:a16="http://schemas.microsoft.com/office/drawing/2014/main" id="{71B2258F-86CA-4D4D-8270-BC05FCDEBFB3}"/>
-              </a:ext>
-              <a:ext uri="{C183D7F6-B498-43B3-948B-1728B52AA6E4}">
-                <adec:decorative xmlns:adec="http://schemas.microsoft.com/office/drawing/2017/decorative" val="1"/>
-              </a:ext>
-            </a:extLst>
-          </p:cNvPr>
-          <p:cNvSpPr>
-            <a:spLocks noGrp="1" noRot="1" noChangeAspect="1" noMove="1" noResize="1" noEditPoints="1" noAdjustHandles="1" noChangeArrowheads="1" noChangeShapeType="1" noTextEdit="1"/>
-          </p:cNvSpPr>
-          <p:nvPr>
-            <p:extLst>
-              <p:ext uri="{386F3935-93C4-4BCD-93E2-E3B085C9AB24}">
-                <p16:designElem xmlns:p16="http://schemas.microsoft.com/office/powerpoint/2015/main" val="1"/>
-              </p:ext>
-            </p:extLst>
-          </p:nvPr>
-        </p:nvSpPr>
-        <p:spPr>
-          <a:xfrm>
-            <a:off x="0" y="0"/>
-            <a:ext cx="12192000" cy="6857999"/>
-          </a:xfrm>
-          <a:prstGeom prst="rect">
-            <a:avLst/>
-          </a:prstGeom>
-          <a:solidFill>
-            <a:srgbClr val="000000"/>
-          </a:solidFill>
-          <a:ln>
-            <a:noFill/>
-          </a:ln>
-        </p:spPr>
-        <p:style>
-          <a:lnRef idx="2">
-            <a:schemeClr val="accent1">
-              <a:shade val="50000"/>
-            </a:schemeClr>
-          </a:lnRef>
-          <a:fillRef idx="1">
-            <a:schemeClr val="accent1"/>
-          </a:fillRef>
-          <a:effectRef idx="0">
-            <a:schemeClr val="accent1"/>
-          </a:effectRef>
-          <a:fontRef idx="minor">
-            <a:schemeClr val="lt1"/>
-          </a:fontRef>
-        </p:style>
-        <p:txBody>
-          <a:bodyPr rtlCol="0" anchor="ctr"/>
-          <a:lstStyle/>
-          <a:p>
-            <a:pPr algn="ctr"/>
-            <a:endParaRPr lang="en-US"/>
-          </a:p>
-        </p:txBody>
-      </p:sp>
-      <p:pic>
-        <p:nvPicPr>
-          <p:cNvPr id="7" name="Picture 6">
-            <a:extLst>
-              <a:ext uri="{FF2B5EF4-FFF2-40B4-BE49-F238E27FC236}">
-                <a16:creationId xmlns:a16="http://schemas.microsoft.com/office/drawing/2014/main" id="{1B8DA306-1697-AFFB-9D44-7921CC19F108}"/>
-              </a:ext>
-            </a:extLst>
-          </p:cNvPr>
-          <p:cNvPicPr>
-            <a:picLocks noChangeAspect="1"/>
-          </p:cNvPicPr>
-          <p:nvPr/>
-        </p:nvPicPr>
-        <p:blipFill>
-          <a:blip r:embed="rId2">
-            <a:alphaModFix amt="50000"/>
-          </a:blip>
-          <a:srcRect/>
-          <a:stretch>
-            <a:fillRect/>
-          </a:stretch>
-        </p:blipFill>
-        <p:spPr>
-          <a:xfrm>
-            <a:off x="20" y="1"/>
-            <a:ext cx="12191980" cy="6857999"/>
-          </a:xfrm>
-          <a:prstGeom prst="rect">
-            <a:avLst/>
-          </a:prstGeom>
-        </p:spPr>
-      </p:pic>
-      <p:sp>
-        <p:nvSpPr>
-          <p:cNvPr id="4" name="Title 3">
-            <a:extLst>
-              <a:ext uri="{FF2B5EF4-FFF2-40B4-BE49-F238E27FC236}">
-                <a16:creationId xmlns:a16="http://schemas.microsoft.com/office/drawing/2014/main" id="{A4A6CBBE-E9CD-835B-0CAD-7FC4571B229C}"/>
-              </a:ext>
-            </a:extLst>
-          </p:cNvPr>
-          <p:cNvSpPr>
-            <a:spLocks noGrp="1"/>
-          </p:cNvSpPr>
-          <p:nvPr>
-            <p:ph type="title"/>
-          </p:nvPr>
-        </p:nvSpPr>
-        <p:spPr>
-          <a:xfrm>
-            <a:off x="1524000" y="1122362"/>
-            <a:ext cx="9144000" cy="2900518"/>
-          </a:xfrm>
-        </p:spPr>
-        <p:txBody>
-          <a:bodyPr vert="horz" lIns="91440" tIns="45720" rIns="91440" bIns="45720" rtlCol="0" anchor="b">
-            <a:normAutofit/>
-          </a:bodyPr>
-          <a:lstStyle/>
-          <a:p>
-            <a:pPr algn="ctr"/>
-            <a:r>
-              <a:rPr lang="en-US">
-                <a:solidFill>
-                  <a:srgbClr val="FFFFFF"/>
-                </a:solidFill>
-              </a:rPr>
-              <a:t>Related Training Techniques</a:t>
-            </a:r>
-            <a:endParaRPr lang="en-US" dirty="0">
-              <a:solidFill>
-                <a:srgbClr val="FFFFFF"/>
-              </a:solidFill>
-            </a:endParaRPr>
-          </a:p>
-        </p:txBody>
-      </p:sp>
-      <p:sp>
-        <p:nvSpPr>
-          <p:cNvPr id="5" name="Text Placeholder 4">
-            <a:extLst>
-              <a:ext uri="{FF2B5EF4-FFF2-40B4-BE49-F238E27FC236}">
-                <a16:creationId xmlns:a16="http://schemas.microsoft.com/office/drawing/2014/main" id="{B7BFAEF4-793E-F68F-C79B-B4B3889F08FB}"/>
-              </a:ext>
-            </a:extLst>
-          </p:cNvPr>
-          <p:cNvSpPr>
-            <a:spLocks noGrp="1"/>
-          </p:cNvSpPr>
-          <p:nvPr>
-            <p:ph type="body" idx="1"/>
-          </p:nvPr>
-        </p:nvSpPr>
-        <p:spPr>
-          <a:xfrm>
-            <a:off x="1524000" y="4159404"/>
-            <a:ext cx="9144000" cy="1098395"/>
-          </a:xfrm>
-        </p:spPr>
-        <p:txBody>
-          <a:bodyPr vert="horz" lIns="91440" tIns="45720" rIns="91440" bIns="45720" rtlCol="0">
-            <a:normAutofit/>
-          </a:bodyPr>
-          <a:lstStyle/>
-          <a:p>
-            <a:pPr algn="ctr"/>
-            <a:endParaRPr lang="en-US">
-              <a:solidFill>
-                <a:srgbClr val="FFFFFF"/>
-              </a:solidFill>
-            </a:endParaRPr>
-          </a:p>
-        </p:txBody>
-      </p:sp>
-    </p:spTree>
-    <p:extLst>
-      <p:ext uri="{BB962C8B-B14F-4D97-AF65-F5344CB8AC3E}">
-        <p14:creationId xmlns:p14="http://schemas.microsoft.com/office/powerpoint/2010/main" val="3879625714"/>
-      </p:ext>
-    </p:extLst>
-  </p:cSld>
-  <p:clrMapOvr>
-    <a:overrideClrMapping bg1="dk1" tx1="lt1" bg2="dk2" tx2="lt2" accent1="accent1" accent2="accent2" accent3="accent3" accent4="accent4" accent5="accent5" accent6="accent6" hlink="hlink" folHlink="folHlink"/>
-  </p:clrMapOvr>
-</p:sld>
-</file>
-
 <file path=ppt/slides/slide13.xml><?xml version="1.0" encoding="utf-8"?>
 <p:sld xmlns:a="http://schemas.openxmlformats.org/drawingml/2006/main" xmlns:r="http://schemas.openxmlformats.org/officeDocument/2006/relationships" xmlns:p="http://schemas.openxmlformats.org/presentationml/2006/main">
   <p:cSld>
@@ -9714,7 +9748,7 @@
           <a:p>
             <a:r>
               <a:rPr lang="en-US" dirty="0"/>
-              <a:t>Related Technique: Curriculum Learning</a:t>
+              <a:t>Curriculum Learning</a:t>
             </a:r>
           </a:p>
         </p:txBody>
@@ -9753,7 +9787,15 @@
             </a:r>
             <a:r>
               <a:rPr lang="en-US" dirty="0"/>
-              <a:t>: Ensuring the agent masters foundational skills before moving on to more advanced challenges.</a:t>
+              <a:t>: Ensuring the agent masters </a:t>
+            </a:r>
+            <a:r>
+              <a:rPr lang="en-US" b="1" dirty="0"/>
+              <a:t>foundational skills </a:t>
+            </a:r>
+            <a:r>
+              <a:rPr lang="en-US" dirty="0"/>
+              <a:t>before moving on to more advanced challenges.</a:t>
             </a:r>
           </a:p>
           <a:p>
@@ -9762,7 +9804,7 @@
           <a:p>
             <a:r>
               <a:rPr lang="en-US" b="1" dirty="0"/>
-              <a:t>How It Works</a:t>
+              <a:t>Steps</a:t>
             </a:r>
             <a:r>
               <a:rPr lang="en-US" dirty="0"/>
@@ -9893,7 +9935,7 @@
           <p:nvPr>
             <p:extLst>
               <p:ext uri="{D42A27DB-BD31-4B8C-83A1-F6EECF244321}">
-                <p14:modId xmlns:p14="http://schemas.microsoft.com/office/powerpoint/2010/main" val="310347702"/>
+                <p14:modId xmlns:p14="http://schemas.microsoft.com/office/powerpoint/2010/main" val="3146201057"/>
               </p:ext>
             </p:extLst>
           </p:nvPr>
@@ -9918,6 +9960,259 @@
   <p:clrMapOvr>
     <a:masterClrMapping/>
   </p:clrMapOvr>
+  <p:timing>
+    <p:tnLst>
+      <p:par>
+        <p:cTn id="1" dur="indefinite" restart="never" nodeType="tmRoot">
+          <p:childTnLst>
+            <p:seq concurrent="1" nextAc="seek">
+              <p:cTn id="2" dur="indefinite" nodeType="mainSeq">
+                <p:childTnLst>
+                  <p:par>
+                    <p:cTn id="3" fill="hold">
+                      <p:stCondLst>
+                        <p:cond delay="indefinite"/>
+                      </p:stCondLst>
+                      <p:childTnLst>
+                        <p:par>
+                          <p:cTn id="4" fill="hold">
+                            <p:stCondLst>
+                              <p:cond delay="0"/>
+                            </p:stCondLst>
+                            <p:childTnLst>
+                              <p:par>
+                                <p:cTn id="5" presetID="1" presetClass="entr" presetSubtype="0" fill="hold" nodeType="clickEffect">
+                                  <p:stCondLst>
+                                    <p:cond delay="0"/>
+                                  </p:stCondLst>
+                                  <p:childTnLst>
+                                    <p:set>
+                                      <p:cBhvr>
+                                        <p:cTn id="6" dur="1" fill="hold">
+                                          <p:stCondLst>
+                                            <p:cond delay="0"/>
+                                          </p:stCondLst>
+                                        </p:cTn>
+                                        <p:tgtEl>
+                                          <p:spTgt spid="3">
+                                            <p:txEl>
+                                              <p:pRg st="2" end="2"/>
+                                            </p:txEl>
+                                          </p:spTgt>
+                                        </p:tgtEl>
+                                        <p:attrNameLst>
+                                          <p:attrName>style.visibility</p:attrName>
+                                        </p:attrNameLst>
+                                      </p:cBhvr>
+                                      <p:to>
+                                        <p:strVal val="visible"/>
+                                      </p:to>
+                                    </p:set>
+                                  </p:childTnLst>
+                                </p:cTn>
+                              </p:par>
+                              <p:par>
+                                <p:cTn id="7" presetID="1" presetClass="entr" presetSubtype="0" fill="hold" nodeType="withEffect">
+                                  <p:stCondLst>
+                                    <p:cond delay="0"/>
+                                  </p:stCondLst>
+                                  <p:childTnLst>
+                                    <p:set>
+                                      <p:cBhvr>
+                                        <p:cTn id="8" dur="1" fill="hold">
+                                          <p:stCondLst>
+                                            <p:cond delay="0"/>
+                                          </p:stCondLst>
+                                        </p:cTn>
+                                        <p:tgtEl>
+                                          <p:spTgt spid="3">
+                                            <p:txEl>
+                                              <p:pRg st="3" end="3"/>
+                                            </p:txEl>
+                                          </p:spTgt>
+                                        </p:tgtEl>
+                                        <p:attrNameLst>
+                                          <p:attrName>style.visibility</p:attrName>
+                                        </p:attrNameLst>
+                                      </p:cBhvr>
+                                      <p:to>
+                                        <p:strVal val="visible"/>
+                                      </p:to>
+                                    </p:set>
+                                  </p:childTnLst>
+                                </p:cTn>
+                              </p:par>
+                              <p:par>
+                                <p:cTn id="9" presetID="1" presetClass="entr" presetSubtype="0" fill="hold" nodeType="withEffect">
+                                  <p:stCondLst>
+                                    <p:cond delay="0"/>
+                                  </p:stCondLst>
+                                  <p:childTnLst>
+                                    <p:set>
+                                      <p:cBhvr>
+                                        <p:cTn id="10" dur="1" fill="hold">
+                                          <p:stCondLst>
+                                            <p:cond delay="0"/>
+                                          </p:stCondLst>
+                                        </p:cTn>
+                                        <p:tgtEl>
+                                          <p:spTgt spid="3">
+                                            <p:txEl>
+                                              <p:pRg st="4" end="4"/>
+                                            </p:txEl>
+                                          </p:spTgt>
+                                        </p:tgtEl>
+                                        <p:attrNameLst>
+                                          <p:attrName>style.visibility</p:attrName>
+                                        </p:attrNameLst>
+                                      </p:cBhvr>
+                                      <p:to>
+                                        <p:strVal val="visible"/>
+                                      </p:to>
+                                    </p:set>
+                                  </p:childTnLst>
+                                </p:cTn>
+                              </p:par>
+                              <p:par>
+                                <p:cTn id="11" presetID="1" presetClass="entr" presetSubtype="0" fill="hold" nodeType="withEffect">
+                                  <p:stCondLst>
+                                    <p:cond delay="0"/>
+                                  </p:stCondLst>
+                                  <p:childTnLst>
+                                    <p:set>
+                                      <p:cBhvr>
+                                        <p:cTn id="12" dur="1" fill="hold">
+                                          <p:stCondLst>
+                                            <p:cond delay="0"/>
+                                          </p:stCondLst>
+                                        </p:cTn>
+                                        <p:tgtEl>
+                                          <p:spTgt spid="3">
+                                            <p:txEl>
+                                              <p:pRg st="5" end="5"/>
+                                            </p:txEl>
+                                          </p:spTgt>
+                                        </p:tgtEl>
+                                        <p:attrNameLst>
+                                          <p:attrName>style.visibility</p:attrName>
+                                        </p:attrNameLst>
+                                      </p:cBhvr>
+                                      <p:to>
+                                        <p:strVal val="visible"/>
+                                      </p:to>
+                                    </p:set>
+                                  </p:childTnLst>
+                                </p:cTn>
+                              </p:par>
+                              <p:par>
+                                <p:cTn id="13" presetID="1" presetClass="entr" presetSubtype="0" fill="hold" grpId="0" nodeType="withEffect">
+                                  <p:stCondLst>
+                                    <p:cond delay="0"/>
+                                  </p:stCondLst>
+                                  <p:childTnLst>
+                                    <p:set>
+                                      <p:cBhvr>
+                                        <p:cTn id="14" dur="1" fill="hold">
+                                          <p:stCondLst>
+                                            <p:cond delay="0"/>
+                                          </p:stCondLst>
+                                        </p:cTn>
+                                        <p:tgtEl>
+                                          <p:spTgt spid="5"/>
+                                        </p:tgtEl>
+                                        <p:attrNameLst>
+                                          <p:attrName>style.visibility</p:attrName>
+                                        </p:attrNameLst>
+                                      </p:cBhvr>
+                                      <p:to>
+                                        <p:strVal val="visible"/>
+                                      </p:to>
+                                    </p:set>
+                                  </p:childTnLst>
+                                </p:cTn>
+                              </p:par>
+                            </p:childTnLst>
+                          </p:cTn>
+                        </p:par>
+                      </p:childTnLst>
+                    </p:cTn>
+                  </p:par>
+                  <p:par>
+                    <p:cTn id="15" fill="hold">
+                      <p:stCondLst>
+                        <p:cond delay="indefinite"/>
+                      </p:stCondLst>
+                      <p:childTnLst>
+                        <p:par>
+                          <p:cTn id="16" fill="hold">
+                            <p:stCondLst>
+                              <p:cond delay="0"/>
+                            </p:stCondLst>
+                            <p:childTnLst>
+                              <p:par>
+                                <p:cTn id="17" presetID="1" presetClass="entr" presetSubtype="0" fill="hold" nodeType="clickEffect">
+                                  <p:stCondLst>
+                                    <p:cond delay="0"/>
+                                  </p:stCondLst>
+                                  <p:childTnLst>
+                                    <p:set>
+                                      <p:cBhvr>
+                                        <p:cTn id="18" dur="1" fill="hold">
+                                          <p:stCondLst>
+                                            <p:cond delay="0"/>
+                                          </p:stCondLst>
+                                        </p:cTn>
+                                        <p:tgtEl>
+                                          <p:spTgt spid="3">
+                                            <p:txEl>
+                                              <p:pRg st="7" end="7"/>
+                                            </p:txEl>
+                                          </p:spTgt>
+                                        </p:tgtEl>
+                                        <p:attrNameLst>
+                                          <p:attrName>style.visibility</p:attrName>
+                                        </p:attrNameLst>
+                                      </p:cBhvr>
+                                      <p:to>
+                                        <p:strVal val="visible"/>
+                                      </p:to>
+                                    </p:set>
+                                  </p:childTnLst>
+                                </p:cTn>
+                              </p:par>
+                            </p:childTnLst>
+                          </p:cTn>
+                        </p:par>
+                      </p:childTnLst>
+                    </p:cTn>
+                  </p:par>
+                </p:childTnLst>
+              </p:cTn>
+              <p:prevCondLst>
+                <p:cond evt="onPrev" delay="0">
+                  <p:tgtEl>
+                    <p:sldTgt/>
+                  </p:tgtEl>
+                </p:cond>
+              </p:prevCondLst>
+              <p:nextCondLst>
+                <p:cond evt="onNext" delay="0">
+                  <p:tgtEl>
+                    <p:sldTgt/>
+                  </p:tgtEl>
+                </p:cond>
+              </p:nextCondLst>
+            </p:seq>
+          </p:childTnLst>
+        </p:cTn>
+      </p:par>
+    </p:tnLst>
+    <p:bldLst>
+      <p:bldGraphic spid="5" grpId="0">
+        <p:bldAsOne/>
+      </p:bldGraphic>
+    </p:bldLst>
+  </p:timing>
 </p:sld>
 </file>
 
@@ -9961,7 +10256,7 @@
           <a:p>
             <a:r>
               <a:rPr lang="en-US" dirty="0"/>
-              <a:t>Related Technique: Robust RL</a:t>
+              <a:t>Robust RL</a:t>
             </a:r>
           </a:p>
         </p:txBody>
@@ -10000,21 +10295,29 @@
             </a:r>
             <a:r>
               <a:rPr lang="en-US" dirty="0"/>
-              <a:t>: Standard RL often assumes the environment is fixed and perfectly known. This fails often:</a:t>
+              <a:t>: Standard RL often assumes the environment is fixed and perfectly known. This often fails:</a:t>
             </a:r>
           </a:p>
           <a:p>
             <a:pPr lvl="1"/>
             <a:r>
+              <a:rPr lang="en-US" b="1" dirty="0"/>
+              <a:t>Sim-to-Real Gap</a:t>
+            </a:r>
+            <a:r>
               <a:rPr lang="en-US" dirty="0"/>
-              <a:t>Sim-to-Real Gap: Slight differences in friction, sensor noise, or wind result in performance drops when transitioning from a training simulator to a physical robot.</a:t>
+              <a:t>: Slight differences in friction, sensor noise, or wind result in performance drops when transitioning from a training simulator to a physical robot.</a:t>
             </a:r>
           </a:p>
           <a:p>
             <a:pPr lvl="1"/>
             <a:r>
+              <a:rPr lang="en-US" b="1" dirty="0"/>
+              <a:t>Overfitting</a:t>
+            </a:r>
+            <a:r>
               <a:rPr lang="en-US" dirty="0"/>
-              <a:t>Overfitting: Standard agents often over-optimize for the exact distribution of training scenarios, performing poorly during unexpected changes.</a:t>
+              <a:t>: Standard agents often over-optimize for the exact distribution of training scenarios, performing poorly during unexpected changes.</a:t>
             </a:r>
           </a:p>
           <a:p>
@@ -10035,7 +10338,7 @@
             </a:r>
             <a:r>
               <a:rPr lang="en-US" dirty="0"/>
-              <a:t>(RMDPs): Instead of optimizing for a single, environment, the agent is trained on an uncertainty set. Identify a policy that performs well under the worst model in the set.</a:t>
+              <a:t>(RMDPs): Instead of optimizing for a single environment, the agent is trained on an uncertainty set. Identify a policy that performs well under the worst environments in the set.</a:t>
             </a:r>
           </a:p>
           <a:p>
@@ -10046,7 +10349,7 @@
             </a:r>
             <a:r>
               <a:rPr lang="en-US" dirty="0"/>
-              <a:t>: Modeled as a two-player zero-sum game. The agent aims to maximize rewards, while an environment adversary simultaneously attempts to tweak dynamics or observations to minimize the agent's reward.</a:t>
+              <a:t>: Modeled as a two-player zero-sum game. The agent aims to maximize rewards, while an adversarial environment simultaneously attempts to tweak dynamics or observations to minimize the agent's reward.</a:t>
             </a:r>
           </a:p>
           <a:p>
@@ -10168,6 +10471,178 @@
   <p:clrMapOvr>
     <a:masterClrMapping/>
   </p:clrMapOvr>
+  <p:timing>
+    <p:tnLst>
+      <p:par>
+        <p:cTn id="1" dur="indefinite" restart="never" nodeType="tmRoot">
+          <p:childTnLst>
+            <p:seq concurrent="1" nextAc="seek">
+              <p:cTn id="2" dur="indefinite" nodeType="mainSeq">
+                <p:childTnLst>
+                  <p:par>
+                    <p:cTn id="3" fill="hold">
+                      <p:stCondLst>
+                        <p:cond delay="indefinite"/>
+                      </p:stCondLst>
+                      <p:childTnLst>
+                        <p:par>
+                          <p:cTn id="4" fill="hold">
+                            <p:stCondLst>
+                              <p:cond delay="0"/>
+                            </p:stCondLst>
+                            <p:childTnLst>
+                              <p:par>
+                                <p:cTn id="5" presetID="1" presetClass="entr" presetSubtype="0" fill="hold" nodeType="clickEffect">
+                                  <p:stCondLst>
+                                    <p:cond delay="0"/>
+                                  </p:stCondLst>
+                                  <p:childTnLst>
+                                    <p:set>
+                                      <p:cBhvr>
+                                        <p:cTn id="6" dur="1" fill="hold">
+                                          <p:stCondLst>
+                                            <p:cond delay="0"/>
+                                          </p:stCondLst>
+                                        </p:cTn>
+                                        <p:tgtEl>
+                                          <p:spTgt spid="3">
+                                            <p:txEl>
+                                              <p:pRg st="3" end="3"/>
+                                            </p:txEl>
+                                          </p:spTgt>
+                                        </p:tgtEl>
+                                        <p:attrNameLst>
+                                          <p:attrName>style.visibility</p:attrName>
+                                        </p:attrNameLst>
+                                      </p:cBhvr>
+                                      <p:to>
+                                        <p:strVal val="visible"/>
+                                      </p:to>
+                                    </p:set>
+                                  </p:childTnLst>
+                                </p:cTn>
+                              </p:par>
+                              <p:par>
+                                <p:cTn id="7" presetID="1" presetClass="entr" presetSubtype="0" fill="hold" nodeType="withEffect">
+                                  <p:stCondLst>
+                                    <p:cond delay="0"/>
+                                  </p:stCondLst>
+                                  <p:childTnLst>
+                                    <p:set>
+                                      <p:cBhvr>
+                                        <p:cTn id="8" dur="1" fill="hold">
+                                          <p:stCondLst>
+                                            <p:cond delay="0"/>
+                                          </p:stCondLst>
+                                        </p:cTn>
+                                        <p:tgtEl>
+                                          <p:spTgt spid="3">
+                                            <p:txEl>
+                                              <p:pRg st="4" end="4"/>
+                                            </p:txEl>
+                                          </p:spTgt>
+                                        </p:tgtEl>
+                                        <p:attrNameLst>
+                                          <p:attrName>style.visibility</p:attrName>
+                                        </p:attrNameLst>
+                                      </p:cBhvr>
+                                      <p:to>
+                                        <p:strVal val="visible"/>
+                                      </p:to>
+                                    </p:set>
+                                  </p:childTnLst>
+                                </p:cTn>
+                              </p:par>
+                              <p:par>
+                                <p:cTn id="9" presetID="1" presetClass="entr" presetSubtype="0" fill="hold" nodeType="withEffect">
+                                  <p:stCondLst>
+                                    <p:cond delay="0"/>
+                                  </p:stCondLst>
+                                  <p:childTnLst>
+                                    <p:set>
+                                      <p:cBhvr>
+                                        <p:cTn id="10" dur="1" fill="hold">
+                                          <p:stCondLst>
+                                            <p:cond delay="0"/>
+                                          </p:stCondLst>
+                                        </p:cTn>
+                                        <p:tgtEl>
+                                          <p:spTgt spid="3">
+                                            <p:txEl>
+                                              <p:pRg st="5" end="5"/>
+                                            </p:txEl>
+                                          </p:spTgt>
+                                        </p:tgtEl>
+                                        <p:attrNameLst>
+                                          <p:attrName>style.visibility</p:attrName>
+                                        </p:attrNameLst>
+                                      </p:cBhvr>
+                                      <p:to>
+                                        <p:strVal val="visible"/>
+                                      </p:to>
+                                    </p:set>
+                                  </p:childTnLst>
+                                </p:cTn>
+                              </p:par>
+                              <p:par>
+                                <p:cTn id="11" presetID="1" presetClass="entr" presetSubtype="0" fill="hold" nodeType="withEffect">
+                                  <p:stCondLst>
+                                    <p:cond delay="0"/>
+                                  </p:stCondLst>
+                                  <p:childTnLst>
+                                    <p:set>
+                                      <p:cBhvr>
+                                        <p:cTn id="12" dur="1" fill="hold">
+                                          <p:stCondLst>
+                                            <p:cond delay="0"/>
+                                          </p:stCondLst>
+                                        </p:cTn>
+                                        <p:tgtEl>
+                                          <p:spTgt spid="3">
+                                            <p:txEl>
+                                              <p:pRg st="6" end="6"/>
+                                            </p:txEl>
+                                          </p:spTgt>
+                                        </p:tgtEl>
+                                        <p:attrNameLst>
+                                          <p:attrName>style.visibility</p:attrName>
+                                        </p:attrNameLst>
+                                      </p:cBhvr>
+                                      <p:to>
+                                        <p:strVal val="visible"/>
+                                      </p:to>
+                                    </p:set>
+                                  </p:childTnLst>
+                                </p:cTn>
+                              </p:par>
+                            </p:childTnLst>
+                          </p:cTn>
+                        </p:par>
+                      </p:childTnLst>
+                    </p:cTn>
+                  </p:par>
+                </p:childTnLst>
+              </p:cTn>
+              <p:prevCondLst>
+                <p:cond evt="onPrev" delay="0">
+                  <p:tgtEl>
+                    <p:sldTgt/>
+                  </p:tgtEl>
+                </p:cond>
+              </p:prevCondLst>
+              <p:nextCondLst>
+                <p:cond evt="onNext" delay="0">
+                  <p:tgtEl>
+                    <p:sldTgt/>
+                  </p:tgtEl>
+                </p:cond>
+              </p:nextCondLst>
+            </p:seq>
+          </p:childTnLst>
+        </p:cTn>
+      </p:par>
+    </p:tnLst>
+  </p:timing>
 </p:sld>
 </file>
 
@@ -10378,7 +10853,7 @@
           <a:p>
             <a:r>
               <a:rPr lang="en-US" sz="2400" dirty="0"/>
-              <a:t>Be able to explain how changing the reward structure affects RL:</a:t>
+              <a:t>Explain how changing the reward structure affects learning in RL:</a:t>
             </a:r>
           </a:p>
           <a:p>
@@ -10402,14 +10877,14 @@
           <a:p>
             <a:r>
               <a:rPr lang="en-US" sz="2400" dirty="0"/>
-              <a:t>Understand the basic concepts of:</a:t>
+              <a:t>Understand the basic concepts</a:t>
             </a:r>
           </a:p>
           <a:p>
             <a:pPr lvl="1"/>
             <a:r>
               <a:rPr lang="en-US" sz="1800" dirty="0"/>
-              <a:t>Extrinsic vs. extrinsic reward</a:t>
+              <a:t>Extrinsic vs. intrinsic reward</a:t>
             </a:r>
           </a:p>
           <a:p>
@@ -10437,7 +10912,7 @@
             <a:pPr lvl="1"/>
             <a:r>
               <a:rPr lang="en-US" sz="1800" dirty="0"/>
-              <a:t>Inverse RL</a:t>
+              <a:t>Inverse RL, curriculum learning, and robust RL</a:t>
             </a:r>
           </a:p>
           <a:p>
@@ -10463,7 +10938,7 @@
             <a:pPr lvl="1"/>
             <a:r>
               <a:rPr lang="en-US" sz="1800" dirty="0"/>
-              <a:t>When the engineered reward overwriting the true objective.</a:t>
+              <a:t>When the engineered reward overwrites the true objective.</a:t>
             </a:r>
           </a:p>
           <a:p>
@@ -10835,12 +11310,12 @@
           <a:p>
             <a:pPr algn="ctr"/>
             <a:r>
-              <a:rPr lang="en-US">
+              <a:rPr lang="en-US" dirty="0">
                 <a:solidFill>
                   <a:srgbClr val="FFFFFF"/>
                 </a:solidFill>
               </a:rPr>
-              <a:t>Problem Types and Reward</a:t>
+              <a:t>Reward Engineering</a:t>
             </a:r>
           </a:p>
         </p:txBody>
@@ -10863,8 +11338,8 @@
         </p:nvSpPr>
         <p:spPr>
           <a:xfrm>
-            <a:off x="1524000" y="4159404"/>
-            <a:ext cx="9144000" cy="1098395"/>
+            <a:off x="6630572" y="4398555"/>
+            <a:ext cx="4037428" cy="1098395"/>
           </a:xfrm>
         </p:spPr>
         <p:txBody>
@@ -10874,11 +11349,14 @@
           <a:lstStyle/>
           <a:p>
             <a:pPr algn="ctr"/>
-            <a:endParaRPr lang="en-US">
-              <a:solidFill>
-                <a:srgbClr val="FFFFFF"/>
-              </a:solidFill>
-            </a:endParaRPr>
+            <a:r>
+              <a:rPr lang="en-US" dirty="0">
+                <a:solidFill>
+                  <a:srgbClr val="FFFFFF"/>
+                </a:solidFill>
+              </a:rPr>
+              <a:t>Defining rewards is the single most important task in RL!</a:t>
+            </a:r>
           </a:p>
         </p:txBody>
       </p:sp>
@@ -14570,8 +15048,8 @@
         </p:nvSpPr>
         <p:spPr>
           <a:xfrm>
-            <a:off x="3409070" y="4159404"/>
-            <a:ext cx="7258929" cy="1098395"/>
+            <a:off x="6644639" y="4239121"/>
+            <a:ext cx="5008099" cy="1098395"/>
           </a:xfrm>
         </p:spPr>
         <p:txBody>

--- a/slides/Lecture_Reward_Engineering.pptx
+++ b/slides/Lecture_Reward_Engineering.pptx
@@ -124,7 +124,7 @@
   <p:extLst>
     <p:ext uri="{521415D9-36F7-43E2-AB2F-B90AF26B5E84}">
       <p14:sectionLst xmlns:p14="http://schemas.microsoft.com/office/powerpoint/2010/main">
-        <p14:section name="Default Section" id="{83286E67-F0F0-421C-8F74-7B93ABA17FBF}">
+        <p14:section name="Reward Engineering" id="{83286E67-F0F0-421C-8F74-7B93ABA17FBF}">
           <p14:sldIdLst>
             <p14:sldId id="256"/>
             <p14:sldId id="313"/>
@@ -1280,7 +1280,7 @@
   <dgm:whole/>
   <dgm:extLst>
     <a:ext uri="http://schemas.microsoft.com/office/drawing/2008/diagram">
-      <dsp:dataModelExt xmlns:dsp="http://schemas.microsoft.com/office/drawing/2008/diagram" relId="rId7" minVer="http://schemas.openxmlformats.org/drawingml/2006/diagram"/>
+      <dsp:dataModelExt xmlns:dsp="http://schemas.microsoft.com/office/drawing/2008/diagram" relId="rId6" minVer="http://schemas.openxmlformats.org/drawingml/2006/diagram"/>
     </a:ext>
   </dgm:extLst>
 </dgm:dataModel>
@@ -2824,7 +2824,7 @@
           <a:p>
             <a:fld id="{2A92B22A-BE2A-43CB-B312-FF3A0A14567B}" type="datetimeFigureOut">
               <a:rPr lang="en-US" smtClean="0"/>
-              <a:t>9/28/2026</a:t>
+              <a:t>10/15/26</a:t>
             </a:fld>
             <a:endParaRPr lang="en-US"/>
           </a:p>
@@ -3238,7 +3238,7 @@
           <a:p>
             <a:fld id="{3E22BF2E-04DA-469E-97C5-BB68A0368813}" type="datetimeFigureOut">
               <a:rPr lang="en-US" smtClean="0"/>
-              <a:t>9/28/2026</a:t>
+              <a:t>10/15/26</a:t>
             </a:fld>
             <a:endParaRPr lang="en-US"/>
           </a:p>
@@ -3436,7 +3436,7 @@
           <a:p>
             <a:fld id="{3E22BF2E-04DA-469E-97C5-BB68A0368813}" type="datetimeFigureOut">
               <a:rPr lang="en-US" smtClean="0"/>
-              <a:t>9/28/2026</a:t>
+              <a:t>10/15/26</a:t>
             </a:fld>
             <a:endParaRPr lang="en-US"/>
           </a:p>
@@ -3644,7 +3644,7 @@
           <a:p>
             <a:fld id="{3E22BF2E-04DA-469E-97C5-BB68A0368813}" type="datetimeFigureOut">
               <a:rPr lang="en-US" smtClean="0"/>
-              <a:t>9/28/2026</a:t>
+              <a:t>10/15/26</a:t>
             </a:fld>
             <a:endParaRPr lang="en-US"/>
           </a:p>
@@ -3852,7 +3852,7 @@
           <a:p>
             <a:fld id="{3E22BF2E-04DA-469E-97C5-BB68A0368813}" type="datetimeFigureOut">
               <a:rPr lang="en-US" smtClean="0"/>
-              <a:t>9/28/2026</a:t>
+              <a:t>10/15/26</a:t>
             </a:fld>
             <a:endParaRPr lang="en-US"/>
           </a:p>
@@ -4127,7 +4127,7 @@
           <a:p>
             <a:fld id="{3E22BF2E-04DA-469E-97C5-BB68A0368813}" type="datetimeFigureOut">
               <a:rPr lang="en-US" smtClean="0"/>
-              <a:t>9/28/2026</a:t>
+              <a:t>10/15/26</a:t>
             </a:fld>
             <a:endParaRPr lang="en-US"/>
           </a:p>
@@ -4392,7 +4392,7 @@
           <a:p>
             <a:fld id="{3E22BF2E-04DA-469E-97C5-BB68A0368813}" type="datetimeFigureOut">
               <a:rPr lang="en-US" smtClean="0"/>
-              <a:t>9/28/2026</a:t>
+              <a:t>10/15/26</a:t>
             </a:fld>
             <a:endParaRPr lang="en-US"/>
           </a:p>
@@ -4804,7 +4804,7 @@
           <a:p>
             <a:fld id="{3E22BF2E-04DA-469E-97C5-BB68A0368813}" type="datetimeFigureOut">
               <a:rPr lang="en-US" smtClean="0"/>
-              <a:t>9/28/2026</a:t>
+              <a:t>10/15/26</a:t>
             </a:fld>
             <a:endParaRPr lang="en-US"/>
           </a:p>
@@ -4945,7 +4945,7 @@
           <a:p>
             <a:fld id="{3E22BF2E-04DA-469E-97C5-BB68A0368813}" type="datetimeFigureOut">
               <a:rPr lang="en-US" smtClean="0"/>
-              <a:t>9/28/2026</a:t>
+              <a:t>10/15/26</a:t>
             </a:fld>
             <a:endParaRPr lang="en-US"/>
           </a:p>
@@ -5058,7 +5058,7 @@
           <a:p>
             <a:fld id="{3E22BF2E-04DA-469E-97C5-BB68A0368813}" type="datetimeFigureOut">
               <a:rPr lang="en-US" smtClean="0"/>
-              <a:t>9/28/2026</a:t>
+              <a:t>10/15/26</a:t>
             </a:fld>
             <a:endParaRPr lang="en-US"/>
           </a:p>
@@ -5369,7 +5369,7 @@
           <a:p>
             <a:fld id="{3E22BF2E-04DA-469E-97C5-BB68A0368813}" type="datetimeFigureOut">
               <a:rPr lang="en-US" smtClean="0"/>
-              <a:t>9/28/2026</a:t>
+              <a:t>10/15/26</a:t>
             </a:fld>
             <a:endParaRPr lang="en-US"/>
           </a:p>
@@ -5657,7 +5657,7 @@
           <a:p>
             <a:fld id="{3E22BF2E-04DA-469E-97C5-BB68A0368813}" type="datetimeFigureOut">
               <a:rPr lang="en-US" smtClean="0"/>
-              <a:t>9/28/2026</a:t>
+              <a:t>10/15/26</a:t>
             </a:fld>
             <a:endParaRPr lang="en-US"/>
           </a:p>
@@ -5898,7 +5898,7 @@
           <a:p>
             <a:fld id="{3E22BF2E-04DA-469E-97C5-BB68A0368813}" type="datetimeFigureOut">
               <a:rPr lang="en-US" smtClean="0"/>
-              <a:t>9/28/2026</a:t>
+              <a:t>10/15/26</a:t>
             </a:fld>
             <a:endParaRPr lang="en-US"/>
           </a:p>
@@ -6521,6 +6521,9 @@
               <a:ext uri="{FF2B5EF4-FFF2-40B4-BE49-F238E27FC236}">
                 <a16:creationId xmlns:a16="http://schemas.microsoft.com/office/drawing/2014/main" id="{A51EE42B-57B4-EB74-A37C-6675858E7D29}"/>
               </a:ext>
+              <a:ext uri="{C183D7F6-B498-43B3-948B-1728B52AA6E4}">
+                <adec:decorative xmlns:adec="http://schemas.microsoft.com/office/drawing/2017/decorative" val="1"/>
+              </a:ext>
             </a:extLst>
           </p:cNvPr>
           <p:cNvSpPr>
@@ -6610,81 +6613,6 @@
                 </a:solidFill>
               </a:rPr>
               <a:t>and other sources</a:t>
-            </a:r>
-          </a:p>
-        </p:txBody>
-      </p:sp>
-      <p:sp>
-        <p:nvSpPr>
-          <p:cNvPr id="3" name="Subtitle 2">
-            <a:extLst>
-              <a:ext uri="{FF2B5EF4-FFF2-40B4-BE49-F238E27FC236}">
-                <a16:creationId xmlns:a16="http://schemas.microsoft.com/office/drawing/2014/main" id="{7FFF10C2-8C10-0E89-D285-D614C36EEE69}"/>
-              </a:ext>
-            </a:extLst>
-          </p:cNvPr>
-          <p:cNvSpPr>
-            <a:spLocks noGrp="1"/>
-          </p:cNvSpPr>
-          <p:nvPr>
-            <p:ph type="subTitle" idx="1"/>
-          </p:nvPr>
-        </p:nvSpPr>
-        <p:spPr>
-          <a:xfrm>
-            <a:off x="477982" y="4546920"/>
-            <a:ext cx="5266684" cy="1968214"/>
-          </a:xfrm>
-        </p:spPr>
-        <p:txBody>
-          <a:bodyPr>
-            <a:normAutofit/>
-          </a:bodyPr>
-          <a:lstStyle/>
-          <a:p>
-            <a:pPr algn="l"/>
-            <a:r>
-              <a:rPr lang="en-US" sz="1700" dirty="0">
-                <a:solidFill>
-                  <a:schemeClr val="bg1"/>
-                </a:solidFill>
-              </a:rPr>
-              <a:t>Michael Hahsler, SMU</a:t>
-            </a:r>
-          </a:p>
-          <a:p>
-            <a:pPr algn="l"/>
-            <a:endParaRPr lang="en-US" sz="1300" dirty="0">
-              <a:solidFill>
-                <a:schemeClr val="bg1"/>
-              </a:solidFill>
-            </a:endParaRPr>
-          </a:p>
-          <a:p>
-            <a:pPr algn="l"/>
-            <a:r>
-              <a:rPr lang="en-US" sz="1300" dirty="0">
-                <a:solidFill>
-                  <a:schemeClr val="bg1"/>
-                </a:solidFill>
-              </a:rPr>
-              <a:t>*Sutton and Barto, Reinforcement Learning: An Introduction, 2</a:t>
-            </a:r>
-            <a:r>
-              <a:rPr lang="en-US" sz="1300" baseline="30000" dirty="0">
-                <a:solidFill>
-                  <a:schemeClr val="bg1"/>
-                </a:solidFill>
-              </a:rPr>
-              <a:t>nd</a:t>
-            </a:r>
-            <a:r>
-              <a:rPr lang="en-US" sz="1300" dirty="0">
-                <a:solidFill>
-                  <a:schemeClr val="bg1"/>
-                </a:solidFill>
-              </a:rPr>
-              <a:t> edition, MIT Press, Cambridge, MA, 2018</a:t>
             </a:r>
           </a:p>
         </p:txBody>
@@ -6754,6 +6682,134 @@
               </a:solidFill>
               <a:latin typeface="Calibri" panose="020F0502020204030204"/>
             </a:endParaRPr>
+          </a:p>
+        </p:txBody>
+      </p:sp>
+      <p:pic>
+        <p:nvPicPr>
+          <p:cNvPr id="6" name="Picture 5">
+            <a:extLst>
+              <a:ext uri="{FF2B5EF4-FFF2-40B4-BE49-F238E27FC236}">
+                <a16:creationId xmlns:a16="http://schemas.microsoft.com/office/drawing/2014/main" id="{8AD28C7D-14A3-CFEB-3DEC-2E01272844F2}"/>
+              </a:ext>
+              <a:ext uri="{C183D7F6-B498-43B3-948B-1728B52AA6E4}">
+                <adec:decorative xmlns:adec="http://schemas.microsoft.com/office/drawing/2017/decorative" val="1"/>
+              </a:ext>
+            </a:extLst>
+          </p:cNvPr>
+          <p:cNvPicPr>
+            <a:picLocks noChangeAspect="1" noChangeArrowheads="1"/>
+          </p:cNvPicPr>
+          <p:nvPr/>
+        </p:nvPicPr>
+        <p:blipFill>
+          <a:blip r:embed="rId3">
+            <a:extLst>
+              <a:ext uri="{28A0092B-C50C-407E-A947-70E740481C1C}">
+                <a14:useLocalDpi xmlns:a14="http://schemas.microsoft.com/office/drawing/2010/main" val="0"/>
+              </a:ext>
+            </a:extLst>
+          </a:blip>
+          <a:srcRect/>
+          <a:stretch>
+            <a:fillRect/>
+          </a:stretch>
+        </p:blipFill>
+        <p:spPr bwMode="auto">
+          <a:xfrm>
+            <a:off x="7857741" y="198362"/>
+            <a:ext cx="4182403" cy="1000945"/>
+          </a:xfrm>
+          <a:prstGeom prst="rect">
+            <a:avLst/>
+          </a:prstGeom>
+          <a:noFill/>
+          <a:extLst>
+            <a:ext uri="{909E8E84-426E-40DD-AFC4-6F175D3DCCD1}">
+              <a14:hiddenFill xmlns:a14="http://schemas.microsoft.com/office/drawing/2010/main">
+                <a:solidFill>
+                  <a:srgbClr val="FFFFFF"/>
+                </a:solidFill>
+              </a14:hiddenFill>
+            </a:ext>
+          </a:extLst>
+        </p:spPr>
+      </p:pic>
+      <p:sp>
+        <p:nvSpPr>
+          <p:cNvPr id="3" name="Subtitle 2">
+            <a:extLst>
+              <a:ext uri="{FF2B5EF4-FFF2-40B4-BE49-F238E27FC236}">
+                <a16:creationId xmlns:a16="http://schemas.microsoft.com/office/drawing/2014/main" id="{7FFF10C2-8C10-0E89-D285-D614C36EEE69}"/>
+              </a:ext>
+              <a:ext uri="{C183D7F6-B498-43B3-948B-1728B52AA6E4}">
+                <adec:decorative xmlns:adec="http://schemas.microsoft.com/office/drawing/2017/decorative" val="1"/>
+              </a:ext>
+            </a:extLst>
+          </p:cNvPr>
+          <p:cNvSpPr>
+            <a:spLocks noGrp="1"/>
+          </p:cNvSpPr>
+          <p:nvPr>
+            <p:ph type="subTitle" idx="1"/>
+          </p:nvPr>
+        </p:nvSpPr>
+        <p:spPr>
+          <a:xfrm>
+            <a:off x="477982" y="4546920"/>
+            <a:ext cx="5266684" cy="1968214"/>
+          </a:xfrm>
+        </p:spPr>
+        <p:txBody>
+          <a:bodyPr>
+            <a:normAutofit/>
+          </a:bodyPr>
+          <a:lstStyle/>
+          <a:p>
+            <a:pPr algn="l"/>
+            <a:r>
+              <a:rPr lang="en-US" sz="1700" dirty="0">
+                <a:solidFill>
+                  <a:schemeClr val="bg1"/>
+                </a:solidFill>
+              </a:rPr>
+              <a:t>Michael Hahsler, SMU</a:t>
+            </a:r>
+          </a:p>
+          <a:p>
+            <a:pPr algn="l"/>
+            <a:endParaRPr lang="en-US" sz="1300" dirty="0">
+              <a:solidFill>
+                <a:schemeClr val="bg1"/>
+              </a:solidFill>
+            </a:endParaRPr>
+          </a:p>
+          <a:p>
+            <a:pPr algn="l"/>
+            <a:r>
+              <a:rPr lang="en-US" sz="1300" dirty="0">
+                <a:solidFill>
+                  <a:schemeClr val="bg1"/>
+                </a:solidFill>
+              </a:rPr>
+              <a:t>*Sutton and Barto, Reinforcement Learning: An Introduction, 2</a:t>
+            </a:r>
+            <a:r>
+              <a:rPr lang="en-US" sz="1300" baseline="30000" dirty="0">
+                <a:solidFill>
+                  <a:schemeClr val="bg1"/>
+                </a:solidFill>
+              </a:rPr>
+              <a:t>nd</a:t>
+            </a:r>
+            <a:r>
+              <a:rPr lang="en-US" sz="1300" dirty="0">
+                <a:solidFill>
+                  <a:schemeClr val="bg1"/>
+                </a:solidFill>
+              </a:rPr>
+              <a:t> edition, MIT Press, Cambridge, MA, 2018</a:t>
+            </a:r>
           </a:p>
         </p:txBody>
       </p:sp>
@@ -6850,88 +6906,15 @@
           </a:p>
         </p:txBody>
       </p:sp>
-      <p:pic>
-        <p:nvPicPr>
-          <p:cNvPr id="4" name="object 23">
-            <a:hlinkClick r:id="rId3"/>
-            <a:extLst>
-              <a:ext uri="{FF2B5EF4-FFF2-40B4-BE49-F238E27FC236}">
-                <a16:creationId xmlns:a16="http://schemas.microsoft.com/office/drawing/2014/main" id="{3CBD6548-3D4E-9A40-CA35-355261D4E92C}"/>
-              </a:ext>
-            </a:extLst>
-          </p:cNvPr>
-          <p:cNvPicPr/>
-          <p:nvPr/>
-        </p:nvPicPr>
-        <p:blipFill>
-          <a:blip r:embed="rId4" cstate="print"/>
-          <a:stretch>
-            <a:fillRect/>
-          </a:stretch>
-        </p:blipFill>
-        <p:spPr>
-          <a:xfrm>
-            <a:off x="10961016" y="6265038"/>
-            <a:ext cx="1037459" cy="383579"/>
-          </a:xfrm>
-          <a:prstGeom prst="rect">
-            <a:avLst/>
-          </a:prstGeom>
-        </p:spPr>
-      </p:pic>
-      <p:pic>
-        <p:nvPicPr>
-          <p:cNvPr id="6" name="Picture 5">
-            <a:extLst>
-              <a:ext uri="{FF2B5EF4-FFF2-40B4-BE49-F238E27FC236}">
-                <a16:creationId xmlns:a16="http://schemas.microsoft.com/office/drawing/2014/main" id="{8AD28C7D-14A3-CFEB-3DEC-2E01272844F2}"/>
-              </a:ext>
-            </a:extLst>
-          </p:cNvPr>
-          <p:cNvPicPr>
-            <a:picLocks noChangeAspect="1" noChangeArrowheads="1"/>
-          </p:cNvPicPr>
-          <p:nvPr/>
-        </p:nvPicPr>
-        <p:blipFill>
-          <a:blip r:embed="rId5">
-            <a:extLst>
-              <a:ext uri="{28A0092B-C50C-407E-A947-70E740481C1C}">
-                <a14:useLocalDpi xmlns:a14="http://schemas.microsoft.com/office/drawing/2010/main" val="0"/>
-              </a:ext>
-            </a:extLst>
-          </a:blip>
-          <a:srcRect/>
-          <a:stretch>
-            <a:fillRect/>
-          </a:stretch>
-        </p:blipFill>
-        <p:spPr bwMode="auto">
-          <a:xfrm>
-            <a:off x="7857741" y="198362"/>
-            <a:ext cx="4182403" cy="1000945"/>
-          </a:xfrm>
-          <a:prstGeom prst="rect">
-            <a:avLst/>
-          </a:prstGeom>
-          <a:noFill/>
-          <a:extLst>
-            <a:ext uri="{909E8E84-426E-40DD-AFC4-6F175D3DCCD1}">
-              <a14:hiddenFill xmlns:a14="http://schemas.microsoft.com/office/drawing/2010/main">
-                <a:solidFill>
-                  <a:srgbClr val="FFFFFF"/>
-                </a:solidFill>
-              </a14:hiddenFill>
-            </a:ext>
-          </a:extLst>
-        </p:spPr>
-      </p:pic>
       <p:grpSp>
         <p:nvGrpSpPr>
           <p:cNvPr id="7" name="Group 6">
             <a:extLst>
               <a:ext uri="{FF2B5EF4-FFF2-40B4-BE49-F238E27FC236}">
                 <a16:creationId xmlns:a16="http://schemas.microsoft.com/office/drawing/2014/main" id="{DA1C6744-BD97-2C10-F393-A0B726F71E7A}"/>
+              </a:ext>
+              <a:ext uri="{C183D7F6-B498-43B3-948B-1728B52AA6E4}">
+                <adec:decorative xmlns:adec="http://schemas.microsoft.com/office/drawing/2017/decorative" val="1"/>
               </a:ext>
             </a:extLst>
           </p:cNvPr>
@@ -6953,6 +6936,9 @@
                 <a:ext uri="{FF2B5EF4-FFF2-40B4-BE49-F238E27FC236}">
                   <a16:creationId xmlns:a16="http://schemas.microsoft.com/office/drawing/2014/main" id="{2F5FC233-1ACF-0EE9-5B1F-F0A29270EECF}"/>
                 </a:ext>
+                <a:ext uri="{C183D7F6-B498-43B3-948B-1728B52AA6E4}">
+                  <adec:decorative xmlns:adec="http://schemas.microsoft.com/office/drawing/2017/decorative" val="1"/>
+                </a:ext>
               </a:extLst>
             </p:cNvPr>
             <p:cNvPicPr>
@@ -6961,7 +6947,7 @@
             <p:nvPr/>
           </p:nvPicPr>
           <p:blipFill>
-            <a:blip r:embed="rId6"/>
+            <a:blip r:embed="rId4"/>
             <a:stretch>
               <a:fillRect/>
             </a:stretch>
@@ -6978,7 +6964,7 @@
         </p:pic>
         <p:pic>
           <p:nvPicPr>
-            <p:cNvPr id="9" name="Picture 8">
+            <p:cNvPr id="9" name="Picture 8" descr="QR code linking to the online course material.">
               <a:extLst>
                 <a:ext uri="{FF2B5EF4-FFF2-40B4-BE49-F238E27FC236}">
                   <a16:creationId xmlns:a16="http://schemas.microsoft.com/office/drawing/2014/main" id="{26CB3135-CE78-1137-FBA3-29AA8592D8FA}"/>
@@ -6991,7 +6977,7 @@
             <p:nvPr/>
           </p:nvPicPr>
           <p:blipFill>
-            <a:blip r:embed="rId7"/>
+            <a:blip r:embed="rId5"/>
             <a:stretch>
               <a:fillRect/>
             </a:stretch>
@@ -7007,6 +6993,38 @@
           </p:spPr>
         </p:pic>
       </p:grpSp>
+      <p:pic>
+        <p:nvPicPr>
+          <p:cNvPr id="4" name="object 23">
+            <a:hlinkClick r:id="rId6"/>
+            <a:extLst>
+              <a:ext uri="{FF2B5EF4-FFF2-40B4-BE49-F238E27FC236}">
+                <a16:creationId xmlns:a16="http://schemas.microsoft.com/office/drawing/2014/main" id="{3CBD6548-3D4E-9A40-CA35-355261D4E92C}"/>
+              </a:ext>
+              <a:ext uri="{C183D7F6-B498-43B3-948B-1728B52AA6E4}">
+                <adec:decorative xmlns:adec="http://schemas.microsoft.com/office/drawing/2017/decorative" val="1"/>
+              </a:ext>
+            </a:extLst>
+          </p:cNvPr>
+          <p:cNvPicPr/>
+          <p:nvPr/>
+        </p:nvPicPr>
+        <p:blipFill>
+          <a:blip r:embed="rId7" cstate="print"/>
+          <a:stretch>
+            <a:fillRect/>
+          </a:stretch>
+        </p:blipFill>
+        <p:spPr>
+          <a:xfrm>
+            <a:off x="10961016" y="6265038"/>
+            <a:ext cx="1037459" cy="383579"/>
+          </a:xfrm>
+          <a:prstGeom prst="rect">
+            <a:avLst/>
+          </a:prstGeom>
+        </p:spPr>
+      </p:pic>
     </p:spTree>
     <p:extLst>
       <p:ext uri="{BB962C8B-B14F-4D97-AF65-F5344CB8AC3E}">
@@ -7065,11 +7083,11 @@
           </a:p>
         </p:txBody>
       </p:sp>
-      <mc:AlternateContent xmlns:mc="http://schemas.openxmlformats.org/markup-compatibility/2006">
-        <mc:Choice xmlns:a14="http://schemas.microsoft.com/office/drawing/2010/main" Requires="a14">
+      <mc:AlternateContent xmlns:mc="http://schemas.openxmlformats.org/markup-compatibility/2006" xmlns:a14="http://schemas.microsoft.com/office/drawing/2010/main">
+        <mc:Choice Requires="a14">
           <p:sp>
             <p:nvSpPr>
-              <p:cNvPr id="3" name="Content Placeholder 2">
+              <p:cNvPr id="3" name="Content Placeholder 2" descr="Providing the agent with an internal reward bonus to encourage exploration. Modify reward by adding internal reward r sub t equals r sub t, to the power ext, plus beta r sub t, to the power int. r sub t, to the power int depends on level of novelty of the reached state. How to measure novelty:. Visit a new state/set of states for the first time. Visit a state that has not been visited very often (the agent is uncertain about its value). Visit a state that surprises the agent. I.e. the agent’s current model produces a large prediction error (temporal difference error). Issue: “Noisy TV problem” : the agent gets trapped by the reward for staring at a static-filled, always-changing, unlearnable TV screen! Caused by state descriptions which contain highly stochastic elements">
                 <a:extLst>
                   <a:ext uri="{FF2B5EF4-FFF2-40B4-BE49-F238E27FC236}">
                     <a16:creationId xmlns:a16="http://schemas.microsoft.com/office/drawing/2014/main" id="{7E56D306-E35D-B7B4-8146-6D8514294A92}"/>
@@ -7318,10 +7336,10 @@
             </p:txBody>
           </p:sp>
         </mc:Choice>
-        <mc:Fallback>
+        <mc:Fallback xmlns="">
           <p:sp>
             <p:nvSpPr>
-              <p:cNvPr id="3" name="Content Placeholder 2">
+              <p:cNvPr id="3" name="Content Placeholder 2" descr="Providing the agent with an internal reward bonus to encourage exploration. Modify reward by adding internal reward r sub t equals r sub t, to the power ext, plus beta r sub t, to the power int. r sub t, to the power int depends on level of novelty of the reached state. How to measure novelty:. Visit a new state/set of states for the first time. Visit a state that has not been visited very often (the agent is uncertain about its value). Visit a state that surprises the agent. I.e. the agent’s current model produces a large prediction error (temporal difference error). Issue: “Noisy TV problem” : the agent gets trapped by the reward for staring at a static-filled, always-changing, unlearnable TV screen! Caused by state descriptions which contain highly stochastic elements">
                 <a:extLst>
                   <a:ext uri="{FF2B5EF4-FFF2-40B4-BE49-F238E27FC236}">
                     <a16:creationId xmlns:a16="http://schemas.microsoft.com/office/drawing/2014/main" id="{7E56D306-E35D-B7B4-8146-6D8514294A92}"/>
@@ -7362,9 +7380,44 @@
           </p:sp>
         </mc:Fallback>
       </mc:AlternateContent>
+      <p:sp>
+        <p:nvSpPr>
+          <p:cNvPr id="14" name="TextBox 13">
+            <a:extLst>
+              <a:ext uri="{FF2B5EF4-FFF2-40B4-BE49-F238E27FC236}">
+                <a16:creationId xmlns:a16="http://schemas.microsoft.com/office/drawing/2014/main" id="{2ACED117-8C69-6288-3EA6-4A911D745FE3}"/>
+              </a:ext>
+            </a:extLst>
+          </p:cNvPr>
+          <p:cNvSpPr txBox="1"/>
+          <p:nvPr/>
+        </p:nvSpPr>
+        <p:spPr>
+          <a:xfrm>
+            <a:off x="8857815" y="1400938"/>
+            <a:ext cx="1146629" cy="369332"/>
+          </a:xfrm>
+          <a:prstGeom prst="rect">
+            <a:avLst/>
+          </a:prstGeom>
+          <a:noFill/>
+        </p:spPr>
+        <p:txBody>
+          <a:bodyPr wrap="square">
+            <a:spAutoFit/>
+          </a:bodyPr>
+          <a:lstStyle/>
+          <a:p>
+            <a:r>
+              <a:rPr lang="en-US" b="1" dirty="0"/>
+              <a:t>Example</a:t>
+            </a:r>
+          </a:p>
+        </p:txBody>
+      </p:sp>
       <p:grpSp>
         <p:nvGrpSpPr>
-          <p:cNvPr id="4" name="Group 3">
+          <p:cNvPr id="4" name="Group 3" descr="Gridworld of 11 by 11 cells, each numbered with its state index (0 to 102), with black wall cells dividing it into rooms; the start S is at the bottom left and the goal G is on the left side near the middle. Labels: S; G.">
             <a:extLst>
               <a:ext uri="{FF2B5EF4-FFF2-40B4-BE49-F238E27FC236}">
                 <a16:creationId xmlns:a16="http://schemas.microsoft.com/office/drawing/2014/main" id="{377109AC-6186-2DAE-4907-0FE45D571434}"/>
@@ -7384,7 +7437,7 @@
         </p:grpSpPr>
         <p:pic>
           <p:nvPicPr>
-            <p:cNvPr id="5" name="Picture 4">
+            <p:cNvPr id="5" name="Picture 4" descr="Gridworld of 11 by 11 cells, each numbered with its state index (0 to 102), with black wall cells dividing it into rooms; the start S is at the bottom left and the goal G is on the left side near the middle.">
               <a:extLst>
                 <a:ext uri="{FF2B5EF4-FFF2-40B4-BE49-F238E27FC236}">
                   <a16:creationId xmlns:a16="http://schemas.microsoft.com/office/drawing/2014/main" id="{8A434F1B-1939-6F3E-A170-6B86BCBDB995}"/>
@@ -7493,10 +7546,10 @@
       </p:grpSp>
       <p:sp>
         <p:nvSpPr>
-          <p:cNvPr id="11" name="TextBox 10">
+          <p:cNvPr id="13" name="TextBox 12">
             <a:extLst>
               <a:ext uri="{FF2B5EF4-FFF2-40B4-BE49-F238E27FC236}">
-                <a16:creationId xmlns:a16="http://schemas.microsoft.com/office/drawing/2014/main" id="{D142B1B1-C107-7CE7-249B-45F252135EE6}"/>
+                <a16:creationId xmlns:a16="http://schemas.microsoft.com/office/drawing/2014/main" id="{69B144EA-4CD8-F87E-7171-A99E48DA7B30}"/>
               </a:ext>
             </a:extLst>
           </p:cNvPr>
@@ -7505,14 +7558,14 @@
         </p:nvSpPr>
         <p:spPr>
           <a:xfrm>
-            <a:off x="10334181" y="3670695"/>
-            <a:ext cx="1176737" cy="972254"/>
+            <a:off x="8873582" y="2002243"/>
+            <a:ext cx="1188512" cy="1147110"/>
           </a:xfrm>
           <a:prstGeom prst="rect">
             <a:avLst/>
           </a:prstGeom>
           <a:solidFill>
-            <a:schemeClr val="accent2">
+            <a:schemeClr val="accent5">
               <a:alpha val="50000"/>
             </a:schemeClr>
           </a:solidFill>
@@ -7542,8 +7595,12 @@
           <a:p>
             <a:pPr algn="ctr"/>
             <a:r>
-              <a:rPr lang="en-US" b="1" dirty="0"/>
-              <a:t>Room 2</a:t>
+              <a:rPr lang="en-US" b="1" dirty="0">
+                <a:solidFill>
+                  <a:srgbClr val="000000"/>
+                </a:solidFill>
+              </a:rPr>
+              <a:t>Room 4</a:t>
             </a:r>
           </a:p>
         </p:txBody>
@@ -7599,18 +7656,66 @@
           <a:p>
             <a:pPr algn="ctr"/>
             <a:r>
-              <a:rPr lang="en-US" b="1" dirty="0"/>
+              <a:rPr lang="en-US" b="1" dirty="0">
+                <a:solidFill>
+                  <a:srgbClr val="000000"/>
+                </a:solidFill>
+              </a:rPr>
               <a:t>Room 3</a:t>
             </a:r>
           </a:p>
         </p:txBody>
       </p:sp>
+      <p:cxnSp>
+        <p:nvCxnSpPr>
+          <p:cNvPr id="18" name="Straight Arrow Connector 17">
+            <a:extLst>
+              <a:ext uri="{FF2B5EF4-FFF2-40B4-BE49-F238E27FC236}">
+                <a16:creationId xmlns:a16="http://schemas.microsoft.com/office/drawing/2014/main" id="{EA6E4EB7-42DD-34A1-D48E-95F36672CF90}"/>
+              </a:ext>
+              <a:ext uri="{C183D7F6-B498-43B3-948B-1728B52AA6E4}">
+                <adec:decorative xmlns:adec="http://schemas.microsoft.com/office/drawing/2017/decorative" val="1"/>
+              </a:ext>
+            </a:extLst>
+          </p:cNvPr>
+          <p:cNvCxnSpPr>
+            <a:cxnSpLocks/>
+          </p:cNvCxnSpPr>
+          <p:nvPr/>
+        </p:nvCxnSpPr>
+        <p:spPr>
+          <a:xfrm>
+            <a:off x="10048408" y="3587800"/>
+            <a:ext cx="230346" cy="0"/>
+          </a:xfrm>
+          <a:prstGeom prst="straightConnector1">
+            <a:avLst/>
+          </a:prstGeom>
+          <a:ln w="57150">
+            <a:tailEnd type="triangle"/>
+          </a:ln>
+        </p:spPr>
+        <p:style>
+          <a:lnRef idx="2">
+            <a:schemeClr val="accent1"/>
+          </a:lnRef>
+          <a:fillRef idx="0">
+            <a:schemeClr val="accent1"/>
+          </a:fillRef>
+          <a:effectRef idx="1">
+            <a:schemeClr val="accent1"/>
+          </a:effectRef>
+          <a:fontRef idx="minor">
+            <a:schemeClr val="tx1"/>
+          </a:fontRef>
+        </p:style>
+      </p:cxnSp>
       <p:sp>
         <p:nvSpPr>
-          <p:cNvPr id="13" name="TextBox 12">
+          <p:cNvPr id="11" name="TextBox 10">
             <a:extLst>
               <a:ext uri="{FF2B5EF4-FFF2-40B4-BE49-F238E27FC236}">
-                <a16:creationId xmlns:a16="http://schemas.microsoft.com/office/drawing/2014/main" id="{69B144EA-4CD8-F87E-7171-A99E48DA7B30}"/>
+                <a16:creationId xmlns:a16="http://schemas.microsoft.com/office/drawing/2014/main" id="{D142B1B1-C107-7CE7-249B-45F252135EE6}"/>
               </a:ext>
             </a:extLst>
           </p:cNvPr>
@@ -7619,14 +7724,14 @@
         </p:nvSpPr>
         <p:spPr>
           <a:xfrm>
-            <a:off x="8873582" y="2002243"/>
-            <a:ext cx="1188512" cy="1147110"/>
+            <a:off x="10334181" y="3670695"/>
+            <a:ext cx="1176737" cy="972254"/>
           </a:xfrm>
           <a:prstGeom prst="rect">
             <a:avLst/>
           </a:prstGeom>
           <a:solidFill>
-            <a:schemeClr val="accent5">
+            <a:schemeClr val="accent2">
               <a:alpha val="50000"/>
             </a:schemeClr>
           </a:solidFill>
@@ -7656,43 +7761,12 @@
           <a:p>
             <a:pPr algn="ctr"/>
             <a:r>
-              <a:rPr lang="en-US" b="1" dirty="0"/>
-              <a:t>Room 4</a:t>
-            </a:r>
-          </a:p>
-        </p:txBody>
-      </p:sp>
-      <p:sp>
-        <p:nvSpPr>
-          <p:cNvPr id="14" name="TextBox 13">
-            <a:extLst>
-              <a:ext uri="{FF2B5EF4-FFF2-40B4-BE49-F238E27FC236}">
-                <a16:creationId xmlns:a16="http://schemas.microsoft.com/office/drawing/2014/main" id="{2ACED117-8C69-6288-3EA6-4A911D745FE3}"/>
-              </a:ext>
-            </a:extLst>
-          </p:cNvPr>
-          <p:cNvSpPr txBox="1"/>
-          <p:nvPr/>
-        </p:nvSpPr>
-        <p:spPr>
-          <a:xfrm>
-            <a:off x="8857815" y="1400938"/>
-            <a:ext cx="1146629" cy="369332"/>
-          </a:xfrm>
-          <a:prstGeom prst="rect">
-            <a:avLst/>
-          </a:prstGeom>
-          <a:noFill/>
-        </p:spPr>
-        <p:txBody>
-          <a:bodyPr wrap="square">
-            <a:spAutoFit/>
-          </a:bodyPr>
-          <a:lstStyle/>
-          <a:p>
-            <a:r>
-              <a:rPr lang="en-US" b="1" dirty="0"/>
-              <a:t>Example</a:t>
+              <a:rPr lang="en-US" b="1" dirty="0">
+                <a:solidFill>
+                  <a:srgbClr val="000000"/>
+                </a:solidFill>
+              </a:rPr>
+              <a:t>Room 2</a:t>
             </a:r>
           </a:p>
         </p:txBody>
@@ -7838,47 +7912,6 @@
           </a:p>
         </p:txBody>
       </p:sp>
-      <p:cxnSp>
-        <p:nvCxnSpPr>
-          <p:cNvPr id="18" name="Straight Arrow Connector 17">
-            <a:extLst>
-              <a:ext uri="{FF2B5EF4-FFF2-40B4-BE49-F238E27FC236}">
-                <a16:creationId xmlns:a16="http://schemas.microsoft.com/office/drawing/2014/main" id="{EA6E4EB7-42DD-34A1-D48E-95F36672CF90}"/>
-              </a:ext>
-            </a:extLst>
-          </p:cNvPr>
-          <p:cNvCxnSpPr>
-            <a:cxnSpLocks/>
-          </p:cNvCxnSpPr>
-          <p:nvPr/>
-        </p:nvCxnSpPr>
-        <p:spPr>
-          <a:xfrm>
-            <a:off x="10048408" y="3587800"/>
-            <a:ext cx="230346" cy="0"/>
-          </a:xfrm>
-          <a:prstGeom prst="straightConnector1">
-            <a:avLst/>
-          </a:prstGeom>
-          <a:ln w="57150">
-            <a:tailEnd type="triangle"/>
-          </a:ln>
-        </p:spPr>
-        <p:style>
-          <a:lnRef idx="2">
-            <a:schemeClr val="accent1"/>
-          </a:lnRef>
-          <a:fillRef idx="0">
-            <a:schemeClr val="accent1"/>
-          </a:fillRef>
-          <a:effectRef idx="1">
-            <a:schemeClr val="accent1"/>
-          </a:effectRef>
-          <a:fontRef idx="minor">
-            <a:schemeClr val="tx1"/>
-          </a:fontRef>
-        </p:style>
-      </p:cxnSp>
     </p:spTree>
     <p:extLst>
       <p:ext uri="{BB962C8B-B14F-4D97-AF65-F5344CB8AC3E}">
@@ -8209,7 +8242,7 @@
       </p:sp>
       <p:pic>
         <p:nvPicPr>
-          <p:cNvPr id="7" name="Picture 6">
+          <p:cNvPr id="7" name="Picture 6" descr="Photo of a hand holding up a gold medal with the number 1 on a red ribbon.">
             <a:extLst>
               <a:ext uri="{FF2B5EF4-FFF2-40B4-BE49-F238E27FC236}">
                 <a16:creationId xmlns:a16="http://schemas.microsoft.com/office/drawing/2014/main" id="{1B8DA306-1697-AFFB-9D44-7921CC19F108}"/>
@@ -8414,11 +8447,11 @@
           </a:p>
         </p:txBody>
       </p:sp>
-      <mc:AlternateContent xmlns:mc="http://schemas.openxmlformats.org/markup-compatibility/2006">
-        <mc:Choice xmlns:a14="http://schemas.microsoft.com/office/drawing/2010/main" Requires="a14">
+      <mc:AlternateContent xmlns:mc="http://schemas.openxmlformats.org/markup-compatibility/2006" xmlns:a14="http://schemas.microsoft.com/office/drawing/2010/main">
+        <mc:Choice Requires="a14">
           <p:sp>
             <p:nvSpPr>
-              <p:cNvPr id="3" name="Content Placeholder 2">
+              <p:cNvPr id="3" name="Content Placeholder 2" descr="Idea: Learn a hard to define reward function from demonstrations by an expert. Input: Expert behavior as sequences of (s,a,r,s prime) tuples . Goal: Finding a parameterized reward function r star (s,a,s prime) that explains the expert’s behavior. I.e., that assigns the highest value to the expert's behavior. E [the sum over t, of gamma to the power t r star (s sub t,a,s sub t plus 1, given w) | pi star] is greater than or equal to E [the sum over t, of gamma to the power t r star (s sub t,a,s sub t plus 1, given w) | pi] for all pi. Challenge: The problem is “underspecified.” For any given action, there are potentially infinite reward functions that could explain it. Therefore, IRL algorithms usually find the &quot;most likely&quot; or simplest reward function (using regularization) that fits the data. Examples:. Autonomous Driving: Observing how human drivers yield, navigate. Robotics: Teaching robots complex physical tasks (like folding laundry or stacking objects) by showing them how to do it once, allowing the system to deduce the objective. Large Language Models (LLMs): Used in AI alignment, where human feedback creates a reward model (via RLHF or similar structures) to align model behavior with human intent">
                 <a:extLst>
                   <a:ext uri="{FF2B5EF4-FFF2-40B4-BE49-F238E27FC236}">
                     <a16:creationId xmlns:a16="http://schemas.microsoft.com/office/drawing/2014/main" id="{A0314C2D-CF94-DAB6-E05C-68E6B7C55F29}"/>
@@ -9248,10 +9281,10 @@
             </p:txBody>
           </p:sp>
         </mc:Choice>
-        <mc:Fallback>
+        <mc:Fallback xmlns="">
           <p:sp>
             <p:nvSpPr>
-              <p:cNvPr id="3" name="Content Placeholder 2">
+              <p:cNvPr id="3" name="Content Placeholder 2" descr="Idea: Learn a hard to define reward function from demonstrations by an expert. Input: Expert behavior as sequences of (s,a,r,s prime) tuples . Goal: Finding a parameterized reward function r star (s,a,s prime) that explains the expert’s behavior. I.e., that assigns the highest value to the expert's behavior. E [the sum over t, of gamma to the power t r star (s sub t,a,s sub t plus 1, given w) | pi star] is greater than or equal to E [the sum over t, of gamma to the power t r star (s sub t,a,s sub t plus 1, given w) | pi] for all pi. Challenge: The problem is “underspecified.” For any given action, there are potentially infinite reward functions that could explain it. Therefore, IRL algorithms usually find the &quot;most likely&quot; or simplest reward function (using regularization) that fits the data. Examples:. Autonomous Driving: Observing how human drivers yield, navigate. Robotics: Teaching robots complex physical tasks (like folding laundry or stacking objects) by showing them how to do it once, allowing the system to deduce the objective. Large Language Models (LLMs): Used in AI alignment, where human feedback creates a reward model (via RLHF or similar structures) to align model behavior with human intent">
                 <a:extLst>
                   <a:ext uri="{FF2B5EF4-FFF2-40B4-BE49-F238E27FC236}">
                     <a16:creationId xmlns:a16="http://schemas.microsoft.com/office/drawing/2014/main" id="{A0314C2D-CF94-DAB6-E05C-68E6B7C55F29}"/>
@@ -9342,6 +9375,82 @@
       </p:sp>
       <p:sp>
         <p:nvSpPr>
+          <p:cNvPr id="7" name="AutoShape 3" descr="Inverse reinforcement learning explained visually">
+            <a:extLst>
+              <a:ext uri="{FF2B5EF4-FFF2-40B4-BE49-F238E27FC236}">
+                <a16:creationId xmlns:a16="http://schemas.microsoft.com/office/drawing/2014/main" id="{DC03F50D-5AEA-4823-F58A-49D56355583F}"/>
+              </a:ext>
+            </a:extLst>
+          </p:cNvPr>
+          <p:cNvSpPr>
+            <a:spLocks noChangeAspect="1" noChangeArrowheads="1"/>
+          </p:cNvSpPr>
+          <p:nvPr/>
+        </p:nvSpPr>
+        <p:spPr bwMode="auto">
+          <a:xfrm>
+            <a:off x="5943600" y="3276600"/>
+            <a:ext cx="304800" cy="304800"/>
+          </a:xfrm>
+          <a:prstGeom prst="rect">
+            <a:avLst/>
+          </a:prstGeom>
+          <a:noFill/>
+          <a:extLst>
+            <a:ext uri="{909E8E84-426E-40DD-AFC4-6F175D3DCCD1}">
+              <a14:hiddenFill xmlns:a14="http://schemas.microsoft.com/office/drawing/2010/main">
+                <a:solidFill>
+                  <a:srgbClr val="FFFFFF"/>
+                </a:solidFill>
+              </a14:hiddenFill>
+            </a:ext>
+          </a:extLst>
+        </p:spPr>
+        <p:txBody>
+          <a:bodyPr vert="horz" wrap="square" lIns="91440" tIns="45720" rIns="91440" bIns="45720" numCol="1" anchor="t" anchorCtr="0" compatLnSpc="1">
+            <a:prstTxWarp prst="textNoShape">
+              <a:avLst/>
+            </a:prstTxWarp>
+          </a:bodyPr>
+          <a:lstStyle/>
+          <a:p>
+            <a:endParaRPr lang="en-US"/>
+          </a:p>
+        </p:txBody>
+      </p:sp>
+      <p:pic>
+        <p:nvPicPr>
+          <p:cNvPr id="13" name="Picture 12" descr="Diagram titled &quot;2. Inverse RL: Infer Reward&quot;, three panels linked by arrows. Observed Trajectory: a woman shows a humanoid robot how to pick up a mug from a table, with a target icon marking the goal. Learned Reward Function: a 3D surface with a single peak at the target. Optimal Policy: the robot reaches for the mug on its own, following a dashed path toward the target.">
+            <a:extLst>
+              <a:ext uri="{FF2B5EF4-FFF2-40B4-BE49-F238E27FC236}">
+                <a16:creationId xmlns:a16="http://schemas.microsoft.com/office/drawing/2014/main" id="{A4DB6290-7876-2F14-C1E5-FBFF18EB7640}"/>
+              </a:ext>
+            </a:extLst>
+          </p:cNvPr>
+          <p:cNvPicPr>
+            <a:picLocks noChangeAspect="1"/>
+          </p:cNvPicPr>
+          <p:nvPr/>
+        </p:nvPicPr>
+        <p:blipFill>
+          <a:blip r:embed="rId3"/>
+          <a:srcRect l="5098" t="19477" r="4328" b="19297"/>
+          <a:stretch>
+            <a:fillRect/>
+          </a:stretch>
+        </p:blipFill>
+        <p:spPr>
+          <a:xfrm>
+            <a:off x="6649328" y="3738339"/>
+            <a:ext cx="4998413" cy="2252560"/>
+          </a:xfrm>
+          <a:prstGeom prst="rect">
+            <a:avLst/>
+          </a:prstGeom>
+        </p:spPr>
+      </p:pic>
+      <p:sp>
+        <p:nvSpPr>
           <p:cNvPr id="6" name="TextBox 5">
             <a:extLst>
               <a:ext uri="{FF2B5EF4-FFF2-40B4-BE49-F238E27FC236}">
@@ -9387,7 +9496,7 @@
             </a:r>
             <a:r>
               <a:rPr lang="en-US" sz="1400" dirty="0">
-                <a:hlinkClick r:id="rId3"/>
+                <a:hlinkClick r:id="rId4"/>
               </a:rPr>
               <a:t>Algorithms for Inverse Reinforcement Learning</a:t>
             </a:r>
@@ -9398,82 +9507,6 @@
           </a:p>
         </p:txBody>
       </p:sp>
-      <p:sp>
-        <p:nvSpPr>
-          <p:cNvPr id="7" name="AutoShape 3" descr="Inverse reinforcement learning explained visually">
-            <a:extLst>
-              <a:ext uri="{FF2B5EF4-FFF2-40B4-BE49-F238E27FC236}">
-                <a16:creationId xmlns:a16="http://schemas.microsoft.com/office/drawing/2014/main" id="{DC03F50D-5AEA-4823-F58A-49D56355583F}"/>
-              </a:ext>
-            </a:extLst>
-          </p:cNvPr>
-          <p:cNvSpPr>
-            <a:spLocks noChangeAspect="1" noChangeArrowheads="1"/>
-          </p:cNvSpPr>
-          <p:nvPr/>
-        </p:nvSpPr>
-        <p:spPr bwMode="auto">
-          <a:xfrm>
-            <a:off x="5943600" y="3276600"/>
-            <a:ext cx="304800" cy="304800"/>
-          </a:xfrm>
-          <a:prstGeom prst="rect">
-            <a:avLst/>
-          </a:prstGeom>
-          <a:noFill/>
-          <a:extLst>
-            <a:ext uri="{909E8E84-426E-40DD-AFC4-6F175D3DCCD1}">
-              <a14:hiddenFill xmlns:a14="http://schemas.microsoft.com/office/drawing/2010/main">
-                <a:solidFill>
-                  <a:srgbClr val="FFFFFF"/>
-                </a:solidFill>
-              </a14:hiddenFill>
-            </a:ext>
-          </a:extLst>
-        </p:spPr>
-        <p:txBody>
-          <a:bodyPr vert="horz" wrap="square" lIns="91440" tIns="45720" rIns="91440" bIns="45720" numCol="1" anchor="t" anchorCtr="0" compatLnSpc="1">
-            <a:prstTxWarp prst="textNoShape">
-              <a:avLst/>
-            </a:prstTxWarp>
-          </a:bodyPr>
-          <a:lstStyle/>
-          <a:p>
-            <a:endParaRPr lang="en-US"/>
-          </a:p>
-        </p:txBody>
-      </p:sp>
-      <p:pic>
-        <p:nvPicPr>
-          <p:cNvPr id="13" name="Picture 12">
-            <a:extLst>
-              <a:ext uri="{FF2B5EF4-FFF2-40B4-BE49-F238E27FC236}">
-                <a16:creationId xmlns:a16="http://schemas.microsoft.com/office/drawing/2014/main" id="{A4DB6290-7876-2F14-C1E5-FBFF18EB7640}"/>
-              </a:ext>
-            </a:extLst>
-          </p:cNvPr>
-          <p:cNvPicPr>
-            <a:picLocks noChangeAspect="1"/>
-          </p:cNvPicPr>
-          <p:nvPr/>
-        </p:nvPicPr>
-        <p:blipFill>
-          <a:blip r:embed="rId4"/>
-          <a:srcRect l="5098" t="19477" r="4328" b="19297"/>
-          <a:stretch>
-            <a:fillRect/>
-          </a:stretch>
-        </p:blipFill>
-        <p:spPr>
-          <a:xfrm>
-            <a:off x="6649328" y="3738339"/>
-            <a:ext cx="4998413" cy="2252560"/>
-          </a:xfrm>
-          <a:prstGeom prst="rect">
-            <a:avLst/>
-          </a:prstGeom>
-        </p:spPr>
-      </p:pic>
     </p:spTree>
     <p:extLst>
       <p:ext uri="{BB962C8B-B14F-4D97-AF65-F5344CB8AC3E}">
@@ -9856,6 +9889,34 @@
           </a:p>
         </p:txBody>
       </p:sp>
+      <p:graphicFrame>
+        <p:nvGraphicFramePr>
+          <p:cNvPr id="5" name="Diagram 4" descr="SmartArt diagram with items: 3. Original environment; 2. More complex environment; 1. Simplified environment.">
+            <a:extLst>
+              <a:ext uri="{FF2B5EF4-FFF2-40B4-BE49-F238E27FC236}">
+                <a16:creationId xmlns:a16="http://schemas.microsoft.com/office/drawing/2014/main" id="{F868335A-46B3-847C-CCEE-396EC8DE4BC8}"/>
+              </a:ext>
+            </a:extLst>
+          </p:cNvPr>
+          <p:cNvGraphicFramePr/>
+          <p:nvPr>
+            <p:extLst>
+              <p:ext uri="{D42A27DB-BD31-4B8C-83A1-F6EECF244321}">
+                <p14:modId xmlns:p14="http://schemas.microsoft.com/office/powerpoint/2010/main" val="3146201057"/>
+              </p:ext>
+            </p:extLst>
+          </p:nvPr>
+        </p:nvGraphicFramePr>
+        <p:xfrm>
+          <a:off x="8844455" y="1397330"/>
+          <a:ext cx="2592551" cy="4136112"/>
+        </p:xfrm>
+        <a:graphic>
+          <a:graphicData uri="http://schemas.openxmlformats.org/drawingml/2006/diagram">
+            <dgm:relIds xmlns:dgm="http://schemas.openxmlformats.org/drawingml/2006/diagram" xmlns:r="http://schemas.openxmlformats.org/officeDocument/2006/relationships" r:dm="rId2" r:lo="rId3" r:qs="rId4" r:cs="rId5"/>
+          </a:graphicData>
+        </a:graphic>
+      </p:graphicFrame>
       <p:sp>
         <p:nvSpPr>
           <p:cNvPr id="4" name="TextBox 3">
@@ -9903,7 +9964,7 @@
             </a:r>
             <a:r>
               <a:rPr lang="en-US" sz="1400" dirty="0">
-                <a:hlinkClick r:id="rId2"/>
+                <a:hlinkClick r:id="rId7"/>
               </a:rPr>
               <a:t>Curriculum for reinforcement learning</a:t>
             </a:r>
@@ -9922,34 +9983,6 @@
           </a:p>
         </p:txBody>
       </p:sp>
-      <p:graphicFrame>
-        <p:nvGraphicFramePr>
-          <p:cNvPr id="5" name="Diagram 4">
-            <a:extLst>
-              <a:ext uri="{FF2B5EF4-FFF2-40B4-BE49-F238E27FC236}">
-                <a16:creationId xmlns:a16="http://schemas.microsoft.com/office/drawing/2014/main" id="{F868335A-46B3-847C-CCEE-396EC8DE4BC8}"/>
-              </a:ext>
-            </a:extLst>
-          </p:cNvPr>
-          <p:cNvGraphicFramePr/>
-          <p:nvPr>
-            <p:extLst>
-              <p:ext uri="{D42A27DB-BD31-4B8C-83A1-F6EECF244321}">
-                <p14:modId xmlns:p14="http://schemas.microsoft.com/office/powerpoint/2010/main" val="3146201057"/>
-              </p:ext>
-            </p:extLst>
-          </p:nvPr>
-        </p:nvGraphicFramePr>
-        <p:xfrm>
-          <a:off x="8844455" y="1397330"/>
-          <a:ext cx="2592551" cy="4136112"/>
-        </p:xfrm>
-        <a:graphic>
-          <a:graphicData uri="http://schemas.openxmlformats.org/drawingml/2006/diagram">
-            <dgm:relIds xmlns:dgm="http://schemas.openxmlformats.org/drawingml/2006/diagram" xmlns:r="http://schemas.openxmlformats.org/officeDocument/2006/relationships" r:dm="rId3" r:lo="rId4" r:qs="rId5" r:cs="rId6"/>
-          </a:graphicData>
-        </a:graphic>
-      </p:graphicFrame>
     </p:spTree>
     <p:extLst>
       <p:ext uri="{BB962C8B-B14F-4D97-AF65-F5344CB8AC3E}">
@@ -10773,6 +10806,133 @@
           </a:p>
         </p:txBody>
       </p:sp>
+      <p:sp>
+        <p:nvSpPr>
+          <p:cNvPr id="3" name="Content Placeholder 2">
+            <a:extLst>
+              <a:ext uri="{FF2B5EF4-FFF2-40B4-BE49-F238E27FC236}">
+                <a16:creationId xmlns:a16="http://schemas.microsoft.com/office/drawing/2014/main" id="{76BBA507-BEF2-070A-4241-AF2BA1803534}"/>
+              </a:ext>
+            </a:extLst>
+          </p:cNvPr>
+          <p:cNvSpPr>
+            <a:spLocks noGrp="1"/>
+          </p:cNvSpPr>
+          <p:nvPr>
+            <p:ph idx="1"/>
+          </p:nvPr>
+        </p:nvSpPr>
+        <p:spPr>
+          <a:xfrm>
+            <a:off x="5575712" y="1064173"/>
+            <a:ext cx="6408924" cy="4971174"/>
+          </a:xfrm>
+        </p:spPr>
+        <p:txBody>
+          <a:bodyPr anchor="ctr">
+            <a:normAutofit fontScale="92500" lnSpcReduction="20000"/>
+          </a:bodyPr>
+          <a:lstStyle/>
+          <a:p>
+            <a:r>
+              <a:rPr lang="en-US" sz="2400" dirty="0"/>
+              <a:t>Explain how changing the reward structure affects learning in RL:</a:t>
+            </a:r>
+          </a:p>
+          <a:p>
+            <a:pPr lvl="1"/>
+            <a:r>
+              <a:rPr lang="en-US" sz="1800" dirty="0"/>
+              <a:t>How rewards express the goal.</a:t>
+            </a:r>
+          </a:p>
+          <a:p>
+            <a:pPr lvl="1"/>
+            <a:r>
+              <a:rPr lang="en-US" sz="1800" dirty="0"/>
+              <a:t>Sparse rewards in planning problems.</a:t>
+            </a:r>
+          </a:p>
+          <a:p>
+            <a:pPr lvl="1"/>
+            <a:endParaRPr lang="en-US" sz="1800" dirty="0"/>
+          </a:p>
+          <a:p>
+            <a:r>
+              <a:rPr lang="en-US" sz="2400" dirty="0"/>
+              <a:t>Understand the basic concepts</a:t>
+            </a:r>
+          </a:p>
+          <a:p>
+            <a:pPr lvl="1"/>
+            <a:r>
+              <a:rPr lang="en-US" sz="1800" dirty="0"/>
+              <a:t>Extrinsic vs. intrinsic reward</a:t>
+            </a:r>
+          </a:p>
+          <a:p>
+            <a:pPr lvl="1"/>
+            <a:r>
+              <a:rPr lang="en-US" sz="1800" dirty="0"/>
+              <a:t>Potential-based Reward Shaping (PBRS)</a:t>
+            </a:r>
+          </a:p>
+          <a:p>
+            <a:pPr lvl="1"/>
+            <a:r>
+              <a:rPr lang="en-US" sz="1800" dirty="0"/>
+              <a:t>Intermediate Milestone Rewards</a:t>
+            </a:r>
+          </a:p>
+          <a:p>
+            <a:pPr lvl="1"/>
+            <a:r>
+              <a:rPr lang="en-US" sz="1800" dirty="0"/>
+              <a:t>Intrinsic Motivation: Curiosity</a:t>
+            </a:r>
+          </a:p>
+          <a:p>
+            <a:pPr lvl="1"/>
+            <a:r>
+              <a:rPr lang="en-US" sz="1800" dirty="0"/>
+              <a:t>Inverse RL, curriculum learning, and robust RL</a:t>
+            </a:r>
+          </a:p>
+          <a:p>
+            <a:pPr marL="457200" lvl="1" indent="0">
+              <a:buNone/>
+            </a:pPr>
+            <a:endParaRPr lang="en-US" sz="1800" dirty="0"/>
+          </a:p>
+          <a:p>
+            <a:r>
+              <a:rPr lang="en-US" sz="2400" dirty="0"/>
+              <a:t>Recognize issues</a:t>
+            </a:r>
+          </a:p>
+          <a:p>
+            <a:pPr lvl="1"/>
+            <a:r>
+              <a:rPr lang="en-US" sz="1800" dirty="0"/>
+              <a:t>When the learned policy is the result of a shortcut or reward hacking.</a:t>
+            </a:r>
+          </a:p>
+          <a:p>
+            <a:pPr lvl="1"/>
+            <a:r>
+              <a:rPr lang="en-US" sz="1800" dirty="0"/>
+              <a:t>When the engineered reward overwrites the true objective.</a:t>
+            </a:r>
+          </a:p>
+          <a:p>
+            <a:pPr lvl="1"/>
+            <a:r>
+              <a:rPr lang="en-US" sz="1800" dirty="0"/>
+              <a:t>When the engineered reward has the potential to bias the solution.</a:t>
+            </a:r>
+          </a:p>
+        </p:txBody>
+      </p:sp>
       <p:pic>
         <p:nvPicPr>
           <p:cNvPr id="4" name="Picture 3">
@@ -10823,133 +10983,6 @@
           </a:extLst>
         </p:spPr>
       </p:pic>
-      <p:sp>
-        <p:nvSpPr>
-          <p:cNvPr id="3" name="Content Placeholder 2">
-            <a:extLst>
-              <a:ext uri="{FF2B5EF4-FFF2-40B4-BE49-F238E27FC236}">
-                <a16:creationId xmlns:a16="http://schemas.microsoft.com/office/drawing/2014/main" id="{76BBA507-BEF2-070A-4241-AF2BA1803534}"/>
-              </a:ext>
-            </a:extLst>
-          </p:cNvPr>
-          <p:cNvSpPr>
-            <a:spLocks noGrp="1"/>
-          </p:cNvSpPr>
-          <p:nvPr>
-            <p:ph idx="1"/>
-          </p:nvPr>
-        </p:nvSpPr>
-        <p:spPr>
-          <a:xfrm>
-            <a:off x="5575712" y="1064173"/>
-            <a:ext cx="6408924" cy="4971174"/>
-          </a:xfrm>
-        </p:spPr>
-        <p:txBody>
-          <a:bodyPr anchor="ctr">
-            <a:normAutofit fontScale="92500" lnSpcReduction="20000"/>
-          </a:bodyPr>
-          <a:lstStyle/>
-          <a:p>
-            <a:r>
-              <a:rPr lang="en-US" sz="2400" dirty="0"/>
-              <a:t>Explain how changing the reward structure affects learning in RL:</a:t>
-            </a:r>
-          </a:p>
-          <a:p>
-            <a:pPr lvl="1"/>
-            <a:r>
-              <a:rPr lang="en-US" sz="1800" dirty="0"/>
-              <a:t>How rewards express the goal.</a:t>
-            </a:r>
-          </a:p>
-          <a:p>
-            <a:pPr lvl="1"/>
-            <a:r>
-              <a:rPr lang="en-US" sz="1800" dirty="0"/>
-              <a:t>Sparse rewards in planning problems.</a:t>
-            </a:r>
-          </a:p>
-          <a:p>
-            <a:pPr lvl="1"/>
-            <a:endParaRPr lang="en-US" sz="1800" dirty="0"/>
-          </a:p>
-          <a:p>
-            <a:r>
-              <a:rPr lang="en-US" sz="2400" dirty="0"/>
-              <a:t>Understand the basic concepts</a:t>
-            </a:r>
-          </a:p>
-          <a:p>
-            <a:pPr lvl="1"/>
-            <a:r>
-              <a:rPr lang="en-US" sz="1800" dirty="0"/>
-              <a:t>Extrinsic vs. intrinsic reward</a:t>
-            </a:r>
-          </a:p>
-          <a:p>
-            <a:pPr lvl="1"/>
-            <a:r>
-              <a:rPr lang="en-US" sz="1800" dirty="0"/>
-              <a:t>Potential-based Reward Shaping (PBRS)</a:t>
-            </a:r>
-          </a:p>
-          <a:p>
-            <a:pPr lvl="1"/>
-            <a:r>
-              <a:rPr lang="en-US" sz="1800" dirty="0"/>
-              <a:t>Intermediate Milestone Rewards</a:t>
-            </a:r>
-          </a:p>
-          <a:p>
-            <a:pPr lvl="1"/>
-            <a:r>
-              <a:rPr lang="en-US" sz="1800" dirty="0"/>
-              <a:t>Intrinsic Motivation: Curiosity</a:t>
-            </a:r>
-          </a:p>
-          <a:p>
-            <a:pPr lvl="1"/>
-            <a:r>
-              <a:rPr lang="en-US" sz="1800" dirty="0"/>
-              <a:t>Inverse RL, curriculum learning, and robust RL</a:t>
-            </a:r>
-          </a:p>
-          <a:p>
-            <a:pPr marL="457200" lvl="1" indent="0">
-              <a:buNone/>
-            </a:pPr>
-            <a:endParaRPr lang="en-US" sz="1800" dirty="0"/>
-          </a:p>
-          <a:p>
-            <a:r>
-              <a:rPr lang="en-US" sz="2400" dirty="0"/>
-              <a:t>Recognize issues</a:t>
-            </a:r>
-          </a:p>
-          <a:p>
-            <a:pPr lvl="1"/>
-            <a:r>
-              <a:rPr lang="en-US" sz="1800" dirty="0"/>
-              <a:t>When the learned policy is the result of a shortcut or reward hacking.</a:t>
-            </a:r>
-          </a:p>
-          <a:p>
-            <a:pPr lvl="1"/>
-            <a:r>
-              <a:rPr lang="en-US" sz="1800" dirty="0"/>
-              <a:t>When the engineered reward overwrites the true objective.</a:t>
-            </a:r>
-          </a:p>
-          <a:p>
-            <a:pPr lvl="1"/>
-            <a:r>
-              <a:rPr lang="en-US" sz="1800" dirty="0"/>
-              <a:t>When the engineered reward has the potential to bias the solution.</a:t>
-            </a:r>
-          </a:p>
-        </p:txBody>
-      </p:sp>
     </p:spTree>
     <p:extLst>
       <p:ext uri="{BB962C8B-B14F-4D97-AF65-F5344CB8AC3E}">
@@ -11249,7 +11282,7 @@
       </p:sp>
       <p:pic>
         <p:nvPicPr>
-          <p:cNvPr id="7" name="Picture 6">
+          <p:cNvPr id="7" name="Picture 6" descr="Photo of a hand holding up a gold medal with the number 1 on a red ribbon.">
             <a:extLst>
               <a:ext uri="{FF2B5EF4-FFF2-40B4-BE49-F238E27FC236}">
                 <a16:creationId xmlns:a16="http://schemas.microsoft.com/office/drawing/2014/main" id="{7ED461B9-F4C9-C361-056C-82E59F2C8FE4}"/>
@@ -11392,65 +11425,6 @@
       </p:grpSpPr>
       <p:sp>
         <p:nvSpPr>
-          <p:cNvPr id="28" name="Arrow: Left-Right 27">
-            <a:extLst>
-              <a:ext uri="{FF2B5EF4-FFF2-40B4-BE49-F238E27FC236}">
-                <a16:creationId xmlns:a16="http://schemas.microsoft.com/office/drawing/2014/main" id="{19416EC9-5162-F682-1DB8-1CC781FC4DC2}"/>
-              </a:ext>
-            </a:extLst>
-          </p:cNvPr>
-          <p:cNvSpPr/>
-          <p:nvPr/>
-        </p:nvSpPr>
-        <p:spPr>
-          <a:xfrm>
-            <a:off x="711976" y="1618462"/>
-            <a:ext cx="10700574" cy="906904"/>
-          </a:xfrm>
-          <a:prstGeom prst="leftRightArrow">
-            <a:avLst/>
-          </a:prstGeom>
-          <a:solidFill>
-            <a:schemeClr val="accent2">
-              <a:lumMod val="20000"/>
-              <a:lumOff val="80000"/>
-            </a:schemeClr>
-          </a:solidFill>
-          <a:ln w="9525" cap="flat" cmpd="sng" algn="ctr">
-            <a:solidFill>
-              <a:schemeClr val="accent2"/>
-            </a:solidFill>
-            <a:prstDash val="solid"/>
-            <a:round/>
-            <a:headEnd type="none" w="med" len="med"/>
-            <a:tailEnd type="none" w="med" len="med"/>
-          </a:ln>
-        </p:spPr>
-        <p:style>
-          <a:lnRef idx="0">
-            <a:scrgbClr r="0" g="0" b="0"/>
-          </a:lnRef>
-          <a:fillRef idx="0">
-            <a:scrgbClr r="0" g="0" b="0"/>
-          </a:fillRef>
-          <a:effectRef idx="0">
-            <a:scrgbClr r="0" g="0" b="0"/>
-          </a:effectRef>
-          <a:fontRef idx="minor">
-            <a:schemeClr val="accent2"/>
-          </a:fontRef>
-        </p:style>
-        <p:txBody>
-          <a:bodyPr rtlCol="0" anchor="ctr"/>
-          <a:lstStyle/>
-          <a:p>
-            <a:pPr algn="ctr"/>
-            <a:endParaRPr lang="en-US"/>
-          </a:p>
-        </p:txBody>
-      </p:sp>
-      <p:sp>
-        <p:nvSpPr>
           <p:cNvPr id="2" name="Title 1">
             <a:extLst>
               <a:ext uri="{FF2B5EF4-FFF2-40B4-BE49-F238E27FC236}">
@@ -11474,387 +11448,6 @@
               <a:rPr lang="en-US" dirty="0"/>
               <a:t>Types of RL Problems</a:t>
             </a:r>
-          </a:p>
-        </p:txBody>
-      </p:sp>
-      <p:sp>
-        <p:nvSpPr>
-          <p:cNvPr id="5" name="TextBox 4">
-            <a:extLst>
-              <a:ext uri="{FF2B5EF4-FFF2-40B4-BE49-F238E27FC236}">
-                <a16:creationId xmlns:a16="http://schemas.microsoft.com/office/drawing/2014/main" id="{3C2ED09A-0CB4-EFE4-F1AF-5BBEB5F3251A}"/>
-              </a:ext>
-            </a:extLst>
-          </p:cNvPr>
-          <p:cNvSpPr txBox="1"/>
-          <p:nvPr/>
-        </p:nvSpPr>
-        <p:spPr>
-          <a:xfrm>
-            <a:off x="1463603" y="1884069"/>
-            <a:ext cx="2329779" cy="369332"/>
-          </a:xfrm>
-          <a:prstGeom prst="rect">
-            <a:avLst/>
-          </a:prstGeom>
-          <a:noFill/>
-        </p:spPr>
-        <p:txBody>
-          <a:bodyPr wrap="square" rtlCol="0">
-            <a:spAutoFit/>
-          </a:bodyPr>
-          <a:lstStyle/>
-          <a:p>
-            <a:pPr algn="ctr"/>
-            <a:r>
-              <a:rPr lang="en-US" b="1" dirty="0"/>
-              <a:t>Control</a:t>
-            </a:r>
-          </a:p>
-        </p:txBody>
-      </p:sp>
-      <p:sp>
-        <p:nvSpPr>
-          <p:cNvPr id="6" name="TextBox 5">
-            <a:extLst>
-              <a:ext uri="{FF2B5EF4-FFF2-40B4-BE49-F238E27FC236}">
-                <a16:creationId xmlns:a16="http://schemas.microsoft.com/office/drawing/2014/main" id="{4794A495-9126-FBFC-6D9E-53D5DCB9FDFE}"/>
-              </a:ext>
-            </a:extLst>
-          </p:cNvPr>
-          <p:cNvSpPr txBox="1"/>
-          <p:nvPr/>
-        </p:nvSpPr>
-        <p:spPr>
-          <a:xfrm>
-            <a:off x="4716469" y="1875059"/>
-            <a:ext cx="2329779" cy="369332"/>
-          </a:xfrm>
-          <a:prstGeom prst="rect">
-            <a:avLst/>
-          </a:prstGeom>
-          <a:noFill/>
-        </p:spPr>
-        <p:txBody>
-          <a:bodyPr wrap="square" rtlCol="0">
-            <a:spAutoFit/>
-          </a:bodyPr>
-          <a:lstStyle/>
-          <a:p>
-            <a:pPr algn="ctr"/>
-            <a:r>
-              <a:rPr lang="en-US" b="1" dirty="0"/>
-              <a:t>Control + Planning</a:t>
-            </a:r>
-          </a:p>
-        </p:txBody>
-      </p:sp>
-      <p:sp>
-        <p:nvSpPr>
-          <p:cNvPr id="7" name="TextBox 6">
-            <a:extLst>
-              <a:ext uri="{FF2B5EF4-FFF2-40B4-BE49-F238E27FC236}">
-                <a16:creationId xmlns:a16="http://schemas.microsoft.com/office/drawing/2014/main" id="{C0E9F7F1-62EF-DF33-C475-EB012E576005}"/>
-              </a:ext>
-            </a:extLst>
-          </p:cNvPr>
-          <p:cNvSpPr txBox="1"/>
-          <p:nvPr/>
-        </p:nvSpPr>
-        <p:spPr>
-          <a:xfrm>
-            <a:off x="8158728" y="1884069"/>
-            <a:ext cx="2329779" cy="369332"/>
-          </a:xfrm>
-          <a:prstGeom prst="rect">
-            <a:avLst/>
-          </a:prstGeom>
-          <a:noFill/>
-        </p:spPr>
-        <p:txBody>
-          <a:bodyPr wrap="square" rtlCol="0">
-            <a:spAutoFit/>
-          </a:bodyPr>
-          <a:lstStyle/>
-          <a:p>
-            <a:pPr algn="ctr"/>
-            <a:r>
-              <a:rPr lang="en-US" b="1" dirty="0"/>
-              <a:t>Planning</a:t>
-            </a:r>
-          </a:p>
-        </p:txBody>
-      </p:sp>
-      <p:pic>
-        <p:nvPicPr>
-          <p:cNvPr id="12" name="Picture 11">
-            <a:extLst>
-              <a:ext uri="{FF2B5EF4-FFF2-40B4-BE49-F238E27FC236}">
-                <a16:creationId xmlns:a16="http://schemas.microsoft.com/office/drawing/2014/main" id="{00F1FECB-2FAB-F809-176E-B86BAF12892C}"/>
-              </a:ext>
-            </a:extLst>
-          </p:cNvPr>
-          <p:cNvPicPr>
-            <a:picLocks noChangeAspect="1"/>
-          </p:cNvPicPr>
-          <p:nvPr/>
-        </p:nvPicPr>
-        <p:blipFill>
-          <a:blip r:embed="rId2"/>
-          <a:stretch>
-            <a:fillRect/>
-          </a:stretch>
-        </p:blipFill>
-        <p:spPr>
-          <a:xfrm>
-            <a:off x="4723305" y="2492879"/>
-            <a:ext cx="2316106" cy="1540323"/>
-          </a:xfrm>
-          <a:prstGeom prst="rect">
-            <a:avLst/>
-          </a:prstGeom>
-        </p:spPr>
-      </p:pic>
-      <p:sp>
-        <p:nvSpPr>
-          <p:cNvPr id="13" name="TextBox 12">
-            <a:extLst>
-              <a:ext uri="{FF2B5EF4-FFF2-40B4-BE49-F238E27FC236}">
-                <a16:creationId xmlns:a16="http://schemas.microsoft.com/office/drawing/2014/main" id="{1C65F84C-0F44-4EAB-843C-9A29B6152D58}"/>
-              </a:ext>
-            </a:extLst>
-          </p:cNvPr>
-          <p:cNvSpPr txBox="1"/>
-          <p:nvPr/>
-        </p:nvSpPr>
-        <p:spPr>
-          <a:xfrm>
-            <a:off x="4670649" y="3833343"/>
-            <a:ext cx="2414551" cy="307777"/>
-          </a:xfrm>
-          <a:prstGeom prst="rect">
-            <a:avLst/>
-          </a:prstGeom>
-          <a:noFill/>
-        </p:spPr>
-        <p:txBody>
-          <a:bodyPr wrap="square" rtlCol="0">
-            <a:spAutoFit/>
-          </a:bodyPr>
-          <a:lstStyle/>
-          <a:p>
-            <a:pPr algn="ctr"/>
-            <a:r>
-              <a:rPr lang="en-US" sz="1400" dirty="0"/>
-              <a:t>Lunar Lander</a:t>
-            </a:r>
-          </a:p>
-        </p:txBody>
-      </p:sp>
-      <p:pic>
-        <p:nvPicPr>
-          <p:cNvPr id="15" name="Picture 14">
-            <a:extLst>
-              <a:ext uri="{FF2B5EF4-FFF2-40B4-BE49-F238E27FC236}">
-                <a16:creationId xmlns:a16="http://schemas.microsoft.com/office/drawing/2014/main" id="{F5264335-9A9D-DF1C-25EA-E98311EE2E8A}"/>
-              </a:ext>
-            </a:extLst>
-          </p:cNvPr>
-          <p:cNvPicPr>
-            <a:picLocks noChangeAspect="1"/>
-          </p:cNvPicPr>
-          <p:nvPr/>
-        </p:nvPicPr>
-        <p:blipFill>
-          <a:blip r:embed="rId3"/>
-          <a:stretch>
-            <a:fillRect/>
-          </a:stretch>
-        </p:blipFill>
-        <p:spPr>
-          <a:xfrm>
-            <a:off x="1405414" y="4468623"/>
-            <a:ext cx="2414551" cy="1583570"/>
-          </a:xfrm>
-          <a:prstGeom prst="rect">
-            <a:avLst/>
-          </a:prstGeom>
-        </p:spPr>
-      </p:pic>
-      <p:sp>
-        <p:nvSpPr>
-          <p:cNvPr id="23" name="TextBox 22">
-            <a:extLst>
-              <a:ext uri="{FF2B5EF4-FFF2-40B4-BE49-F238E27FC236}">
-                <a16:creationId xmlns:a16="http://schemas.microsoft.com/office/drawing/2014/main" id="{E6A946ED-7AAB-8AED-FF70-6D1DC396797B}"/>
-              </a:ext>
-            </a:extLst>
-          </p:cNvPr>
-          <p:cNvSpPr txBox="1"/>
-          <p:nvPr/>
-        </p:nvSpPr>
-        <p:spPr>
-          <a:xfrm>
-            <a:off x="1405414" y="6038240"/>
-            <a:ext cx="2414551" cy="307777"/>
-          </a:xfrm>
-          <a:prstGeom prst="rect">
-            <a:avLst/>
-          </a:prstGeom>
-          <a:noFill/>
-        </p:spPr>
-        <p:txBody>
-          <a:bodyPr wrap="square" rtlCol="0">
-            <a:spAutoFit/>
-          </a:bodyPr>
-          <a:lstStyle/>
-          <a:p>
-            <a:pPr algn="ctr"/>
-            <a:r>
-              <a:rPr lang="en-US" sz="1400" dirty="0"/>
-              <a:t>Car Racing</a:t>
-            </a:r>
-          </a:p>
-        </p:txBody>
-      </p:sp>
-      <p:grpSp>
-        <p:nvGrpSpPr>
-          <p:cNvPr id="38" name="Group 37">
-            <a:extLst>
-              <a:ext uri="{FF2B5EF4-FFF2-40B4-BE49-F238E27FC236}">
-                <a16:creationId xmlns:a16="http://schemas.microsoft.com/office/drawing/2014/main" id="{D2F96F56-1397-9956-6C80-6F8AB63824D6}"/>
-              </a:ext>
-            </a:extLst>
-          </p:cNvPr>
-          <p:cNvGrpSpPr/>
-          <p:nvPr/>
-        </p:nvGrpSpPr>
-        <p:grpSpPr>
-          <a:xfrm>
-            <a:off x="8153834" y="2519711"/>
-            <a:ext cx="2414551" cy="2118636"/>
-            <a:chOff x="9483832" y="4654102"/>
-            <a:chExt cx="2414551" cy="2118636"/>
-          </a:xfrm>
-        </p:grpSpPr>
-        <p:pic>
-          <p:nvPicPr>
-            <p:cNvPr id="19" name="Picture 18">
-              <a:extLst>
-                <a:ext uri="{FF2B5EF4-FFF2-40B4-BE49-F238E27FC236}">
-                  <a16:creationId xmlns:a16="http://schemas.microsoft.com/office/drawing/2014/main" id="{15BA4F59-FDA8-6B5D-76BC-0032B8625C57}"/>
-                </a:ext>
-              </a:extLst>
-            </p:cNvPr>
-            <p:cNvPicPr>
-              <a:picLocks noChangeAspect="1"/>
-            </p:cNvPicPr>
-            <p:nvPr/>
-          </p:nvPicPr>
-          <p:blipFill>
-            <a:blip r:embed="rId4"/>
-            <a:stretch>
-              <a:fillRect/>
-            </a:stretch>
-          </p:blipFill>
-          <p:spPr>
-            <a:xfrm>
-              <a:off x="9787438" y="4654102"/>
-              <a:ext cx="1807340" cy="1838772"/>
-            </a:xfrm>
-            <a:prstGeom prst="rect">
-              <a:avLst/>
-            </a:prstGeom>
-          </p:spPr>
-        </p:pic>
-        <p:sp>
-          <p:nvSpPr>
-            <p:cNvPr id="24" name="TextBox 23">
-              <a:extLst>
-                <a:ext uri="{FF2B5EF4-FFF2-40B4-BE49-F238E27FC236}">
-                  <a16:creationId xmlns:a16="http://schemas.microsoft.com/office/drawing/2014/main" id="{65186131-0788-EA75-7488-23E25363597E}"/>
-                </a:ext>
-              </a:extLst>
-            </p:cNvPr>
-            <p:cNvSpPr txBox="1"/>
-            <p:nvPr/>
-          </p:nvSpPr>
-          <p:spPr>
-            <a:xfrm>
-              <a:off x="9483832" y="6464961"/>
-              <a:ext cx="2414551" cy="307777"/>
-            </a:xfrm>
-            <a:prstGeom prst="rect">
-              <a:avLst/>
-            </a:prstGeom>
-            <a:noFill/>
-          </p:spPr>
-          <p:txBody>
-            <a:bodyPr wrap="square" rtlCol="0">
-              <a:spAutoFit/>
-            </a:bodyPr>
-            <a:lstStyle/>
-            <a:p>
-              <a:pPr algn="ctr"/>
-              <a:r>
-                <a:rPr lang="en-US" sz="1400" dirty="0"/>
-                <a:t>Frozen Lake Maze</a:t>
-              </a:r>
-            </a:p>
-          </p:txBody>
-        </p:sp>
-      </p:grpSp>
-      <p:sp>
-        <p:nvSpPr>
-          <p:cNvPr id="32" name="Speech Bubble: Rectangle with Corners Rounded 31">
-            <a:extLst>
-              <a:ext uri="{FF2B5EF4-FFF2-40B4-BE49-F238E27FC236}">
-                <a16:creationId xmlns:a16="http://schemas.microsoft.com/office/drawing/2014/main" id="{68ED3D05-F8A2-9EB3-EF50-C53238E68C1F}"/>
-              </a:ext>
-            </a:extLst>
-          </p:cNvPr>
-          <p:cNvSpPr/>
-          <p:nvPr/>
-        </p:nvSpPr>
-        <p:spPr>
-          <a:xfrm>
-            <a:off x="2322462" y="1164960"/>
-            <a:ext cx="1394125" cy="372274"/>
-          </a:xfrm>
-          <a:prstGeom prst="wedgeRoundRectCallout">
-            <a:avLst>
-              <a:gd name="adj1" fmla="val -30089"/>
-              <a:gd name="adj2" fmla="val 158152"/>
-              <a:gd name="adj3" fmla="val 16667"/>
-            </a:avLst>
-          </a:prstGeom>
-        </p:spPr>
-        <p:style>
-          <a:lnRef idx="2">
-            <a:schemeClr val="accent1">
-              <a:shade val="15000"/>
-            </a:schemeClr>
-          </a:lnRef>
-          <a:fillRef idx="1">
-            <a:schemeClr val="accent1"/>
-          </a:fillRef>
-          <a:effectRef idx="0">
-            <a:schemeClr val="accent1"/>
-          </a:effectRef>
-          <a:fontRef idx="minor">
-            <a:schemeClr val="lt1"/>
-          </a:fontRef>
-        </p:style>
-        <p:txBody>
-          <a:bodyPr rtlCol="0" anchor="ctr"/>
-          <a:lstStyle/>
-          <a:p>
-            <a:pPr algn="ctr"/>
-            <a:r>
-              <a:rPr lang="en-US" b="1"/>
-              <a:t>Robotics</a:t>
-            </a:r>
-            <a:endParaRPr lang="en-US" b="1" dirty="0"/>
           </a:p>
         </p:txBody>
       </p:sp>
@@ -11926,53 +11519,15 @@
           </a:p>
         </p:txBody>
       </p:sp>
-      <p:sp>
-        <p:nvSpPr>
-          <p:cNvPr id="37" name="TextBox 36">
+      <p:grpSp>
+        <p:nvGrpSpPr>
+          <p:cNvPr id="3" name="Group 2">
             <a:extLst>
               <a:ext uri="{FF2B5EF4-FFF2-40B4-BE49-F238E27FC236}">
-                <a16:creationId xmlns:a16="http://schemas.microsoft.com/office/drawing/2014/main" id="{F8F631AD-44EE-94F3-0526-6C44BCB6B4F0}"/>
+                <a16:creationId xmlns:a16="http://schemas.microsoft.com/office/drawing/2014/main" id="{C53F5769-1B04-FEF9-71DD-634930B20F51}"/>
               </a:ext>
-            </a:extLst>
-          </p:cNvPr>
-          <p:cNvSpPr txBox="1"/>
-          <p:nvPr/>
-        </p:nvSpPr>
-        <p:spPr>
-          <a:xfrm>
-            <a:off x="10356314" y="3202170"/>
-            <a:ext cx="1011880" cy="523220"/>
-          </a:xfrm>
-          <a:prstGeom prst="rect">
-            <a:avLst/>
-          </a:prstGeom>
-          <a:noFill/>
-        </p:spPr>
-        <p:txBody>
-          <a:bodyPr wrap="none" rtlCol="0">
-            <a:spAutoFit/>
-          </a:bodyPr>
-          <a:lstStyle/>
-          <a:p>
-            <a:r>
-              <a:rPr lang="en-US" sz="1400" dirty="0"/>
-              <a:t>Navigation</a:t>
-            </a:r>
-          </a:p>
-          <a:p>
-            <a:r>
-              <a:rPr lang="en-US" sz="1400" dirty="0"/>
-              <a:t>Problem</a:t>
-            </a:r>
-          </a:p>
-        </p:txBody>
-      </p:sp>
-      <p:grpSp>
-        <p:nvGrpSpPr>
-          <p:cNvPr id="44" name="Group 43">
-            <a:extLst>
-              <a:ext uri="{FF2B5EF4-FFF2-40B4-BE49-F238E27FC236}">
-                <a16:creationId xmlns:a16="http://schemas.microsoft.com/office/drawing/2014/main" id="{AE8CB1F4-8B58-4FA6-CE15-956DE2EABC2F}"/>
+              <a:ext uri="{C183D7F6-B498-43B3-948B-1728B52AA6E4}">
+                <adec:decorative xmlns:adec="http://schemas.microsoft.com/office/drawing/2017/decorative" val="1"/>
               </a:ext>
             </a:extLst>
           </p:cNvPr>
@@ -11981,334 +11536,21 @@
         </p:nvGrpSpPr>
         <p:grpSpPr>
           <a:xfrm>
-            <a:off x="8237051" y="4624793"/>
-            <a:ext cx="2414551" cy="2145353"/>
-            <a:chOff x="7069281" y="4526579"/>
-            <a:chExt cx="2414551" cy="2145353"/>
-          </a:xfrm>
-        </p:grpSpPr>
-        <p:pic>
-          <p:nvPicPr>
-            <p:cNvPr id="1032" name="Picture 8" descr="Chess | Game, Setup, Board, Rules, &amp; Pieces | Britannica">
-              <a:extLst>
-                <a:ext uri="{FF2B5EF4-FFF2-40B4-BE49-F238E27FC236}">
-                  <a16:creationId xmlns:a16="http://schemas.microsoft.com/office/drawing/2014/main" id="{6D2816B3-A3E6-0C0D-E563-A25D7847A00F}"/>
-                </a:ext>
-              </a:extLst>
-            </p:cNvPr>
-            <p:cNvPicPr>
-              <a:picLocks noChangeAspect="1" noChangeArrowheads="1"/>
-            </p:cNvPicPr>
-            <p:nvPr/>
-          </p:nvPicPr>
-          <p:blipFill>
-            <a:blip r:embed="rId5">
-              <a:extLst>
-                <a:ext uri="{28A0092B-C50C-407E-A947-70E740481C1C}">
-                  <a14:useLocalDpi xmlns:a14="http://schemas.microsoft.com/office/drawing/2010/main" val="0"/>
-                </a:ext>
-              </a:extLst>
-            </a:blip>
-            <a:srcRect/>
-            <a:stretch>
-              <a:fillRect/>
-            </a:stretch>
-          </p:blipFill>
-          <p:spPr bwMode="auto">
-            <a:xfrm>
-              <a:off x="7264900" y="4526579"/>
-              <a:ext cx="1973486" cy="1991465"/>
-            </a:xfrm>
-            <a:prstGeom prst="rect">
-              <a:avLst/>
-            </a:prstGeom>
-            <a:noFill/>
-            <a:extLst>
-              <a:ext uri="{909E8E84-426E-40DD-AFC4-6F175D3DCCD1}">
-                <a14:hiddenFill xmlns:a14="http://schemas.microsoft.com/office/drawing/2010/main">
-                  <a:solidFill>
-                    <a:srgbClr val="FFFFFF"/>
-                  </a:solidFill>
-                </a14:hiddenFill>
-              </a:ext>
-            </a:extLst>
-          </p:spPr>
-        </p:pic>
-        <p:sp>
-          <p:nvSpPr>
-            <p:cNvPr id="43" name="TextBox 42">
-              <a:extLst>
-                <a:ext uri="{FF2B5EF4-FFF2-40B4-BE49-F238E27FC236}">
-                  <a16:creationId xmlns:a16="http://schemas.microsoft.com/office/drawing/2014/main" id="{BA29134E-9033-C38A-92B6-FCA69BF345BE}"/>
-                </a:ext>
-              </a:extLst>
-            </p:cNvPr>
-            <p:cNvSpPr txBox="1"/>
-            <p:nvPr/>
-          </p:nvSpPr>
-          <p:spPr>
-            <a:xfrm>
-              <a:off x="7069281" y="6364155"/>
-              <a:ext cx="2414551" cy="307777"/>
-            </a:xfrm>
-            <a:prstGeom prst="rect">
-              <a:avLst/>
-            </a:prstGeom>
-            <a:noFill/>
-          </p:spPr>
-          <p:txBody>
-            <a:bodyPr wrap="square" rtlCol="0">
-              <a:spAutoFit/>
-            </a:bodyPr>
-            <a:lstStyle/>
-            <a:p>
-              <a:pPr algn="ctr"/>
-              <a:r>
-                <a:rPr lang="en-US" sz="1400" dirty="0"/>
-                <a:t>Chess</a:t>
-              </a:r>
-            </a:p>
-          </p:txBody>
-        </p:sp>
-      </p:grpSp>
-      <p:grpSp>
-        <p:nvGrpSpPr>
-          <p:cNvPr id="52" name="Group 51">
-            <a:extLst>
-              <a:ext uri="{FF2B5EF4-FFF2-40B4-BE49-F238E27FC236}">
-                <a16:creationId xmlns:a16="http://schemas.microsoft.com/office/drawing/2014/main" id="{ED13958F-DFB4-96C1-9C25-7E1BCF1F67A3}"/>
-              </a:ext>
-            </a:extLst>
-          </p:cNvPr>
-          <p:cNvGrpSpPr/>
-          <p:nvPr/>
-        </p:nvGrpSpPr>
-        <p:grpSpPr>
-          <a:xfrm>
-            <a:off x="1405415" y="2472094"/>
-            <a:ext cx="2414551" cy="1738057"/>
-            <a:chOff x="1405415" y="2472094"/>
-            <a:chExt cx="2414551" cy="1738057"/>
+            <a:off x="711976" y="1164960"/>
+            <a:ext cx="10749435" cy="5605186"/>
+            <a:chOff x="711976" y="1164960"/>
+            <a:chExt cx="10749435" cy="5605186"/>
           </a:xfrm>
         </p:grpSpPr>
         <p:sp>
           <p:nvSpPr>
-            <p:cNvPr id="4" name="TextBox 3">
+            <p:cNvPr id="28" name="Arrow: Left-Right 27">
               <a:extLst>
                 <a:ext uri="{FF2B5EF4-FFF2-40B4-BE49-F238E27FC236}">
-                  <a16:creationId xmlns:a16="http://schemas.microsoft.com/office/drawing/2014/main" id="{1A1038AB-92F4-5C61-836A-2373B3CD203E}"/>
+                  <a16:creationId xmlns:a16="http://schemas.microsoft.com/office/drawing/2014/main" id="{19416EC9-5162-F682-1DB8-1CC781FC4DC2}"/>
                 </a:ext>
-              </a:extLst>
-            </p:cNvPr>
-            <p:cNvSpPr txBox="1"/>
-            <p:nvPr/>
-          </p:nvSpPr>
-          <p:spPr>
-            <a:xfrm>
-              <a:off x="1405415" y="3902374"/>
-              <a:ext cx="2414551" cy="307777"/>
-            </a:xfrm>
-            <a:prstGeom prst="rect">
-              <a:avLst/>
-            </a:prstGeom>
-            <a:noFill/>
-          </p:spPr>
-          <p:txBody>
-            <a:bodyPr wrap="square" rtlCol="0">
-              <a:spAutoFit/>
-            </a:bodyPr>
-            <a:lstStyle/>
-            <a:p>
-              <a:pPr algn="ctr"/>
-              <a:r>
-                <a:rPr lang="en-US" sz="1400" dirty="0"/>
-                <a:t>Inverted Pendulum/Cartpole</a:t>
-              </a:r>
-            </a:p>
-          </p:txBody>
-        </p:sp>
-        <p:pic>
-          <p:nvPicPr>
-            <p:cNvPr id="17" name="Picture 16">
-              <a:extLst>
-                <a:ext uri="{FF2B5EF4-FFF2-40B4-BE49-F238E27FC236}">
-                  <a16:creationId xmlns:a16="http://schemas.microsoft.com/office/drawing/2014/main" id="{3580BBFE-D17C-51E2-0C57-C0D7D0400EEB}"/>
-                </a:ext>
-              </a:extLst>
-            </p:cNvPr>
-            <p:cNvPicPr>
-              <a:picLocks noChangeAspect="1"/>
-            </p:cNvPicPr>
-            <p:nvPr/>
-          </p:nvPicPr>
-          <p:blipFill>
-            <a:blip r:embed="rId6"/>
-            <a:stretch>
-              <a:fillRect/>
-            </a:stretch>
-          </p:blipFill>
-          <p:spPr>
-            <a:xfrm>
-              <a:off x="1540398" y="2472094"/>
-              <a:ext cx="2176189" cy="1460153"/>
-            </a:xfrm>
-            <a:prstGeom prst="rect">
-              <a:avLst/>
-            </a:prstGeom>
-          </p:spPr>
-        </p:pic>
-        <p:cxnSp>
-          <p:nvCxnSpPr>
-            <p:cNvPr id="46" name="Straight Arrow Connector 45">
-              <a:extLst>
-                <a:ext uri="{FF2B5EF4-FFF2-40B4-BE49-F238E27FC236}">
-                  <a16:creationId xmlns:a16="http://schemas.microsoft.com/office/drawing/2014/main" id="{24B54B62-C9AD-8B35-1583-51CC89F68029}"/>
-                </a:ext>
-              </a:extLst>
-            </p:cNvPr>
-            <p:cNvCxnSpPr/>
-            <p:nvPr/>
-          </p:nvCxnSpPr>
-          <p:spPr>
-            <a:xfrm>
-              <a:off x="2785081" y="3552898"/>
-              <a:ext cx="258266" cy="0"/>
-            </a:xfrm>
-            <a:prstGeom prst="straightConnector1">
-              <a:avLst/>
-            </a:prstGeom>
-            <a:ln>
-              <a:tailEnd type="triangle"/>
-            </a:ln>
-          </p:spPr>
-          <p:style>
-            <a:lnRef idx="2">
-              <a:schemeClr val="accent1"/>
-            </a:lnRef>
-            <a:fillRef idx="0">
-              <a:schemeClr val="accent1"/>
-            </a:fillRef>
-            <a:effectRef idx="1">
-              <a:schemeClr val="accent1"/>
-            </a:effectRef>
-            <a:fontRef idx="minor">
-              <a:schemeClr val="tx1"/>
-            </a:fontRef>
-          </p:style>
-        </p:cxnSp>
-        <p:cxnSp>
-          <p:nvCxnSpPr>
-            <p:cNvPr id="47" name="Straight Arrow Connector 46">
-              <a:extLst>
-                <a:ext uri="{FF2B5EF4-FFF2-40B4-BE49-F238E27FC236}">
-                  <a16:creationId xmlns:a16="http://schemas.microsoft.com/office/drawing/2014/main" id="{1E353D54-0A7B-17A9-11E3-C6A1240E7B89}"/>
-                </a:ext>
-              </a:extLst>
-            </p:cNvPr>
-            <p:cNvCxnSpPr>
-              <a:cxnSpLocks/>
-            </p:cNvCxnSpPr>
-            <p:nvPr/>
-          </p:nvCxnSpPr>
-          <p:spPr>
-            <a:xfrm flipH="1">
-              <a:off x="2240627" y="3552898"/>
-              <a:ext cx="264082" cy="0"/>
-            </a:xfrm>
-            <a:prstGeom prst="straightConnector1">
-              <a:avLst/>
-            </a:prstGeom>
-            <a:ln>
-              <a:tailEnd type="triangle"/>
-            </a:ln>
-          </p:spPr>
-          <p:style>
-            <a:lnRef idx="2">
-              <a:schemeClr val="accent1"/>
-            </a:lnRef>
-            <a:fillRef idx="0">
-              <a:schemeClr val="accent1"/>
-            </a:fillRef>
-            <a:effectRef idx="1">
-              <a:schemeClr val="accent1"/>
-            </a:effectRef>
-            <a:fontRef idx="minor">
-              <a:schemeClr val="tx1"/>
-            </a:fontRef>
-          </p:style>
-        </p:cxnSp>
-        <p:cxnSp>
-          <p:nvCxnSpPr>
-            <p:cNvPr id="50" name="Straight Connector 49">
-              <a:extLst>
-                <a:ext uri="{FF2B5EF4-FFF2-40B4-BE49-F238E27FC236}">
-                  <a16:creationId xmlns:a16="http://schemas.microsoft.com/office/drawing/2014/main" id="{CF5DAF2D-837A-A69B-34DC-4D0F03279287}"/>
-                </a:ext>
-              </a:extLst>
-            </p:cNvPr>
-            <p:cNvCxnSpPr/>
-            <p:nvPr/>
-          </p:nvCxnSpPr>
-          <p:spPr>
-            <a:xfrm flipV="1">
-              <a:off x="2645478" y="3029383"/>
-              <a:ext cx="0" cy="732916"/>
-            </a:xfrm>
-            <a:prstGeom prst="line">
-              <a:avLst/>
-            </a:prstGeom>
-            <a:ln w="6350" cap="flat" cmpd="sng" algn="ctr">
-              <a:solidFill>
-                <a:schemeClr val="dk1"/>
-              </a:solidFill>
-              <a:prstDash val="dash"/>
-              <a:round/>
-              <a:headEnd type="none" w="med" len="med"/>
-              <a:tailEnd type="none" w="med" len="med"/>
-            </a:ln>
-          </p:spPr>
-          <p:style>
-            <a:lnRef idx="0">
-              <a:scrgbClr r="0" g="0" b="0"/>
-            </a:lnRef>
-            <a:fillRef idx="0">
-              <a:scrgbClr r="0" g="0" b="0"/>
-            </a:fillRef>
-            <a:effectRef idx="0">
-              <a:scrgbClr r="0" g="0" b="0"/>
-            </a:effectRef>
-            <a:fontRef idx="minor">
-              <a:schemeClr val="tx1"/>
-            </a:fontRef>
-          </p:style>
-        </p:cxnSp>
-      </p:grpSp>
-      <p:grpSp>
-        <p:nvGrpSpPr>
-          <p:cNvPr id="55" name="Group 54">
-            <a:extLst>
-              <a:ext uri="{FF2B5EF4-FFF2-40B4-BE49-F238E27FC236}">
-                <a16:creationId xmlns:a16="http://schemas.microsoft.com/office/drawing/2014/main" id="{B01FC211-82C8-333A-5373-AA26C80A2F5C}"/>
-              </a:ext>
-            </a:extLst>
-          </p:cNvPr>
-          <p:cNvGrpSpPr/>
-          <p:nvPr/>
-        </p:nvGrpSpPr>
-        <p:grpSpPr>
-          <a:xfrm>
-            <a:off x="4416816" y="2408153"/>
-            <a:ext cx="7044595" cy="4361993"/>
-            <a:chOff x="4416816" y="2408153"/>
-            <a:chExt cx="7044595" cy="4361993"/>
-          </a:xfrm>
-        </p:grpSpPr>
-        <p:sp>
-          <p:nvSpPr>
-            <p:cNvPr id="53" name="Rectangle 52">
-              <a:extLst>
-                <a:ext uri="{FF2B5EF4-FFF2-40B4-BE49-F238E27FC236}">
-                  <a16:creationId xmlns:a16="http://schemas.microsoft.com/office/drawing/2014/main" id="{90A2101D-EF2C-346E-BE27-4A215834799E}"/>
+                <a:ext uri="{C183D7F6-B498-43B3-948B-1728B52AA6E4}">
+                  <adec:decorative xmlns:adec="http://schemas.microsoft.com/office/drawing/2017/decorative" val="1"/>
                 </a:ext>
               </a:extLst>
             </p:cNvPr>
@@ -12317,16 +11559,21 @@
           </p:nvSpPr>
           <p:spPr>
             <a:xfrm>
-              <a:off x="4416816" y="2408153"/>
-              <a:ext cx="7044595" cy="4361993"/>
+              <a:off x="711976" y="1618462"/>
+              <a:ext cx="10700574" cy="906904"/>
             </a:xfrm>
-            <a:prstGeom prst="rect">
+            <a:prstGeom prst="leftRightArrow">
               <a:avLst/>
             </a:prstGeom>
-            <a:noFill/>
-            <a:ln w="38100" cap="flat" cmpd="sng" algn="ctr">
+            <a:solidFill>
+              <a:schemeClr val="accent2">
+                <a:lumMod val="20000"/>
+                <a:lumOff val="80000"/>
+              </a:schemeClr>
+            </a:solidFill>
+            <a:ln w="9525" cap="flat" cmpd="sng" algn="ctr">
               <a:solidFill>
-                <a:schemeClr val="accent1"/>
+                <a:schemeClr val="accent2"/>
               </a:solidFill>
               <a:prstDash val="solid"/>
               <a:round/>
@@ -12345,7 +11592,7 @@
               <a:scrgbClr r="0" g="0" b="0"/>
             </a:effectRef>
             <a:fontRef idx="minor">
-              <a:schemeClr val="accent1"/>
+              <a:schemeClr val="accent2"/>
             </a:fontRef>
           </p:style>
           <p:txBody>
@@ -12359,10 +11606,10 @@
         </p:sp>
         <p:sp>
           <p:nvSpPr>
-            <p:cNvPr id="54" name="TextBox 53">
+            <p:cNvPr id="5" name="TextBox 4">
               <a:extLst>
                 <a:ext uri="{FF2B5EF4-FFF2-40B4-BE49-F238E27FC236}">
-                  <a16:creationId xmlns:a16="http://schemas.microsoft.com/office/drawing/2014/main" id="{9A7A8A7B-7A1A-251D-EE5C-EF8403A4EF6D}"/>
+                  <a16:creationId xmlns:a16="http://schemas.microsoft.com/office/drawing/2014/main" id="{3C2ED09A-0CB4-EFE4-F1AF-5BBEB5F3251A}"/>
                 </a:ext>
               </a:extLst>
             </p:cNvPr>
@@ -12371,8 +11618,610 @@
           </p:nvSpPr>
           <p:spPr>
             <a:xfrm>
-              <a:off x="4416816" y="6354055"/>
-              <a:ext cx="2787045" cy="369332"/>
+              <a:off x="1463603" y="1884069"/>
+              <a:ext cx="2329779" cy="369332"/>
+            </a:xfrm>
+            <a:prstGeom prst="rect">
+              <a:avLst/>
+            </a:prstGeom>
+            <a:noFill/>
+          </p:spPr>
+          <p:txBody>
+            <a:bodyPr wrap="square" rtlCol="0">
+              <a:spAutoFit/>
+            </a:bodyPr>
+            <a:lstStyle/>
+            <a:p>
+              <a:pPr algn="ctr"/>
+              <a:r>
+                <a:rPr lang="en-US" b="1" dirty="0"/>
+                <a:t>Control</a:t>
+              </a:r>
+            </a:p>
+          </p:txBody>
+        </p:sp>
+        <p:sp>
+          <p:nvSpPr>
+            <p:cNvPr id="6" name="TextBox 5">
+              <a:extLst>
+                <a:ext uri="{FF2B5EF4-FFF2-40B4-BE49-F238E27FC236}">
+                  <a16:creationId xmlns:a16="http://schemas.microsoft.com/office/drawing/2014/main" id="{4794A495-9126-FBFC-6D9E-53D5DCB9FDFE}"/>
+                </a:ext>
+              </a:extLst>
+            </p:cNvPr>
+            <p:cNvSpPr txBox="1"/>
+            <p:nvPr/>
+          </p:nvSpPr>
+          <p:spPr>
+            <a:xfrm>
+              <a:off x="4716469" y="1875059"/>
+              <a:ext cx="2329779" cy="369332"/>
+            </a:xfrm>
+            <a:prstGeom prst="rect">
+              <a:avLst/>
+            </a:prstGeom>
+            <a:noFill/>
+          </p:spPr>
+          <p:txBody>
+            <a:bodyPr wrap="square" rtlCol="0">
+              <a:spAutoFit/>
+            </a:bodyPr>
+            <a:lstStyle/>
+            <a:p>
+              <a:pPr algn="ctr"/>
+              <a:r>
+                <a:rPr lang="en-US" b="1" dirty="0"/>
+                <a:t>Control + Planning</a:t>
+              </a:r>
+            </a:p>
+          </p:txBody>
+        </p:sp>
+        <p:sp>
+          <p:nvSpPr>
+            <p:cNvPr id="7" name="TextBox 6">
+              <a:extLst>
+                <a:ext uri="{FF2B5EF4-FFF2-40B4-BE49-F238E27FC236}">
+                  <a16:creationId xmlns:a16="http://schemas.microsoft.com/office/drawing/2014/main" id="{C0E9F7F1-62EF-DF33-C475-EB012E576005}"/>
+                </a:ext>
+              </a:extLst>
+            </p:cNvPr>
+            <p:cNvSpPr txBox="1"/>
+            <p:nvPr/>
+          </p:nvSpPr>
+          <p:spPr>
+            <a:xfrm>
+              <a:off x="8158728" y="1884069"/>
+              <a:ext cx="2329779" cy="369332"/>
+            </a:xfrm>
+            <a:prstGeom prst="rect">
+              <a:avLst/>
+            </a:prstGeom>
+            <a:noFill/>
+          </p:spPr>
+          <p:txBody>
+            <a:bodyPr wrap="square" rtlCol="0">
+              <a:spAutoFit/>
+            </a:bodyPr>
+            <a:lstStyle/>
+            <a:p>
+              <a:pPr algn="ctr"/>
+              <a:r>
+                <a:rPr lang="en-US" b="1" dirty="0"/>
+                <a:t>Planning</a:t>
+              </a:r>
+            </a:p>
+          </p:txBody>
+        </p:sp>
+        <p:pic>
+          <p:nvPicPr>
+            <p:cNvPr id="12" name="Picture 11" descr="Screenshot of the Gym Lunar Lander environment: a purple lander descending toward a flat landing pad marked by two yellow flags on a white moon surface.">
+              <a:extLst>
+                <a:ext uri="{FF2B5EF4-FFF2-40B4-BE49-F238E27FC236}">
+                  <a16:creationId xmlns:a16="http://schemas.microsoft.com/office/drawing/2014/main" id="{00F1FECB-2FAB-F809-176E-B86BAF12892C}"/>
+                </a:ext>
+              </a:extLst>
+            </p:cNvPr>
+            <p:cNvPicPr>
+              <a:picLocks noChangeAspect="1"/>
+            </p:cNvPicPr>
+            <p:nvPr/>
+          </p:nvPicPr>
+          <p:blipFill>
+            <a:blip r:embed="rId2"/>
+            <a:stretch>
+              <a:fillRect/>
+            </a:stretch>
+          </p:blipFill>
+          <p:spPr>
+            <a:xfrm>
+              <a:off x="4723305" y="2492879"/>
+              <a:ext cx="2316106" cy="1540323"/>
+            </a:xfrm>
+            <a:prstGeom prst="rect">
+              <a:avLst/>
+            </a:prstGeom>
+          </p:spPr>
+        </p:pic>
+        <p:grpSp>
+          <p:nvGrpSpPr>
+            <p:cNvPr id="38" name="Group 37" descr="Screenshot of the Gym Frozen Lake environment: a 4 by 4 grid of ice with an elf at the start in the top-left corner, holes in the ice, and a present (the goal) in the bottom-right corner. Labels: Frozen Lake Maze.">
+              <a:extLst>
+                <a:ext uri="{FF2B5EF4-FFF2-40B4-BE49-F238E27FC236}">
+                  <a16:creationId xmlns:a16="http://schemas.microsoft.com/office/drawing/2014/main" id="{D2F96F56-1397-9956-6C80-6F8AB63824D6}"/>
+                </a:ext>
+              </a:extLst>
+            </p:cNvPr>
+            <p:cNvGrpSpPr/>
+            <p:nvPr/>
+          </p:nvGrpSpPr>
+          <p:grpSpPr>
+            <a:xfrm>
+              <a:off x="8153834" y="2519711"/>
+              <a:ext cx="2414551" cy="2118636"/>
+              <a:chOff x="9483832" y="4654102"/>
+              <a:chExt cx="2414551" cy="2118636"/>
+            </a:xfrm>
+          </p:grpSpPr>
+          <p:pic>
+            <p:nvPicPr>
+              <p:cNvPr id="19" name="Picture 18" descr="Screenshot of the Gym Frozen Lake environment: a 4 by 4 grid of ice with an elf at the start in the top-left corner, holes in the ice, and a present (the goal) in the bottom-right corner.">
+                <a:extLst>
+                  <a:ext uri="{FF2B5EF4-FFF2-40B4-BE49-F238E27FC236}">
+                    <a16:creationId xmlns:a16="http://schemas.microsoft.com/office/drawing/2014/main" id="{15BA4F59-FDA8-6B5D-76BC-0032B8625C57}"/>
+                  </a:ext>
+                </a:extLst>
+              </p:cNvPr>
+              <p:cNvPicPr>
+                <a:picLocks noChangeAspect="1"/>
+              </p:cNvPicPr>
+              <p:nvPr/>
+            </p:nvPicPr>
+            <p:blipFill>
+              <a:blip r:embed="rId3"/>
+              <a:stretch>
+                <a:fillRect/>
+              </a:stretch>
+            </p:blipFill>
+            <p:spPr>
+              <a:xfrm>
+                <a:off x="9787438" y="4654102"/>
+                <a:ext cx="1807340" cy="1838772"/>
+              </a:xfrm>
+              <a:prstGeom prst="rect">
+                <a:avLst/>
+              </a:prstGeom>
+            </p:spPr>
+          </p:pic>
+          <p:sp>
+            <p:nvSpPr>
+              <p:cNvPr id="24" name="TextBox 23">
+                <a:extLst>
+                  <a:ext uri="{FF2B5EF4-FFF2-40B4-BE49-F238E27FC236}">
+                    <a16:creationId xmlns:a16="http://schemas.microsoft.com/office/drawing/2014/main" id="{65186131-0788-EA75-7488-23E25363597E}"/>
+                  </a:ext>
+                </a:extLst>
+              </p:cNvPr>
+              <p:cNvSpPr txBox="1"/>
+              <p:nvPr/>
+            </p:nvSpPr>
+            <p:spPr>
+              <a:xfrm>
+                <a:off x="9483832" y="6464961"/>
+                <a:ext cx="2414551" cy="307777"/>
+              </a:xfrm>
+              <a:prstGeom prst="rect">
+                <a:avLst/>
+              </a:prstGeom>
+              <a:noFill/>
+            </p:spPr>
+            <p:txBody>
+              <a:bodyPr wrap="square" rtlCol="0">
+                <a:spAutoFit/>
+              </a:bodyPr>
+              <a:lstStyle/>
+              <a:p>
+                <a:pPr algn="ctr"/>
+                <a:r>
+                  <a:rPr lang="en-US" sz="1400" dirty="0"/>
+                  <a:t>Frozen Lake Maze</a:t>
+                </a:r>
+              </a:p>
+            </p:txBody>
+          </p:sp>
+        </p:grpSp>
+        <p:sp>
+          <p:nvSpPr>
+            <p:cNvPr id="13" name="TextBox 12">
+              <a:extLst>
+                <a:ext uri="{FF2B5EF4-FFF2-40B4-BE49-F238E27FC236}">
+                  <a16:creationId xmlns:a16="http://schemas.microsoft.com/office/drawing/2014/main" id="{1C65F84C-0F44-4EAB-843C-9A29B6152D58}"/>
+                </a:ext>
+              </a:extLst>
+            </p:cNvPr>
+            <p:cNvSpPr txBox="1"/>
+            <p:nvPr/>
+          </p:nvSpPr>
+          <p:spPr>
+            <a:xfrm>
+              <a:off x="4670649" y="3833343"/>
+              <a:ext cx="2414551" cy="307777"/>
+            </a:xfrm>
+            <a:prstGeom prst="rect">
+              <a:avLst/>
+            </a:prstGeom>
+            <a:noFill/>
+          </p:spPr>
+          <p:txBody>
+            <a:bodyPr wrap="square" rtlCol="0">
+              <a:spAutoFit/>
+            </a:bodyPr>
+            <a:lstStyle/>
+            <a:p>
+              <a:pPr algn="ctr"/>
+              <a:r>
+                <a:rPr lang="en-US" sz="1400" dirty="0"/>
+                <a:t>Lunar Lander</a:t>
+              </a:r>
+            </a:p>
+          </p:txBody>
+        </p:sp>
+        <p:pic>
+          <p:nvPicPr>
+            <p:cNvPr id="15" name="Picture 14" descr="Screenshot of the Gym Car Racing environment: a red race car on a gray track seen from above, with green grass on both sides and a score of 0004.">
+              <a:extLst>
+                <a:ext uri="{FF2B5EF4-FFF2-40B4-BE49-F238E27FC236}">
+                  <a16:creationId xmlns:a16="http://schemas.microsoft.com/office/drawing/2014/main" id="{F5264335-9A9D-DF1C-25EA-E98311EE2E8A}"/>
+                </a:ext>
+              </a:extLst>
+            </p:cNvPr>
+            <p:cNvPicPr>
+              <a:picLocks noChangeAspect="1"/>
+            </p:cNvPicPr>
+            <p:nvPr/>
+          </p:nvPicPr>
+          <p:blipFill>
+            <a:blip r:embed="rId4"/>
+            <a:stretch>
+              <a:fillRect/>
+            </a:stretch>
+          </p:blipFill>
+          <p:spPr>
+            <a:xfrm>
+              <a:off x="1405414" y="4468623"/>
+              <a:ext cx="2414551" cy="1583570"/>
+            </a:xfrm>
+            <a:prstGeom prst="rect">
+              <a:avLst/>
+            </a:prstGeom>
+          </p:spPr>
+        </p:pic>
+        <p:sp>
+          <p:nvSpPr>
+            <p:cNvPr id="23" name="TextBox 22">
+              <a:extLst>
+                <a:ext uri="{FF2B5EF4-FFF2-40B4-BE49-F238E27FC236}">
+                  <a16:creationId xmlns:a16="http://schemas.microsoft.com/office/drawing/2014/main" id="{E6A946ED-7AAB-8AED-FF70-6D1DC396797B}"/>
+                </a:ext>
+              </a:extLst>
+            </p:cNvPr>
+            <p:cNvSpPr txBox="1"/>
+            <p:nvPr/>
+          </p:nvSpPr>
+          <p:spPr>
+            <a:xfrm>
+              <a:off x="1405414" y="6038240"/>
+              <a:ext cx="2414551" cy="307777"/>
+            </a:xfrm>
+            <a:prstGeom prst="rect">
+              <a:avLst/>
+            </a:prstGeom>
+            <a:noFill/>
+          </p:spPr>
+          <p:txBody>
+            <a:bodyPr wrap="square" rtlCol="0">
+              <a:spAutoFit/>
+            </a:bodyPr>
+            <a:lstStyle/>
+            <a:p>
+              <a:pPr algn="ctr"/>
+              <a:r>
+                <a:rPr lang="en-US" sz="1400" dirty="0"/>
+                <a:t>Car Racing</a:t>
+              </a:r>
+            </a:p>
+          </p:txBody>
+        </p:sp>
+        <p:sp>
+          <p:nvSpPr>
+            <p:cNvPr id="32" name="Speech Bubble: Rectangle with Corners Rounded 31">
+              <a:extLst>
+                <a:ext uri="{FF2B5EF4-FFF2-40B4-BE49-F238E27FC236}">
+                  <a16:creationId xmlns:a16="http://schemas.microsoft.com/office/drawing/2014/main" id="{68ED3D05-F8A2-9EB3-EF50-C53238E68C1F}"/>
+                </a:ext>
+              </a:extLst>
+            </p:cNvPr>
+            <p:cNvSpPr/>
+            <p:nvPr/>
+          </p:nvSpPr>
+          <p:spPr>
+            <a:xfrm>
+              <a:off x="2322462" y="1164960"/>
+              <a:ext cx="1394125" cy="372274"/>
+            </a:xfrm>
+            <a:prstGeom prst="wedgeRoundRectCallout">
+              <a:avLst>
+                <a:gd name="adj1" fmla="val -30089"/>
+                <a:gd name="adj2" fmla="val 158152"/>
+                <a:gd name="adj3" fmla="val 16667"/>
+              </a:avLst>
+            </a:prstGeom>
+          </p:spPr>
+          <p:style>
+            <a:lnRef idx="2">
+              <a:schemeClr val="accent1">
+                <a:shade val="15000"/>
+              </a:schemeClr>
+            </a:lnRef>
+            <a:fillRef idx="1">
+              <a:schemeClr val="accent1"/>
+            </a:fillRef>
+            <a:effectRef idx="0">
+              <a:schemeClr val="accent1"/>
+            </a:effectRef>
+            <a:fontRef idx="minor">
+              <a:schemeClr val="lt1"/>
+            </a:fontRef>
+          </p:style>
+          <p:txBody>
+            <a:bodyPr rtlCol="0" anchor="ctr"/>
+            <a:lstStyle/>
+            <a:p>
+              <a:pPr algn="ctr"/>
+              <a:r>
+                <a:rPr lang="en-US" b="1"/>
+                <a:t>Robotics</a:t>
+              </a:r>
+              <a:endParaRPr lang="en-US" b="1" dirty="0"/>
+            </a:p>
+          </p:txBody>
+        </p:sp>
+        <p:grpSp>
+          <p:nvGrpSpPr>
+            <p:cNvPr id="52" name="Group 51" descr="Screenshot of the Gym Cart Pole environment: a black cart on a track balancing an upright brown pole. Labels: Inverted Pendulum/Cartpole.">
+              <a:extLst>
+                <a:ext uri="{FF2B5EF4-FFF2-40B4-BE49-F238E27FC236}">
+                  <a16:creationId xmlns:a16="http://schemas.microsoft.com/office/drawing/2014/main" id="{ED13958F-DFB4-96C1-9C25-7E1BCF1F67A3}"/>
+                </a:ext>
+              </a:extLst>
+            </p:cNvPr>
+            <p:cNvGrpSpPr/>
+            <p:nvPr/>
+          </p:nvGrpSpPr>
+          <p:grpSpPr>
+            <a:xfrm>
+              <a:off x="1405415" y="2472094"/>
+              <a:ext cx="2414551" cy="1738057"/>
+              <a:chOff x="1405415" y="2472094"/>
+              <a:chExt cx="2414551" cy="1738057"/>
+            </a:xfrm>
+          </p:grpSpPr>
+          <p:sp>
+            <p:nvSpPr>
+              <p:cNvPr id="4" name="TextBox 3">
+                <a:extLst>
+                  <a:ext uri="{FF2B5EF4-FFF2-40B4-BE49-F238E27FC236}">
+                    <a16:creationId xmlns:a16="http://schemas.microsoft.com/office/drawing/2014/main" id="{1A1038AB-92F4-5C61-836A-2373B3CD203E}"/>
+                  </a:ext>
+                </a:extLst>
+              </p:cNvPr>
+              <p:cNvSpPr txBox="1"/>
+              <p:nvPr/>
+            </p:nvSpPr>
+            <p:spPr>
+              <a:xfrm>
+                <a:off x="1405415" y="3902374"/>
+                <a:ext cx="2414551" cy="307777"/>
+              </a:xfrm>
+              <a:prstGeom prst="rect">
+                <a:avLst/>
+              </a:prstGeom>
+              <a:noFill/>
+            </p:spPr>
+            <p:txBody>
+              <a:bodyPr wrap="square" rtlCol="0">
+                <a:spAutoFit/>
+              </a:bodyPr>
+              <a:lstStyle/>
+              <a:p>
+                <a:pPr algn="ctr"/>
+                <a:r>
+                  <a:rPr lang="en-US" sz="1400" dirty="0"/>
+                  <a:t>Inverted Pendulum/Cartpole</a:t>
+                </a:r>
+              </a:p>
+            </p:txBody>
+          </p:sp>
+          <p:pic>
+            <p:nvPicPr>
+              <p:cNvPr id="17" name="Picture 16" descr="Screenshot of the Gym Cart Pole environment: a black cart on a track balancing an upright brown pole.">
+                <a:extLst>
+                  <a:ext uri="{FF2B5EF4-FFF2-40B4-BE49-F238E27FC236}">
+                    <a16:creationId xmlns:a16="http://schemas.microsoft.com/office/drawing/2014/main" id="{3580BBFE-D17C-51E2-0C57-C0D7D0400EEB}"/>
+                  </a:ext>
+                </a:extLst>
+              </p:cNvPr>
+              <p:cNvPicPr>
+                <a:picLocks noChangeAspect="1"/>
+              </p:cNvPicPr>
+              <p:nvPr/>
+            </p:nvPicPr>
+            <p:blipFill>
+              <a:blip r:embed="rId5"/>
+              <a:stretch>
+                <a:fillRect/>
+              </a:stretch>
+            </p:blipFill>
+            <p:spPr>
+              <a:xfrm>
+                <a:off x="1540398" y="2472094"/>
+                <a:ext cx="2176189" cy="1460153"/>
+              </a:xfrm>
+              <a:prstGeom prst="rect">
+                <a:avLst/>
+              </a:prstGeom>
+            </p:spPr>
+          </p:pic>
+          <p:cxnSp>
+            <p:nvCxnSpPr>
+              <p:cNvPr id="46" name="Straight Arrow Connector 45">
+                <a:extLst>
+                  <a:ext uri="{FF2B5EF4-FFF2-40B4-BE49-F238E27FC236}">
+                    <a16:creationId xmlns:a16="http://schemas.microsoft.com/office/drawing/2014/main" id="{24B54B62-C9AD-8B35-1583-51CC89F68029}"/>
+                  </a:ext>
+                  <a:ext uri="{C183D7F6-B498-43B3-948B-1728B52AA6E4}">
+                    <adec:decorative xmlns:adec="http://schemas.microsoft.com/office/drawing/2017/decorative" val="1"/>
+                  </a:ext>
+                </a:extLst>
+              </p:cNvPr>
+              <p:cNvCxnSpPr/>
+              <p:nvPr/>
+            </p:nvCxnSpPr>
+            <p:spPr>
+              <a:xfrm>
+                <a:off x="2785081" y="3552898"/>
+                <a:ext cx="258266" cy="0"/>
+              </a:xfrm>
+              <a:prstGeom prst="straightConnector1">
+                <a:avLst/>
+              </a:prstGeom>
+              <a:ln>
+                <a:tailEnd type="triangle"/>
+              </a:ln>
+            </p:spPr>
+            <p:style>
+              <a:lnRef idx="2">
+                <a:schemeClr val="accent1"/>
+              </a:lnRef>
+              <a:fillRef idx="0">
+                <a:schemeClr val="accent1"/>
+              </a:fillRef>
+              <a:effectRef idx="1">
+                <a:schemeClr val="accent1"/>
+              </a:effectRef>
+              <a:fontRef idx="minor">
+                <a:schemeClr val="tx1"/>
+              </a:fontRef>
+            </p:style>
+          </p:cxnSp>
+          <p:cxnSp>
+            <p:nvCxnSpPr>
+              <p:cNvPr id="47" name="Straight Arrow Connector 46">
+                <a:extLst>
+                  <a:ext uri="{FF2B5EF4-FFF2-40B4-BE49-F238E27FC236}">
+                    <a16:creationId xmlns:a16="http://schemas.microsoft.com/office/drawing/2014/main" id="{1E353D54-0A7B-17A9-11E3-C6A1240E7B89}"/>
+                  </a:ext>
+                  <a:ext uri="{C183D7F6-B498-43B3-948B-1728B52AA6E4}">
+                    <adec:decorative xmlns:adec="http://schemas.microsoft.com/office/drawing/2017/decorative" val="1"/>
+                  </a:ext>
+                </a:extLst>
+              </p:cNvPr>
+              <p:cNvCxnSpPr>
+                <a:cxnSpLocks/>
+              </p:cNvCxnSpPr>
+              <p:nvPr/>
+            </p:nvCxnSpPr>
+            <p:spPr>
+              <a:xfrm flipH="1">
+                <a:off x="2240627" y="3552898"/>
+                <a:ext cx="264082" cy="0"/>
+              </a:xfrm>
+              <a:prstGeom prst="straightConnector1">
+                <a:avLst/>
+              </a:prstGeom>
+              <a:ln>
+                <a:tailEnd type="triangle"/>
+              </a:ln>
+            </p:spPr>
+            <p:style>
+              <a:lnRef idx="2">
+                <a:schemeClr val="accent1"/>
+              </a:lnRef>
+              <a:fillRef idx="0">
+                <a:schemeClr val="accent1"/>
+              </a:fillRef>
+              <a:effectRef idx="1">
+                <a:schemeClr val="accent1"/>
+              </a:effectRef>
+              <a:fontRef idx="minor">
+                <a:schemeClr val="tx1"/>
+              </a:fontRef>
+            </p:style>
+          </p:cxnSp>
+          <p:cxnSp>
+            <p:nvCxnSpPr>
+              <p:cNvPr id="50" name="Straight Connector 49">
+                <a:extLst>
+                  <a:ext uri="{FF2B5EF4-FFF2-40B4-BE49-F238E27FC236}">
+                    <a16:creationId xmlns:a16="http://schemas.microsoft.com/office/drawing/2014/main" id="{CF5DAF2D-837A-A69B-34DC-4D0F03279287}"/>
+                  </a:ext>
+                  <a:ext uri="{C183D7F6-B498-43B3-948B-1728B52AA6E4}">
+                    <adec:decorative xmlns:adec="http://schemas.microsoft.com/office/drawing/2017/decorative" val="1"/>
+                  </a:ext>
+                </a:extLst>
+              </p:cNvPr>
+              <p:cNvCxnSpPr/>
+              <p:nvPr/>
+            </p:nvCxnSpPr>
+            <p:spPr>
+              <a:xfrm flipV="1">
+                <a:off x="2645478" y="3029383"/>
+                <a:ext cx="0" cy="732916"/>
+              </a:xfrm>
+              <a:prstGeom prst="line">
+                <a:avLst/>
+              </a:prstGeom>
+              <a:ln w="6350" cap="flat" cmpd="sng" algn="ctr">
+                <a:solidFill>
+                  <a:schemeClr val="dk1"/>
+                </a:solidFill>
+                <a:prstDash val="dash"/>
+                <a:round/>
+                <a:headEnd type="none" w="med" len="med"/>
+                <a:tailEnd type="none" w="med" len="med"/>
+              </a:ln>
+            </p:spPr>
+            <p:style>
+              <a:lnRef idx="0">
+                <a:scrgbClr r="0" g="0" b="0"/>
+              </a:lnRef>
+              <a:fillRef idx="0">
+                <a:scrgbClr r="0" g="0" b="0"/>
+              </a:fillRef>
+              <a:effectRef idx="0">
+                <a:scrgbClr r="0" g="0" b="0"/>
+              </a:effectRef>
+              <a:fontRef idx="minor">
+                <a:schemeClr val="tx1"/>
+              </a:fontRef>
+            </p:style>
+          </p:cxnSp>
+        </p:grpSp>
+        <p:sp>
+          <p:nvSpPr>
+            <p:cNvPr id="37" name="TextBox 36">
+              <a:extLst>
+                <a:ext uri="{FF2B5EF4-FFF2-40B4-BE49-F238E27FC236}">
+                  <a16:creationId xmlns:a16="http://schemas.microsoft.com/office/drawing/2014/main" id="{F8F631AD-44EE-94F3-0526-6C44BCB6B4F0}"/>
+                </a:ext>
+              </a:extLst>
+            </p:cNvPr>
+            <p:cNvSpPr txBox="1"/>
+            <p:nvPr/>
+          </p:nvSpPr>
+          <p:spPr>
+            <a:xfrm>
+              <a:off x="10356314" y="3202170"/>
+              <a:ext cx="1011880" cy="523220"/>
             </a:xfrm>
             <a:prstGeom prst="rect">
               <a:avLst/>
@@ -12386,12 +12235,235 @@
             <a:lstStyle/>
             <a:p>
               <a:r>
-                <a:rPr lang="en-US" dirty="0"/>
-                <a:t>Delayed (Sparse) Rewards</a:t>
+                <a:rPr lang="en-US" sz="1400" dirty="0"/>
+                <a:t>Navigation</a:t>
+              </a:r>
+            </a:p>
+            <a:p>
+              <a:r>
+                <a:rPr lang="en-US" sz="1400" dirty="0"/>
+                <a:t>Problem</a:t>
               </a:r>
             </a:p>
           </p:txBody>
         </p:sp>
+        <p:grpSp>
+          <p:nvGrpSpPr>
+            <p:cNvPr id="44" name="Group 43" descr="Chess board in the starting position, with white pieces on ranks 1 and 2 and black pieces on ranks 7 and 8 (© Encyclopaedia Britannica). Labels: Chess.">
+              <a:extLst>
+                <a:ext uri="{FF2B5EF4-FFF2-40B4-BE49-F238E27FC236}">
+                  <a16:creationId xmlns:a16="http://schemas.microsoft.com/office/drawing/2014/main" id="{AE8CB1F4-8B58-4FA6-CE15-956DE2EABC2F}"/>
+                </a:ext>
+              </a:extLst>
+            </p:cNvPr>
+            <p:cNvGrpSpPr/>
+            <p:nvPr/>
+          </p:nvGrpSpPr>
+          <p:grpSpPr>
+            <a:xfrm>
+              <a:off x="8237051" y="4624793"/>
+              <a:ext cx="2414551" cy="2145353"/>
+              <a:chOff x="7069281" y="4526579"/>
+              <a:chExt cx="2414551" cy="2145353"/>
+            </a:xfrm>
+          </p:grpSpPr>
+          <p:pic>
+            <p:nvPicPr>
+              <p:cNvPr id="1032" name="Picture 8" descr="Chess board in the starting position, with white pieces on ranks 1 and 2 and black pieces on ranks 7 and 8 (© Encyclopaedia Britannica).">
+                <a:extLst>
+                  <a:ext uri="{FF2B5EF4-FFF2-40B4-BE49-F238E27FC236}">
+                    <a16:creationId xmlns:a16="http://schemas.microsoft.com/office/drawing/2014/main" id="{6D2816B3-A3E6-0C0D-E563-A25D7847A00F}"/>
+                  </a:ext>
+                </a:extLst>
+              </p:cNvPr>
+              <p:cNvPicPr>
+                <a:picLocks noChangeAspect="1" noChangeArrowheads="1"/>
+              </p:cNvPicPr>
+              <p:nvPr/>
+            </p:nvPicPr>
+            <p:blipFill>
+              <a:blip r:embed="rId6">
+                <a:extLst>
+                  <a:ext uri="{28A0092B-C50C-407E-A947-70E740481C1C}">
+                    <a14:useLocalDpi xmlns:a14="http://schemas.microsoft.com/office/drawing/2010/main" val="0"/>
+                  </a:ext>
+                </a:extLst>
+              </a:blip>
+              <a:srcRect/>
+              <a:stretch>
+                <a:fillRect/>
+              </a:stretch>
+            </p:blipFill>
+            <p:spPr bwMode="auto">
+              <a:xfrm>
+                <a:off x="7264900" y="4526579"/>
+                <a:ext cx="1973486" cy="1991465"/>
+              </a:xfrm>
+              <a:prstGeom prst="rect">
+                <a:avLst/>
+              </a:prstGeom>
+              <a:noFill/>
+              <a:extLst>
+                <a:ext uri="{909E8E84-426E-40DD-AFC4-6F175D3DCCD1}">
+                  <a14:hiddenFill xmlns:a14="http://schemas.microsoft.com/office/drawing/2010/main">
+                    <a:solidFill>
+                      <a:srgbClr val="FFFFFF"/>
+                    </a:solidFill>
+                  </a14:hiddenFill>
+                </a:ext>
+              </a:extLst>
+            </p:spPr>
+          </p:pic>
+          <p:sp>
+            <p:nvSpPr>
+              <p:cNvPr id="43" name="TextBox 42">
+                <a:extLst>
+                  <a:ext uri="{FF2B5EF4-FFF2-40B4-BE49-F238E27FC236}">
+                    <a16:creationId xmlns:a16="http://schemas.microsoft.com/office/drawing/2014/main" id="{BA29134E-9033-C38A-92B6-FCA69BF345BE}"/>
+                  </a:ext>
+                </a:extLst>
+              </p:cNvPr>
+              <p:cNvSpPr txBox="1"/>
+              <p:nvPr/>
+            </p:nvSpPr>
+            <p:spPr>
+              <a:xfrm>
+                <a:off x="7069281" y="6364155"/>
+                <a:ext cx="2414551" cy="307777"/>
+              </a:xfrm>
+              <a:prstGeom prst="rect">
+                <a:avLst/>
+              </a:prstGeom>
+              <a:noFill/>
+            </p:spPr>
+            <p:txBody>
+              <a:bodyPr wrap="square" rtlCol="0">
+                <a:spAutoFit/>
+              </a:bodyPr>
+              <a:lstStyle/>
+              <a:p>
+                <a:pPr algn="ctr"/>
+                <a:r>
+                  <a:rPr lang="en-US" sz="1400" dirty="0"/>
+                  <a:t>Chess</a:t>
+                </a:r>
+              </a:p>
+            </p:txBody>
+          </p:sp>
+        </p:grpSp>
+        <p:grpSp>
+          <p:nvGrpSpPr>
+            <p:cNvPr id="55" name="Group 54" descr="Box around the planning examples (Lunar Lander, Frozen Lake maze navigation problem, and chess), labelled Delayed (Sparse) Rewards.">
+              <a:extLst>
+                <a:ext uri="{FF2B5EF4-FFF2-40B4-BE49-F238E27FC236}">
+                  <a16:creationId xmlns:a16="http://schemas.microsoft.com/office/drawing/2014/main" id="{B01FC211-82C8-333A-5373-AA26C80A2F5C}"/>
+                </a:ext>
+              </a:extLst>
+            </p:cNvPr>
+            <p:cNvGrpSpPr/>
+            <p:nvPr/>
+          </p:nvGrpSpPr>
+          <p:grpSpPr>
+            <a:xfrm>
+              <a:off x="4416816" y="2408153"/>
+              <a:ext cx="7044595" cy="4361993"/>
+              <a:chOff x="4416816" y="2408153"/>
+              <a:chExt cx="7044595" cy="4361993"/>
+            </a:xfrm>
+          </p:grpSpPr>
+          <p:sp>
+            <p:nvSpPr>
+              <p:cNvPr id="53" name="Rectangle 52">
+                <a:extLst>
+                  <a:ext uri="{FF2B5EF4-FFF2-40B4-BE49-F238E27FC236}">
+                    <a16:creationId xmlns:a16="http://schemas.microsoft.com/office/drawing/2014/main" id="{90A2101D-EF2C-346E-BE27-4A215834799E}"/>
+                  </a:ext>
+                  <a:ext uri="{C183D7F6-B498-43B3-948B-1728B52AA6E4}">
+                    <adec:decorative xmlns:adec="http://schemas.microsoft.com/office/drawing/2017/decorative" val="1"/>
+                  </a:ext>
+                </a:extLst>
+              </p:cNvPr>
+              <p:cNvSpPr/>
+              <p:nvPr/>
+            </p:nvSpPr>
+            <p:spPr>
+              <a:xfrm>
+                <a:off x="4416816" y="2408153"/>
+                <a:ext cx="7044595" cy="4361993"/>
+              </a:xfrm>
+              <a:prstGeom prst="rect">
+                <a:avLst/>
+              </a:prstGeom>
+              <a:noFill/>
+              <a:ln w="38100" cap="flat" cmpd="sng" algn="ctr">
+                <a:solidFill>
+                  <a:schemeClr val="accent1"/>
+                </a:solidFill>
+                <a:prstDash val="solid"/>
+                <a:round/>
+                <a:headEnd type="none" w="med" len="med"/>
+                <a:tailEnd type="none" w="med" len="med"/>
+              </a:ln>
+            </p:spPr>
+            <p:style>
+              <a:lnRef idx="0">
+                <a:scrgbClr r="0" g="0" b="0"/>
+              </a:lnRef>
+              <a:fillRef idx="0">
+                <a:scrgbClr r="0" g="0" b="0"/>
+              </a:fillRef>
+              <a:effectRef idx="0">
+                <a:scrgbClr r="0" g="0" b="0"/>
+              </a:effectRef>
+              <a:fontRef idx="minor">
+                <a:schemeClr val="accent1"/>
+              </a:fontRef>
+            </p:style>
+            <p:txBody>
+              <a:bodyPr rtlCol="0" anchor="ctr"/>
+              <a:lstStyle/>
+              <a:p>
+                <a:pPr algn="ctr"/>
+                <a:endParaRPr lang="en-US"/>
+              </a:p>
+            </p:txBody>
+          </p:sp>
+          <p:sp>
+            <p:nvSpPr>
+              <p:cNvPr id="54" name="TextBox 53">
+                <a:extLst>
+                  <a:ext uri="{FF2B5EF4-FFF2-40B4-BE49-F238E27FC236}">
+                    <a16:creationId xmlns:a16="http://schemas.microsoft.com/office/drawing/2014/main" id="{9A7A8A7B-7A1A-251D-EE5C-EF8403A4EF6D}"/>
+                  </a:ext>
+                </a:extLst>
+              </p:cNvPr>
+              <p:cNvSpPr txBox="1"/>
+              <p:nvPr/>
+            </p:nvSpPr>
+            <p:spPr>
+              <a:xfrm>
+                <a:off x="4416816" y="6354055"/>
+                <a:ext cx="2787045" cy="369332"/>
+              </a:xfrm>
+              <a:prstGeom prst="rect">
+                <a:avLst/>
+              </a:prstGeom>
+              <a:noFill/>
+            </p:spPr>
+            <p:txBody>
+              <a:bodyPr wrap="none" rtlCol="0">
+                <a:spAutoFit/>
+              </a:bodyPr>
+              <a:lstStyle/>
+              <a:p>
+                <a:r>
+                  <a:rPr lang="en-US" dirty="0"/>
+                  <a:t>Delayed (Sparse) Rewards</a:t>
+                </a:r>
+              </a:p>
+            </p:txBody>
+          </p:sp>
+        </p:grpSp>
       </p:grpSp>
     </p:spTree>
     <p:extLst>
@@ -13049,16 +13121,796 @@
           <a:p>
             <a:r>
               <a:rPr lang="en-US" dirty="0"/>
-              <a:t>Reward Engineering</a:t>
+              <a:t>Reward Engineering </a:t>
             </a:r>
           </a:p>
         </p:txBody>
       </p:sp>
-      <mc:AlternateContent xmlns:mc="http://schemas.openxmlformats.org/markup-compatibility/2006">
-        <mc:Choice xmlns:a14="http://schemas.microsoft.com/office/drawing/2010/main" Requires="a14">
+      <p:grpSp>
+        <p:nvGrpSpPr>
+          <p:cNvPr id="17" name="Group 16" descr="Reinforcement learning loop with an interpreter (after Sutton and Barto): the environment (a maze) produces an observation x_t and an external reward r_t ext. An interpreter turns them into the state s_t and the reward r_t for the agent (a cartoon robot), which can also add its own internal reward r_t int. The agent sends an action a_t back to the environment, whose internal state is s_t e.">
+            <a:extLst>
+              <a:ext uri="{FF2B5EF4-FFF2-40B4-BE49-F238E27FC236}">
+                <a16:creationId xmlns:a16="http://schemas.microsoft.com/office/drawing/2014/main" id="{38A4B7B9-372E-5A74-5CE4-E9B718248F23}"/>
+              </a:ext>
+            </a:extLst>
+          </p:cNvPr>
+          <p:cNvGrpSpPr/>
+          <p:nvPr/>
+        </p:nvGrpSpPr>
+        <p:grpSpPr>
+          <a:xfrm>
+            <a:off x="8423925" y="1124198"/>
+            <a:ext cx="3103421" cy="3127867"/>
+            <a:chOff x="8828660" y="1124198"/>
+            <a:chExt cx="3103421" cy="3127867"/>
+          </a:xfrm>
+        </p:grpSpPr>
+        <p:grpSp>
+          <p:nvGrpSpPr>
+            <p:cNvPr id="18" name="Group 17" descr="Diagram with labels: a sub t; r sub t; s sub t; Observation.">
+              <a:extLst>
+                <a:ext uri="{FF2B5EF4-FFF2-40B4-BE49-F238E27FC236}">
+                  <a16:creationId xmlns:a16="http://schemas.microsoft.com/office/drawing/2014/main" id="{7216F6EE-935E-3812-C12A-314BA5EC8E6E}"/>
+                </a:ext>
+              </a:extLst>
+            </p:cNvPr>
+            <p:cNvGrpSpPr/>
+            <p:nvPr/>
+          </p:nvGrpSpPr>
+          <p:grpSpPr>
+            <a:xfrm>
+              <a:off x="8828660" y="1493530"/>
+              <a:ext cx="3103421" cy="2758535"/>
+              <a:chOff x="1789245" y="1426327"/>
+              <a:chExt cx="4207277" cy="4067913"/>
+            </a:xfrm>
+          </p:grpSpPr>
+          <p:grpSp>
+            <p:nvGrpSpPr>
+              <p:cNvPr id="21" name="Group 20" descr="Diagram with labels: a sub t; r sub t; s sub t.">
+                <a:extLst>
+                  <a:ext uri="{FF2B5EF4-FFF2-40B4-BE49-F238E27FC236}">
+                    <a16:creationId xmlns:a16="http://schemas.microsoft.com/office/drawing/2014/main" id="{47D9A8FE-BCAC-D877-39F8-C25844019FF1}"/>
+                  </a:ext>
+                </a:extLst>
+              </p:cNvPr>
+              <p:cNvGrpSpPr/>
+              <p:nvPr/>
+            </p:nvGrpSpPr>
+            <p:grpSpPr>
+              <a:xfrm>
+                <a:off x="1789245" y="1426327"/>
+                <a:ext cx="4207277" cy="4067913"/>
+                <a:chOff x="1586821" y="1395043"/>
+                <a:chExt cx="4207277" cy="4067913"/>
+              </a:xfrm>
+            </p:grpSpPr>
+            <p:pic>
+              <p:nvPicPr>
+                <p:cNvPr id="23" name="Picture 2">
+                  <a:extLst>
+                    <a:ext uri="{FF2B5EF4-FFF2-40B4-BE49-F238E27FC236}">
+                      <a16:creationId xmlns:a16="http://schemas.microsoft.com/office/drawing/2014/main" id="{80AFD642-B690-0592-DA2E-4246017FF118}"/>
+                    </a:ext>
+                    <a:ext uri="{C183D7F6-B498-43B3-948B-1728B52AA6E4}">
+                      <adec:decorative xmlns:adec="http://schemas.microsoft.com/office/drawing/2017/decorative" val="1"/>
+                    </a:ext>
+                  </a:extLst>
+                </p:cNvPr>
+                <p:cNvPicPr>
+                  <a:picLocks noChangeAspect="1" noChangeArrowheads="1"/>
+                </p:cNvPicPr>
+                <p:nvPr/>
+              </p:nvPicPr>
+              <p:blipFill>
+                <a:blip r:embed="rId2">
+                  <a:extLst>
+                    <a:ext uri="{28A0092B-C50C-407E-A947-70E740481C1C}">
+                      <a14:useLocalDpi xmlns:a14="http://schemas.microsoft.com/office/drawing/2010/main" val="0"/>
+                    </a:ext>
+                  </a:extLst>
+                </a:blip>
+                <a:srcRect/>
+                <a:stretch>
+                  <a:fillRect/>
+                </a:stretch>
+              </p:blipFill>
+              <p:spPr bwMode="auto">
+                <a:xfrm>
+                  <a:off x="1586821" y="1395043"/>
+                  <a:ext cx="4207277" cy="4067913"/>
+                </a:xfrm>
+                <a:prstGeom prst="rect">
+                  <a:avLst/>
+                </a:prstGeom>
+                <a:noFill/>
+                <a:extLst>
+                  <a:ext uri="{909E8E84-426E-40DD-AFC4-6F175D3DCCD1}">
+                    <a14:hiddenFill xmlns:a14="http://schemas.microsoft.com/office/drawing/2010/main">
+                      <a:solidFill>
+                        <a:srgbClr val="FFFFFF"/>
+                      </a:solidFill>
+                    </a14:hiddenFill>
+                  </a:ext>
+                </a:extLst>
+              </p:spPr>
+            </p:pic>
+            <mc:AlternateContent xmlns:mc="http://schemas.openxmlformats.org/markup-compatibility/2006" xmlns:a14="http://schemas.microsoft.com/office/drawing/2010/main">
+              <mc:Choice Requires="a14">
+                <p:sp>
+                  <p:nvSpPr>
+                    <p:cNvPr id="24" name="TextBox 23" descr="Equation: a sub t">
+                      <a:extLst>
+                        <a:ext uri="{FF2B5EF4-FFF2-40B4-BE49-F238E27FC236}">
+                          <a16:creationId xmlns:a16="http://schemas.microsoft.com/office/drawing/2014/main" id="{1393D424-53A7-2B26-B6FC-F134CB003219}"/>
+                        </a:ext>
+                      </a:extLst>
+                    </p:cNvPr>
+                    <p:cNvSpPr txBox="1"/>
+                    <p:nvPr/>
+                  </p:nvSpPr>
+                  <p:spPr>
+                    <a:xfrm>
+                      <a:off x="4610278" y="1395043"/>
+                      <a:ext cx="581098" cy="544641"/>
+                    </a:xfrm>
+                    <a:prstGeom prst="rect">
+                      <a:avLst/>
+                    </a:prstGeom>
+                    <a:noFill/>
+                  </p:spPr>
+                  <p:txBody>
+                    <a:bodyPr wrap="square">
+                      <a:spAutoFit/>
+                    </a:bodyPr>
+                    <a:lstStyle/>
+                    <a:p>
+                      <a:pPr/>
+                      <a14:m>
+                        <m:oMathPara xmlns:m="http://schemas.openxmlformats.org/officeDocument/2006/math">
+                          <m:oMath>
+                            <m:sSub>
+                              <m:sSubPr>
+                                <m:ctrlPr>
+                                  <a:rPr lang="en-US" b="0" i="1" dirty="0" smtClean="0">
+                                    <a:solidFill>
+                                      <a:schemeClr val="tx1"/>
+                                    </a:solidFill>
+                                    <a:latin typeface="Cambria Math" panose="02040503050406030204" pitchFamily="18" charset="0"/>
+                                  </a:rPr>
+                                </m:ctrlPr>
+                              </m:sSubPr>
+                              <m:e>
+                                <m:r>
+                                  <a:rPr lang="en-US" b="0" i="1" dirty="0" smtClean="0">
+                                    <a:solidFill>
+                                      <a:schemeClr val="tx1"/>
+                                    </a:solidFill>
+                                    <a:latin typeface="Cambria Math" panose="02040503050406030204" pitchFamily="18" charset="0"/>
+                                  </a:rPr>
+                                  <m:t>𝑎</m:t>
+                                </m:r>
+                              </m:e>
+                              <m:sub>
+                                <m:r>
+                                  <a:rPr lang="en-US" b="0" i="1" dirty="0" smtClean="0">
+                                    <a:solidFill>
+                                      <a:schemeClr val="tx1"/>
+                                    </a:solidFill>
+                                    <a:latin typeface="Cambria Math" panose="02040503050406030204" pitchFamily="18" charset="0"/>
+                                  </a:rPr>
+                                  <m:t>𝑡</m:t>
+                                </m:r>
+                              </m:sub>
+                            </m:sSub>
+                          </m:oMath>
+                        </m:oMathPara>
+                      </a14:m>
+                      <a:endParaRPr lang="en-US" dirty="0">
+                        <a:solidFill>
+                          <a:schemeClr val="tx1"/>
+                        </a:solidFill>
+                      </a:endParaRPr>
+                    </a:p>
+                  </p:txBody>
+                </p:sp>
+              </mc:Choice>
+              <mc:Fallback xmlns="">
+                <p:sp>
+                  <p:nvSpPr>
+                    <p:cNvPr id="11" name="TextBox 10">
+                      <a:extLst>
+                        <a:ext uri="{FF2B5EF4-FFF2-40B4-BE49-F238E27FC236}">
+                          <a16:creationId xmlns:a16="http://schemas.microsoft.com/office/drawing/2014/main" id="{4D8B07A5-09FA-90B0-01EE-5437B5583C23}"/>
+                        </a:ext>
+                      </a:extLst>
+                    </p:cNvPr>
+                    <p:cNvSpPr txBox="1">
+                      <a:spLocks noRot="1" noChangeAspect="1" noMove="1" noResize="1" noEditPoints="1" noAdjustHandles="1" noChangeArrowheads="1" noChangeShapeType="1" noTextEdit="1"/>
+                    </p:cNvSpPr>
+                    <p:nvPr/>
+                  </p:nvSpPr>
+                  <p:spPr>
+                    <a:xfrm>
+                      <a:off x="4610278" y="1395043"/>
+                      <a:ext cx="581098" cy="544641"/>
+                    </a:xfrm>
+                    <a:prstGeom prst="rect">
+                      <a:avLst/>
+                    </a:prstGeom>
+                    <a:blipFill>
+                      <a:blip r:embed="rId5"/>
+                      <a:stretch>
+                        <a:fillRect/>
+                      </a:stretch>
+                    </a:blipFill>
+                  </p:spPr>
+                  <p:txBody>
+                    <a:bodyPr/>
+                    <a:lstStyle/>
+                    <a:p>
+                      <a:r>
+                        <a:rPr lang="en-US">
+                          <a:noFill/>
+                        </a:rPr>
+                        <a:t> </a:t>
+                      </a:r>
+                    </a:p>
+                  </p:txBody>
+                </p:sp>
+              </mc:Fallback>
+            </mc:AlternateContent>
+            <mc:AlternateContent xmlns:mc="http://schemas.openxmlformats.org/markup-compatibility/2006" xmlns:a14="http://schemas.microsoft.com/office/drawing/2010/main">
+              <mc:Choice Requires="a14">
+                <p:sp>
+                  <p:nvSpPr>
+                    <p:cNvPr id="25" name="TextBox 24" descr="Equation: r sub t">
+                      <a:extLst>
+                        <a:ext uri="{FF2B5EF4-FFF2-40B4-BE49-F238E27FC236}">
+                          <a16:creationId xmlns:a16="http://schemas.microsoft.com/office/drawing/2014/main" id="{F460FEFA-1DBC-7F71-7C4E-A0E7D4C8877B}"/>
+                        </a:ext>
+                      </a:extLst>
+                    </p:cNvPr>
+                    <p:cNvSpPr txBox="1"/>
+                    <p:nvPr/>
+                  </p:nvSpPr>
+                  <p:spPr>
+                    <a:xfrm>
+                      <a:off x="3348651" y="3588202"/>
+                      <a:ext cx="567432" cy="544641"/>
+                    </a:xfrm>
+                    <a:prstGeom prst="rect">
+                      <a:avLst/>
+                    </a:prstGeom>
+                    <a:noFill/>
+                  </p:spPr>
+                  <p:txBody>
+                    <a:bodyPr wrap="square">
+                      <a:spAutoFit/>
+                    </a:bodyPr>
+                    <a:lstStyle/>
+                    <a:p>
+                      <a:pPr/>
+                      <a14:m>
+                        <m:oMathPara xmlns:m="http://schemas.openxmlformats.org/officeDocument/2006/math">
+                          <m:oMath>
+                            <m:sSub>
+                              <m:sSubPr>
+                                <m:ctrlPr>
+                                  <a:rPr lang="en-US" i="1" dirty="0" smtClean="0">
+                                    <a:solidFill>
+                                      <a:srgbClr val="FF0000"/>
+                                    </a:solidFill>
+                                    <a:latin typeface="Cambria Math" panose="02040503050406030204" pitchFamily="18" charset="0"/>
+                                  </a:rPr>
+                                </m:ctrlPr>
+                              </m:sSubPr>
+                              <m:e>
+                                <m:r>
+                                  <a:rPr lang="en-US" i="1" dirty="0" smtClean="0">
+                                    <a:solidFill>
+                                      <a:srgbClr val="FF0000"/>
+                                    </a:solidFill>
+                                    <a:latin typeface="Cambria Math" panose="02040503050406030204" pitchFamily="18" charset="0"/>
+                                  </a:rPr>
+                                  <m:t>𝑟</m:t>
+                                </m:r>
+                              </m:e>
+                              <m:sub>
+                                <m:r>
+                                  <a:rPr lang="en-US" b="0" i="1" dirty="0" smtClean="0">
+                                    <a:solidFill>
+                                      <a:srgbClr val="FF0000"/>
+                                    </a:solidFill>
+                                    <a:latin typeface="Cambria Math" panose="02040503050406030204" pitchFamily="18" charset="0"/>
+                                  </a:rPr>
+                                  <m:t>𝑡</m:t>
+                                </m:r>
+                              </m:sub>
+                            </m:sSub>
+                          </m:oMath>
+                        </m:oMathPara>
+                      </a14:m>
+                      <a:endParaRPr lang="en-US" dirty="0"/>
+                    </a:p>
+                  </p:txBody>
+                </p:sp>
+              </mc:Choice>
+              <mc:Fallback xmlns="">
+                <p:sp>
+                  <p:nvSpPr>
+                    <p:cNvPr id="25" name="TextBox 24" descr="Equation: r sub t">
+                      <a:extLst>
+                        <a:ext uri="{FF2B5EF4-FFF2-40B4-BE49-F238E27FC236}">
+                          <a16:creationId xmlns:a16="http://schemas.microsoft.com/office/drawing/2014/main" id="{F460FEFA-1DBC-7F71-7C4E-A0E7D4C8877B}"/>
+                        </a:ext>
+                      </a:extLst>
+                    </p:cNvPr>
+                    <p:cNvSpPr txBox="1">
+                      <a:spLocks noRot="1" noChangeAspect="1" noMove="1" noResize="1" noEditPoints="1" noAdjustHandles="1" noChangeArrowheads="1" noChangeShapeType="1" noTextEdit="1"/>
+                    </p:cNvSpPr>
+                    <p:nvPr/>
+                  </p:nvSpPr>
+                  <p:spPr>
+                    <a:xfrm>
+                      <a:off x="3348651" y="3588202"/>
+                      <a:ext cx="567432" cy="544641"/>
+                    </a:xfrm>
+                    <a:prstGeom prst="rect">
+                      <a:avLst/>
+                    </a:prstGeom>
+                    <a:blipFill>
+                      <a:blip r:embed="rId6"/>
+                      <a:stretch>
+                        <a:fillRect/>
+                      </a:stretch>
+                    </a:blipFill>
+                  </p:spPr>
+                  <p:txBody>
+                    <a:bodyPr/>
+                    <a:lstStyle/>
+                    <a:p>
+                      <a:r>
+                        <a:rPr lang="en-US">
+                          <a:noFill/>
+                        </a:rPr>
+                        <a:t> </a:t>
+                      </a:r>
+                    </a:p>
+                  </p:txBody>
+                </p:sp>
+              </mc:Fallback>
+            </mc:AlternateContent>
+            <mc:AlternateContent xmlns:mc="http://schemas.openxmlformats.org/markup-compatibility/2006" xmlns:a14="http://schemas.microsoft.com/office/drawing/2010/main">
+              <mc:Choice Requires="a14">
+                <p:sp>
+                  <p:nvSpPr>
+                    <p:cNvPr id="26" name="TextBox 25" descr="Equation: s sub t">
+                      <a:extLst>
+                        <a:ext uri="{FF2B5EF4-FFF2-40B4-BE49-F238E27FC236}">
+                          <a16:creationId xmlns:a16="http://schemas.microsoft.com/office/drawing/2014/main" id="{79D89506-FDD1-67AB-A36E-2648AB88F371}"/>
+                        </a:ext>
+                      </a:extLst>
+                    </p:cNvPr>
+                    <p:cNvSpPr txBox="1"/>
+                    <p:nvPr/>
+                  </p:nvSpPr>
+                  <p:spPr>
+                    <a:xfrm>
+                      <a:off x="2995197" y="4697372"/>
+                      <a:ext cx="546197" cy="544641"/>
+                    </a:xfrm>
+                    <a:prstGeom prst="rect">
+                      <a:avLst/>
+                    </a:prstGeom>
+                    <a:noFill/>
+                  </p:spPr>
+                  <p:txBody>
+                    <a:bodyPr wrap="square">
+                      <a:spAutoFit/>
+                    </a:bodyPr>
+                    <a:lstStyle/>
+                    <a:p>
+                      <a:pPr/>
+                      <a14:m>
+                        <m:oMathPara xmlns:m="http://schemas.openxmlformats.org/officeDocument/2006/math">
+                          <m:oMath>
+                            <m:sSub>
+                              <m:sSubPr>
+                                <m:ctrlPr>
+                                  <a:rPr lang="en-US" b="0" i="1" dirty="0" smtClean="0">
+                                    <a:solidFill>
+                                      <a:schemeClr val="tx1"/>
+                                    </a:solidFill>
+                                    <a:latin typeface="Cambria Math" panose="02040503050406030204" pitchFamily="18" charset="0"/>
+                                  </a:rPr>
+                                </m:ctrlPr>
+                              </m:sSubPr>
+                              <m:e>
+                                <m:r>
+                                  <a:rPr lang="en-US" b="0" i="1" dirty="0" smtClean="0">
+                                    <a:solidFill>
+                                      <a:schemeClr val="tx1"/>
+                                    </a:solidFill>
+                                    <a:latin typeface="Cambria Math" panose="02040503050406030204" pitchFamily="18" charset="0"/>
+                                  </a:rPr>
+                                  <m:t>𝑠</m:t>
+                                </m:r>
+                              </m:e>
+                              <m:sub>
+                                <m:r>
+                                  <a:rPr lang="en-US" b="0" i="1" dirty="0" smtClean="0">
+                                    <a:solidFill>
+                                      <a:schemeClr val="tx1"/>
+                                    </a:solidFill>
+                                    <a:latin typeface="Cambria Math" panose="02040503050406030204" pitchFamily="18" charset="0"/>
+                                  </a:rPr>
+                                  <m:t>𝑡</m:t>
+                                </m:r>
+                              </m:sub>
+                            </m:sSub>
+                          </m:oMath>
+                        </m:oMathPara>
+                      </a14:m>
+                      <a:endParaRPr lang="en-US" dirty="0">
+                        <a:solidFill>
+                          <a:schemeClr val="tx1"/>
+                        </a:solidFill>
+                      </a:endParaRPr>
+                    </a:p>
+                  </p:txBody>
+                </p:sp>
+              </mc:Choice>
+              <mc:Fallback xmlns="">
+                <p:sp>
+                  <p:nvSpPr>
+                    <p:cNvPr id="13" name="TextBox 12">
+                      <a:extLst>
+                        <a:ext uri="{FF2B5EF4-FFF2-40B4-BE49-F238E27FC236}">
+                          <a16:creationId xmlns:a16="http://schemas.microsoft.com/office/drawing/2014/main" id="{05A35657-B40A-A991-2B74-3771C1A7D324}"/>
+                        </a:ext>
+                      </a:extLst>
+                    </p:cNvPr>
+                    <p:cNvSpPr txBox="1">
+                      <a:spLocks noRot="1" noChangeAspect="1" noMove="1" noResize="1" noEditPoints="1" noAdjustHandles="1" noChangeArrowheads="1" noChangeShapeType="1" noTextEdit="1"/>
+                    </p:cNvSpPr>
+                    <p:nvPr/>
+                  </p:nvSpPr>
+                  <p:spPr>
+                    <a:xfrm>
+                      <a:off x="2995197" y="4697372"/>
+                      <a:ext cx="546197" cy="544641"/>
+                    </a:xfrm>
+                    <a:prstGeom prst="rect">
+                      <a:avLst/>
+                    </a:prstGeom>
+                    <a:blipFill>
+                      <a:blip r:embed="rId7"/>
+                      <a:stretch>
+                        <a:fillRect/>
+                      </a:stretch>
+                    </a:blipFill>
+                  </p:spPr>
+                  <p:txBody>
+                    <a:bodyPr/>
+                    <a:lstStyle/>
+                    <a:p>
+                      <a:r>
+                        <a:rPr lang="en-US">
+                          <a:noFill/>
+                        </a:rPr>
+                        <a:t> </a:t>
+                      </a:r>
+                    </a:p>
+                  </p:txBody>
+                </p:sp>
+              </mc:Fallback>
+            </mc:AlternateContent>
+          </p:grpSp>
           <p:sp>
             <p:nvSpPr>
-              <p:cNvPr id="3" name="Content Placeholder 2">
+              <p:cNvPr id="22" name="TextBox 21">
+                <a:extLst>
+                  <a:ext uri="{FF2B5EF4-FFF2-40B4-BE49-F238E27FC236}">
+                    <a16:creationId xmlns:a16="http://schemas.microsoft.com/office/drawing/2014/main" id="{83449089-1D62-8E4B-1961-AE891580A42E}"/>
+                  </a:ext>
+                </a:extLst>
+              </p:cNvPr>
+              <p:cNvSpPr txBox="1"/>
+              <p:nvPr/>
+            </p:nvSpPr>
+            <p:spPr>
+              <a:xfrm rot="20152154">
+                <a:off x="1957229" y="1503141"/>
+                <a:ext cx="1770111" cy="499253"/>
+              </a:xfrm>
+              <a:prstGeom prst="rect">
+                <a:avLst/>
+              </a:prstGeom>
+              <a:noFill/>
+            </p:spPr>
+            <p:txBody>
+              <a:bodyPr wrap="square">
+                <a:spAutoFit/>
+              </a:bodyPr>
+              <a:lstStyle/>
+              <a:p>
+                <a:r>
+                  <a:rPr lang="en-US" sz="1600" dirty="0"/>
+                  <a:t>Observation</a:t>
+                </a:r>
+              </a:p>
+            </p:txBody>
+          </p:sp>
+        </p:grpSp>
+        <mc:AlternateContent xmlns:mc="http://schemas.openxmlformats.org/markup-compatibility/2006" xmlns:a14="http://schemas.microsoft.com/office/drawing/2010/main">
+          <mc:Choice Requires="a14">
+            <p:sp>
+              <p:nvSpPr>
+                <p:cNvPr id="19" name="TextBox 18" descr="Equation: s sub t, to the power e">
+                  <a:extLst>
+                    <a:ext uri="{FF2B5EF4-FFF2-40B4-BE49-F238E27FC236}">
+                      <a16:creationId xmlns:a16="http://schemas.microsoft.com/office/drawing/2014/main" id="{D22C3799-B67B-3541-C2C0-1677ACF59793}"/>
+                    </a:ext>
+                  </a:extLst>
+                </p:cNvPr>
+                <p:cNvSpPr txBox="1"/>
+                <p:nvPr/>
+              </p:nvSpPr>
+              <p:spPr>
+                <a:xfrm>
+                  <a:off x="10380371" y="1124198"/>
+                  <a:ext cx="366636" cy="369332"/>
+                </a:xfrm>
+                <a:prstGeom prst="rect">
+                  <a:avLst/>
+                </a:prstGeom>
+                <a:noFill/>
+              </p:spPr>
+              <p:txBody>
+                <a:bodyPr wrap="square">
+                  <a:spAutoFit/>
+                </a:bodyPr>
+                <a:lstStyle/>
+                <a:p>
+                  <a14:m>
+                    <m:oMath xmlns:m="http://schemas.openxmlformats.org/officeDocument/2006/math">
+                      <m:sSubSup>
+                        <m:sSubSupPr>
+                          <m:ctrlPr>
+                            <a:rPr lang="en-US" b="0" i="1" dirty="0" smtClean="0">
+                              <a:solidFill>
+                                <a:schemeClr val="tx1"/>
+                              </a:solidFill>
+                              <a:latin typeface="Cambria Math" panose="02040503050406030204" pitchFamily="18" charset="0"/>
+                            </a:rPr>
+                          </m:ctrlPr>
+                        </m:sSubSupPr>
+                        <m:e>
+                          <m:r>
+                            <a:rPr lang="en-US" b="0" i="1" dirty="0" smtClean="0">
+                              <a:solidFill>
+                                <a:schemeClr val="tx1"/>
+                              </a:solidFill>
+                              <a:latin typeface="Cambria Math" panose="02040503050406030204" pitchFamily="18" charset="0"/>
+                            </a:rPr>
+                            <m:t>𝑠</m:t>
+                          </m:r>
+                        </m:e>
+                        <m:sub>
+                          <m:r>
+                            <a:rPr lang="en-US" i="1" dirty="0">
+                              <a:solidFill>
+                                <a:schemeClr val="tx1"/>
+                              </a:solidFill>
+                              <a:latin typeface="Cambria Math" panose="02040503050406030204" pitchFamily="18" charset="0"/>
+                            </a:rPr>
+                            <m:t>𝑡</m:t>
+                          </m:r>
+                        </m:sub>
+                        <m:sup>
+                          <m:r>
+                            <a:rPr lang="en-US" b="0" i="1" dirty="0" smtClean="0">
+                              <a:solidFill>
+                                <a:schemeClr val="tx1"/>
+                              </a:solidFill>
+                              <a:latin typeface="Cambria Math" panose="02040503050406030204" pitchFamily="18" charset="0"/>
+                            </a:rPr>
+                            <m:t>𝑒</m:t>
+                          </m:r>
+                        </m:sup>
+                      </m:sSubSup>
+                    </m:oMath>
+                  </a14:m>
+                  <a:r>
+                    <a:rPr lang="en-US" dirty="0">
+                      <a:solidFill>
+                        <a:schemeClr val="tx1"/>
+                      </a:solidFill>
+                    </a:rPr>
+                    <a:t> </a:t>
+                  </a:r>
+                </a:p>
+              </p:txBody>
+            </p:sp>
+          </mc:Choice>
+          <mc:Fallback xmlns="">
+            <p:sp>
+              <p:nvSpPr>
+                <p:cNvPr id="6" name="TextBox 5">
+                  <a:extLst>
+                    <a:ext uri="{FF2B5EF4-FFF2-40B4-BE49-F238E27FC236}">
+                      <a16:creationId xmlns:a16="http://schemas.microsoft.com/office/drawing/2014/main" id="{FD761007-719A-F8F6-AAEA-FDD9C5CAA18C}"/>
+                    </a:ext>
+                  </a:extLst>
+                </p:cNvPr>
+                <p:cNvSpPr txBox="1">
+                  <a:spLocks noRot="1" noChangeAspect="1" noMove="1" noResize="1" noEditPoints="1" noAdjustHandles="1" noChangeArrowheads="1" noChangeShapeType="1" noTextEdit="1"/>
+                </p:cNvSpPr>
+                <p:nvPr/>
+              </p:nvSpPr>
+              <p:spPr>
+                <a:xfrm>
+                  <a:off x="10380371" y="1124198"/>
+                  <a:ext cx="366636" cy="369332"/>
+                </a:xfrm>
+                <a:prstGeom prst="rect">
+                  <a:avLst/>
+                </a:prstGeom>
+                <a:blipFill>
+                  <a:blip r:embed="rId8"/>
+                  <a:stretch>
+                    <a:fillRect/>
+                  </a:stretch>
+                </a:blipFill>
+              </p:spPr>
+              <p:txBody>
+                <a:bodyPr/>
+                <a:lstStyle/>
+                <a:p>
+                  <a:r>
+                    <a:rPr lang="en-US">
+                      <a:noFill/>
+                    </a:rPr>
+                    <a:t> </a:t>
+                  </a:r>
+                </a:p>
+              </p:txBody>
+            </p:sp>
+          </mc:Fallback>
+        </mc:AlternateContent>
+        <mc:AlternateContent xmlns:mc="http://schemas.openxmlformats.org/markup-compatibility/2006" xmlns:a14="http://schemas.microsoft.com/office/drawing/2010/main">
+          <mc:Choice Requires="a14">
+            <p:sp>
+              <p:nvSpPr>
+                <p:cNvPr id="20" name="TextBox 19" descr="Equation: x sub t">
+                  <a:extLst>
+                    <a:ext uri="{FF2B5EF4-FFF2-40B4-BE49-F238E27FC236}">
+                      <a16:creationId xmlns:a16="http://schemas.microsoft.com/office/drawing/2014/main" id="{8334190D-B1BC-2DA3-D75A-1839416F13D1}"/>
+                    </a:ext>
+                  </a:extLst>
+                </p:cNvPr>
+                <p:cNvSpPr txBox="1"/>
+                <p:nvPr/>
+              </p:nvSpPr>
+              <p:spPr>
+                <a:xfrm>
+                  <a:off x="8841360" y="2158958"/>
+                  <a:ext cx="402892" cy="369332"/>
+                </a:xfrm>
+                <a:prstGeom prst="rect">
+                  <a:avLst/>
+                </a:prstGeom>
+                <a:noFill/>
+              </p:spPr>
+              <p:txBody>
+                <a:bodyPr wrap="square">
+                  <a:spAutoFit/>
+                </a:bodyPr>
+                <a:lstStyle/>
+                <a:p>
+                  <a:pPr/>
+                  <a14:m>
+                    <m:oMathPara xmlns:m="http://schemas.openxmlformats.org/officeDocument/2006/math">
+                      <m:oMath>
+                        <m:sSub>
+                          <m:sSubPr>
+                            <m:ctrlPr>
+                              <a:rPr lang="en-US" b="0" i="1" dirty="0" smtClean="0">
+                                <a:solidFill>
+                                  <a:schemeClr val="tx1"/>
+                                </a:solidFill>
+                                <a:latin typeface="Cambria Math" panose="02040503050406030204" pitchFamily="18" charset="0"/>
+                              </a:rPr>
+                            </m:ctrlPr>
+                          </m:sSubPr>
+                          <m:e>
+                            <m:r>
+                              <a:rPr lang="en-US" b="0" i="1" dirty="0" smtClean="0">
+                                <a:solidFill>
+                                  <a:schemeClr val="tx1"/>
+                                </a:solidFill>
+                                <a:latin typeface="Cambria Math" panose="02040503050406030204" pitchFamily="18" charset="0"/>
+                              </a:rPr>
+                              <m:t>𝑥</m:t>
+                            </m:r>
+                          </m:e>
+                          <m:sub>
+                            <m:r>
+                              <a:rPr lang="en-US" b="0" i="1" dirty="0" smtClean="0">
+                                <a:solidFill>
+                                  <a:schemeClr val="tx1"/>
+                                </a:solidFill>
+                                <a:latin typeface="Cambria Math" panose="02040503050406030204" pitchFamily="18" charset="0"/>
+                              </a:rPr>
+                              <m:t>𝑡</m:t>
+                            </m:r>
+                          </m:sub>
+                        </m:sSub>
+                      </m:oMath>
+                    </m:oMathPara>
+                  </a14:m>
+                  <a:endParaRPr lang="en-US" dirty="0">
+                    <a:solidFill>
+                      <a:schemeClr val="tx1"/>
+                    </a:solidFill>
+                  </a:endParaRPr>
+                </a:p>
+              </p:txBody>
+            </p:sp>
+          </mc:Choice>
+          <mc:Fallback xmlns="">
+            <p:sp>
+              <p:nvSpPr>
+                <p:cNvPr id="7" name="TextBox 6">
+                  <a:extLst>
+                    <a:ext uri="{FF2B5EF4-FFF2-40B4-BE49-F238E27FC236}">
+                      <a16:creationId xmlns:a16="http://schemas.microsoft.com/office/drawing/2014/main" id="{86D101BB-2275-F525-4BA8-FC2D31EC3C1C}"/>
+                    </a:ext>
+                  </a:extLst>
+                </p:cNvPr>
+                <p:cNvSpPr txBox="1">
+                  <a:spLocks noRot="1" noChangeAspect="1" noMove="1" noResize="1" noEditPoints="1" noAdjustHandles="1" noChangeArrowheads="1" noChangeShapeType="1" noTextEdit="1"/>
+                </p:cNvSpPr>
+                <p:nvPr/>
+              </p:nvSpPr>
+              <p:spPr>
+                <a:xfrm>
+                  <a:off x="8841360" y="2158958"/>
+                  <a:ext cx="402892" cy="369332"/>
+                </a:xfrm>
+                <a:prstGeom prst="rect">
+                  <a:avLst/>
+                </a:prstGeom>
+                <a:blipFill>
+                  <a:blip r:embed="rId9"/>
+                  <a:stretch>
+                    <a:fillRect/>
+                  </a:stretch>
+                </a:blipFill>
+              </p:spPr>
+              <p:txBody>
+                <a:bodyPr/>
+                <a:lstStyle/>
+                <a:p>
+                  <a:r>
+                    <a:rPr lang="en-US">
+                      <a:noFill/>
+                    </a:rPr>
+                    <a:t> </a:t>
+                  </a:r>
+                </a:p>
+              </p:txBody>
+            </p:sp>
+          </mc:Fallback>
+        </mc:AlternateContent>
+      </p:grpSp>
+      <mc:AlternateContent xmlns:mc="http://schemas.openxmlformats.org/markup-compatibility/2006" xmlns:a14="http://schemas.microsoft.com/office/drawing/2010/main">
+        <mc:Choice Requires="a14">
+          <p:sp>
+            <p:nvSpPr>
+              <p:cNvPr id="3" name="Content Placeholder 2" descr="Sometimes we separate:. External reward r to the power ext coming from the environment. Internal reward r to the power int created by the agent. Both may be “engineered” by the creator of the task (environment) or the agent. The reward used for learning is r sub t equals r sub t, to the power ext, plus beta r sub t, to the power int. Issues:. Shortcut problem: Exploit superficial or spurious patterns (in the reward or transition model) rather than learning the actual task. Reward hacking: Exploit a loophole in the reward structure. Overwriting: Engineered reward overwriting the true objective. Bias problem: Add (potentially wrong) assumptions of what optimal behavior should be">
                 <a:extLst>
                   <a:ext uri="{FF2B5EF4-FFF2-40B4-BE49-F238E27FC236}">
                     <a16:creationId xmlns:a16="http://schemas.microsoft.com/office/drawing/2014/main" id="{57EDF8BE-2F75-8146-1CB8-42ECC2F500AC}"/>
@@ -13364,10 +14216,10 @@
             </p:txBody>
           </p:sp>
         </mc:Choice>
-        <mc:Fallback>
+        <mc:Fallback xmlns="">
           <p:sp>
             <p:nvSpPr>
-              <p:cNvPr id="3" name="Content Placeholder 2">
+              <p:cNvPr id="3" name="Content Placeholder 2" descr="Sometimes we separate:. External reward r to the power ext coming from the environment. Internal reward r to the power int created by the agent. Both may be “engineered” by the creator of the task (environment) or the agent. The reward used for learning is r sub t equals r sub t, to the power ext, plus beta r sub t, to the power int. Issues:. Shortcut problem: Exploit superficial or spurious patterns (in the reward or transition model) rather than learning the actual task. Reward hacking: Exploit a loophole in the reward structure. Overwriting: Engineered reward overwriting the true objective. Bias problem: Add (potentially wrong) assumptions of what optimal behavior should be">
                 <a:extLst>
                   <a:ext uri="{FF2B5EF4-FFF2-40B4-BE49-F238E27FC236}">
                     <a16:creationId xmlns:a16="http://schemas.microsoft.com/office/drawing/2014/main" id="{57EDF8BE-2F75-8146-1CB8-42ECC2F500AC}"/>
@@ -13387,7 +14239,7 @@
                 <a:ext cx="7415132" cy="4779633"/>
               </a:xfrm>
               <a:blipFill>
-                <a:blip r:embed="rId2"/>
+                <a:blip r:embed="rId10"/>
                 <a:stretch>
                   <a:fillRect l="-740" t="-2168"/>
                 </a:stretch>
@@ -13410,784 +14262,7 @@
       </mc:AlternateContent>
       <p:grpSp>
         <p:nvGrpSpPr>
-          <p:cNvPr id="17" name="Group 16">
-            <a:extLst>
-              <a:ext uri="{FF2B5EF4-FFF2-40B4-BE49-F238E27FC236}">
-                <a16:creationId xmlns:a16="http://schemas.microsoft.com/office/drawing/2014/main" id="{38A4B7B9-372E-5A74-5CE4-E9B718248F23}"/>
-              </a:ext>
-            </a:extLst>
-          </p:cNvPr>
-          <p:cNvGrpSpPr/>
-          <p:nvPr/>
-        </p:nvGrpSpPr>
-        <p:grpSpPr>
-          <a:xfrm>
-            <a:off x="8423925" y="1124198"/>
-            <a:ext cx="3103421" cy="3127867"/>
-            <a:chOff x="8828660" y="1124198"/>
-            <a:chExt cx="3103421" cy="3127867"/>
-          </a:xfrm>
-        </p:grpSpPr>
-        <p:grpSp>
-          <p:nvGrpSpPr>
-            <p:cNvPr id="18" name="Group 17">
-              <a:extLst>
-                <a:ext uri="{FF2B5EF4-FFF2-40B4-BE49-F238E27FC236}">
-                  <a16:creationId xmlns:a16="http://schemas.microsoft.com/office/drawing/2014/main" id="{7216F6EE-935E-3812-C12A-314BA5EC8E6E}"/>
-                </a:ext>
-              </a:extLst>
-            </p:cNvPr>
-            <p:cNvGrpSpPr/>
-            <p:nvPr/>
-          </p:nvGrpSpPr>
-          <p:grpSpPr>
-            <a:xfrm>
-              <a:off x="8828660" y="1493530"/>
-              <a:ext cx="3103421" cy="2758535"/>
-              <a:chOff x="1789245" y="1426327"/>
-              <a:chExt cx="4207277" cy="4067913"/>
-            </a:xfrm>
-          </p:grpSpPr>
-          <p:grpSp>
-            <p:nvGrpSpPr>
-              <p:cNvPr id="21" name="Group 20">
-                <a:extLst>
-                  <a:ext uri="{FF2B5EF4-FFF2-40B4-BE49-F238E27FC236}">
-                    <a16:creationId xmlns:a16="http://schemas.microsoft.com/office/drawing/2014/main" id="{47D9A8FE-BCAC-D877-39F8-C25844019FF1}"/>
-                  </a:ext>
-                </a:extLst>
-              </p:cNvPr>
-              <p:cNvGrpSpPr/>
-              <p:nvPr/>
-            </p:nvGrpSpPr>
-            <p:grpSpPr>
-              <a:xfrm>
-                <a:off x="1789245" y="1426327"/>
-                <a:ext cx="4207277" cy="4067913"/>
-                <a:chOff x="1586821" y="1395043"/>
-                <a:chExt cx="4207277" cy="4067913"/>
-              </a:xfrm>
-            </p:grpSpPr>
-            <p:pic>
-              <p:nvPicPr>
-                <p:cNvPr id="23" name="Picture 2" descr="undefined">
-                  <a:extLst>
-                    <a:ext uri="{FF2B5EF4-FFF2-40B4-BE49-F238E27FC236}">
-                      <a16:creationId xmlns:a16="http://schemas.microsoft.com/office/drawing/2014/main" id="{80AFD642-B690-0592-DA2E-4246017FF118}"/>
-                    </a:ext>
-                  </a:extLst>
-                </p:cNvPr>
-                <p:cNvPicPr>
-                  <a:picLocks noChangeAspect="1" noChangeArrowheads="1"/>
-                </p:cNvPicPr>
-                <p:nvPr/>
-              </p:nvPicPr>
-              <p:blipFill>
-                <a:blip r:embed="rId3">
-                  <a:extLst>
-                    <a:ext uri="{28A0092B-C50C-407E-A947-70E740481C1C}">
-                      <a14:useLocalDpi xmlns:a14="http://schemas.microsoft.com/office/drawing/2010/main" val="0"/>
-                    </a:ext>
-                  </a:extLst>
-                </a:blip>
-                <a:srcRect/>
-                <a:stretch>
-                  <a:fillRect/>
-                </a:stretch>
-              </p:blipFill>
-              <p:spPr bwMode="auto">
-                <a:xfrm>
-                  <a:off x="1586821" y="1395043"/>
-                  <a:ext cx="4207277" cy="4067913"/>
-                </a:xfrm>
-                <a:prstGeom prst="rect">
-                  <a:avLst/>
-                </a:prstGeom>
-                <a:noFill/>
-                <a:extLst>
-                  <a:ext uri="{909E8E84-426E-40DD-AFC4-6F175D3DCCD1}">
-                    <a14:hiddenFill xmlns:a14="http://schemas.microsoft.com/office/drawing/2010/main">
-                      <a:solidFill>
-                        <a:srgbClr val="FFFFFF"/>
-                      </a:solidFill>
-                    </a14:hiddenFill>
-                  </a:ext>
-                </a:extLst>
-              </p:spPr>
-            </p:pic>
-            <mc:AlternateContent xmlns:mc="http://schemas.openxmlformats.org/markup-compatibility/2006" xmlns:a14="http://schemas.microsoft.com/office/drawing/2010/main">
-              <mc:Choice Requires="a14">
-                <p:sp>
-                  <p:nvSpPr>
-                    <p:cNvPr id="24" name="TextBox 23">
-                      <a:extLst>
-                        <a:ext uri="{FF2B5EF4-FFF2-40B4-BE49-F238E27FC236}">
-                          <a16:creationId xmlns:a16="http://schemas.microsoft.com/office/drawing/2014/main" id="{1393D424-53A7-2B26-B6FC-F134CB003219}"/>
-                        </a:ext>
-                      </a:extLst>
-                    </p:cNvPr>
-                    <p:cNvSpPr txBox="1"/>
-                    <p:nvPr/>
-                  </p:nvSpPr>
-                  <p:spPr>
-                    <a:xfrm>
-                      <a:off x="4610278" y="1395043"/>
-                      <a:ext cx="581098" cy="544641"/>
-                    </a:xfrm>
-                    <a:prstGeom prst="rect">
-                      <a:avLst/>
-                    </a:prstGeom>
-                    <a:noFill/>
-                  </p:spPr>
-                  <p:txBody>
-                    <a:bodyPr wrap="square">
-                      <a:spAutoFit/>
-                    </a:bodyPr>
-                    <a:lstStyle/>
-                    <a:p>
-                      <a:pPr/>
-                      <a14:m>
-                        <m:oMathPara xmlns:m="http://schemas.openxmlformats.org/officeDocument/2006/math">
-                          <m:oMath>
-                            <m:sSub>
-                              <m:sSubPr>
-                                <m:ctrlPr>
-                                  <a:rPr lang="en-US" b="0" i="1" dirty="0" smtClean="0">
-                                    <a:solidFill>
-                                      <a:schemeClr val="tx1"/>
-                                    </a:solidFill>
-                                    <a:latin typeface="Cambria Math" panose="02040503050406030204" pitchFamily="18" charset="0"/>
-                                  </a:rPr>
-                                </m:ctrlPr>
-                              </m:sSubPr>
-                              <m:e>
-                                <m:r>
-                                  <a:rPr lang="en-US" b="0" i="1" dirty="0" smtClean="0">
-                                    <a:solidFill>
-                                      <a:schemeClr val="tx1"/>
-                                    </a:solidFill>
-                                    <a:latin typeface="Cambria Math" panose="02040503050406030204" pitchFamily="18" charset="0"/>
-                                  </a:rPr>
-                                  <m:t>𝑎</m:t>
-                                </m:r>
-                              </m:e>
-                              <m:sub>
-                                <m:r>
-                                  <a:rPr lang="en-US" b="0" i="1" dirty="0" smtClean="0">
-                                    <a:solidFill>
-                                      <a:schemeClr val="tx1"/>
-                                    </a:solidFill>
-                                    <a:latin typeface="Cambria Math" panose="02040503050406030204" pitchFamily="18" charset="0"/>
-                                  </a:rPr>
-                                  <m:t>𝑡</m:t>
-                                </m:r>
-                              </m:sub>
-                            </m:sSub>
-                          </m:oMath>
-                        </m:oMathPara>
-                      </a14:m>
-                      <a:endParaRPr lang="en-US" dirty="0">
-                        <a:solidFill>
-                          <a:schemeClr val="tx1"/>
-                        </a:solidFill>
-                      </a:endParaRPr>
-                    </a:p>
-                  </p:txBody>
-                </p:sp>
-              </mc:Choice>
-              <mc:Fallback xmlns="">
-                <p:sp>
-                  <p:nvSpPr>
-                    <p:cNvPr id="11" name="TextBox 10">
-                      <a:extLst>
-                        <a:ext uri="{FF2B5EF4-FFF2-40B4-BE49-F238E27FC236}">
-                          <a16:creationId xmlns:a16="http://schemas.microsoft.com/office/drawing/2014/main" id="{4D8B07A5-09FA-90B0-01EE-5437B5583C23}"/>
-                        </a:ext>
-                      </a:extLst>
-                    </p:cNvPr>
-                    <p:cNvSpPr txBox="1">
-                      <a:spLocks noRot="1" noChangeAspect="1" noMove="1" noResize="1" noEditPoints="1" noAdjustHandles="1" noChangeArrowheads="1" noChangeShapeType="1" noTextEdit="1"/>
-                    </p:cNvSpPr>
-                    <p:nvPr/>
-                  </p:nvSpPr>
-                  <p:spPr>
-                    <a:xfrm>
-                      <a:off x="4610278" y="1395043"/>
-                      <a:ext cx="581098" cy="544641"/>
-                    </a:xfrm>
-                    <a:prstGeom prst="rect">
-                      <a:avLst/>
-                    </a:prstGeom>
-                    <a:blipFill>
-                      <a:blip r:embed="rId5"/>
-                      <a:stretch>
-                        <a:fillRect/>
-                      </a:stretch>
-                    </a:blipFill>
-                  </p:spPr>
-                  <p:txBody>
-                    <a:bodyPr/>
-                    <a:lstStyle/>
-                    <a:p>
-                      <a:r>
-                        <a:rPr lang="en-US">
-                          <a:noFill/>
-                        </a:rPr>
-                        <a:t> </a:t>
-                      </a:r>
-                    </a:p>
-                  </p:txBody>
-                </p:sp>
-              </mc:Fallback>
-            </mc:AlternateContent>
-            <mc:AlternateContent xmlns:mc="http://schemas.openxmlformats.org/markup-compatibility/2006" xmlns:a14="http://schemas.microsoft.com/office/drawing/2010/main">
-              <mc:Choice Requires="a14">
-                <p:sp>
-                  <p:nvSpPr>
-                    <p:cNvPr id="25" name="TextBox 24">
-                      <a:extLst>
-                        <a:ext uri="{FF2B5EF4-FFF2-40B4-BE49-F238E27FC236}">
-                          <a16:creationId xmlns:a16="http://schemas.microsoft.com/office/drawing/2014/main" id="{F460FEFA-1DBC-7F71-7C4E-A0E7D4C8877B}"/>
-                        </a:ext>
-                      </a:extLst>
-                    </p:cNvPr>
-                    <p:cNvSpPr txBox="1"/>
-                    <p:nvPr/>
-                  </p:nvSpPr>
-                  <p:spPr>
-                    <a:xfrm>
-                      <a:off x="3348651" y="3588202"/>
-                      <a:ext cx="567432" cy="544641"/>
-                    </a:xfrm>
-                    <a:prstGeom prst="rect">
-                      <a:avLst/>
-                    </a:prstGeom>
-                    <a:noFill/>
-                  </p:spPr>
-                  <p:txBody>
-                    <a:bodyPr wrap="square">
-                      <a:spAutoFit/>
-                    </a:bodyPr>
-                    <a:lstStyle/>
-                    <a:p>
-                      <a:pPr/>
-                      <a14:m>
-                        <m:oMathPara xmlns:m="http://schemas.openxmlformats.org/officeDocument/2006/math">
-                          <m:oMath>
-                            <m:sSub>
-                              <m:sSubPr>
-                                <m:ctrlPr>
-                                  <a:rPr lang="en-US" i="1" dirty="0" smtClean="0">
-                                    <a:solidFill>
-                                      <a:srgbClr val="FF0000"/>
-                                    </a:solidFill>
-                                    <a:latin typeface="Cambria Math" panose="02040503050406030204" pitchFamily="18" charset="0"/>
-                                  </a:rPr>
-                                </m:ctrlPr>
-                              </m:sSubPr>
-                              <m:e>
-                                <m:r>
-                                  <a:rPr lang="en-US" i="1" dirty="0" smtClean="0">
-                                    <a:solidFill>
-                                      <a:srgbClr val="FF0000"/>
-                                    </a:solidFill>
-                                    <a:latin typeface="Cambria Math" panose="02040503050406030204" pitchFamily="18" charset="0"/>
-                                  </a:rPr>
-                                  <m:t>𝑟</m:t>
-                                </m:r>
-                              </m:e>
-                              <m:sub>
-                                <m:r>
-                                  <a:rPr lang="en-US" b="0" i="1" dirty="0" smtClean="0">
-                                    <a:solidFill>
-                                      <a:srgbClr val="FF0000"/>
-                                    </a:solidFill>
-                                    <a:latin typeface="Cambria Math" panose="02040503050406030204" pitchFamily="18" charset="0"/>
-                                  </a:rPr>
-                                  <m:t>𝑡</m:t>
-                                </m:r>
-                              </m:sub>
-                            </m:sSub>
-                          </m:oMath>
-                        </m:oMathPara>
-                      </a14:m>
-                      <a:endParaRPr lang="en-US" dirty="0"/>
-                    </a:p>
-                  </p:txBody>
-                </p:sp>
-              </mc:Choice>
-              <mc:Fallback xmlns="">
-                <p:sp>
-                  <p:nvSpPr>
-                    <p:cNvPr id="25" name="TextBox 24">
-                      <a:extLst>
-                        <a:ext uri="{FF2B5EF4-FFF2-40B4-BE49-F238E27FC236}">
-                          <a16:creationId xmlns:a16="http://schemas.microsoft.com/office/drawing/2014/main" id="{F460FEFA-1DBC-7F71-7C4E-A0E7D4C8877B}"/>
-                        </a:ext>
-                      </a:extLst>
-                    </p:cNvPr>
-                    <p:cNvSpPr txBox="1">
-                      <a:spLocks noRot="1" noChangeAspect="1" noMove="1" noResize="1" noEditPoints="1" noAdjustHandles="1" noChangeArrowheads="1" noChangeShapeType="1" noTextEdit="1"/>
-                    </p:cNvSpPr>
-                    <p:nvPr/>
-                  </p:nvSpPr>
-                  <p:spPr>
-                    <a:xfrm>
-                      <a:off x="3348651" y="3588202"/>
-                      <a:ext cx="567432" cy="544641"/>
-                    </a:xfrm>
-                    <a:prstGeom prst="rect">
-                      <a:avLst/>
-                    </a:prstGeom>
-                    <a:blipFill>
-                      <a:blip r:embed="rId6"/>
-                      <a:stretch>
-                        <a:fillRect/>
-                      </a:stretch>
-                    </a:blipFill>
-                  </p:spPr>
-                  <p:txBody>
-                    <a:bodyPr/>
-                    <a:lstStyle/>
-                    <a:p>
-                      <a:r>
-                        <a:rPr lang="en-US">
-                          <a:noFill/>
-                        </a:rPr>
-                        <a:t> </a:t>
-                      </a:r>
-                    </a:p>
-                  </p:txBody>
-                </p:sp>
-              </mc:Fallback>
-            </mc:AlternateContent>
-            <mc:AlternateContent xmlns:mc="http://schemas.openxmlformats.org/markup-compatibility/2006" xmlns:a14="http://schemas.microsoft.com/office/drawing/2010/main">
-              <mc:Choice Requires="a14">
-                <p:sp>
-                  <p:nvSpPr>
-                    <p:cNvPr id="26" name="TextBox 25">
-                      <a:extLst>
-                        <a:ext uri="{FF2B5EF4-FFF2-40B4-BE49-F238E27FC236}">
-                          <a16:creationId xmlns:a16="http://schemas.microsoft.com/office/drawing/2014/main" id="{79D89506-FDD1-67AB-A36E-2648AB88F371}"/>
-                        </a:ext>
-                      </a:extLst>
-                    </p:cNvPr>
-                    <p:cNvSpPr txBox="1"/>
-                    <p:nvPr/>
-                  </p:nvSpPr>
-                  <p:spPr>
-                    <a:xfrm>
-                      <a:off x="2995197" y="4697372"/>
-                      <a:ext cx="546197" cy="544641"/>
-                    </a:xfrm>
-                    <a:prstGeom prst="rect">
-                      <a:avLst/>
-                    </a:prstGeom>
-                    <a:noFill/>
-                  </p:spPr>
-                  <p:txBody>
-                    <a:bodyPr wrap="square">
-                      <a:spAutoFit/>
-                    </a:bodyPr>
-                    <a:lstStyle/>
-                    <a:p>
-                      <a:pPr/>
-                      <a14:m>
-                        <m:oMathPara xmlns:m="http://schemas.openxmlformats.org/officeDocument/2006/math">
-                          <m:oMath>
-                            <m:sSub>
-                              <m:sSubPr>
-                                <m:ctrlPr>
-                                  <a:rPr lang="en-US" b="0" i="1" dirty="0" smtClean="0">
-                                    <a:solidFill>
-                                      <a:schemeClr val="tx1"/>
-                                    </a:solidFill>
-                                    <a:latin typeface="Cambria Math" panose="02040503050406030204" pitchFamily="18" charset="0"/>
-                                  </a:rPr>
-                                </m:ctrlPr>
-                              </m:sSubPr>
-                              <m:e>
-                                <m:r>
-                                  <a:rPr lang="en-US" b="0" i="1" dirty="0" smtClean="0">
-                                    <a:solidFill>
-                                      <a:schemeClr val="tx1"/>
-                                    </a:solidFill>
-                                    <a:latin typeface="Cambria Math" panose="02040503050406030204" pitchFamily="18" charset="0"/>
-                                  </a:rPr>
-                                  <m:t>𝑠</m:t>
-                                </m:r>
-                              </m:e>
-                              <m:sub>
-                                <m:r>
-                                  <a:rPr lang="en-US" b="0" i="1" dirty="0" smtClean="0">
-                                    <a:solidFill>
-                                      <a:schemeClr val="tx1"/>
-                                    </a:solidFill>
-                                    <a:latin typeface="Cambria Math" panose="02040503050406030204" pitchFamily="18" charset="0"/>
-                                  </a:rPr>
-                                  <m:t>𝑡</m:t>
-                                </m:r>
-                              </m:sub>
-                            </m:sSub>
-                          </m:oMath>
-                        </m:oMathPara>
-                      </a14:m>
-                      <a:endParaRPr lang="en-US" dirty="0">
-                        <a:solidFill>
-                          <a:schemeClr val="tx1"/>
-                        </a:solidFill>
-                      </a:endParaRPr>
-                    </a:p>
-                  </p:txBody>
-                </p:sp>
-              </mc:Choice>
-              <mc:Fallback xmlns="">
-                <p:sp>
-                  <p:nvSpPr>
-                    <p:cNvPr id="13" name="TextBox 12">
-                      <a:extLst>
-                        <a:ext uri="{FF2B5EF4-FFF2-40B4-BE49-F238E27FC236}">
-                          <a16:creationId xmlns:a16="http://schemas.microsoft.com/office/drawing/2014/main" id="{05A35657-B40A-A991-2B74-3771C1A7D324}"/>
-                        </a:ext>
-                      </a:extLst>
-                    </p:cNvPr>
-                    <p:cNvSpPr txBox="1">
-                      <a:spLocks noRot="1" noChangeAspect="1" noMove="1" noResize="1" noEditPoints="1" noAdjustHandles="1" noChangeArrowheads="1" noChangeShapeType="1" noTextEdit="1"/>
-                    </p:cNvSpPr>
-                    <p:nvPr/>
-                  </p:nvSpPr>
-                  <p:spPr>
-                    <a:xfrm>
-                      <a:off x="2995197" y="4697372"/>
-                      <a:ext cx="546197" cy="544641"/>
-                    </a:xfrm>
-                    <a:prstGeom prst="rect">
-                      <a:avLst/>
-                    </a:prstGeom>
-                    <a:blipFill>
-                      <a:blip r:embed="rId7"/>
-                      <a:stretch>
-                        <a:fillRect/>
-                      </a:stretch>
-                    </a:blipFill>
-                  </p:spPr>
-                  <p:txBody>
-                    <a:bodyPr/>
-                    <a:lstStyle/>
-                    <a:p>
-                      <a:r>
-                        <a:rPr lang="en-US">
-                          <a:noFill/>
-                        </a:rPr>
-                        <a:t> </a:t>
-                      </a:r>
-                    </a:p>
-                  </p:txBody>
-                </p:sp>
-              </mc:Fallback>
-            </mc:AlternateContent>
-          </p:grpSp>
-          <p:sp>
-            <p:nvSpPr>
-              <p:cNvPr id="22" name="TextBox 21">
-                <a:extLst>
-                  <a:ext uri="{FF2B5EF4-FFF2-40B4-BE49-F238E27FC236}">
-                    <a16:creationId xmlns:a16="http://schemas.microsoft.com/office/drawing/2014/main" id="{83449089-1D62-8E4B-1961-AE891580A42E}"/>
-                  </a:ext>
-                </a:extLst>
-              </p:cNvPr>
-              <p:cNvSpPr txBox="1"/>
-              <p:nvPr/>
-            </p:nvSpPr>
-            <p:spPr>
-              <a:xfrm rot="20152154">
-                <a:off x="1957229" y="1503141"/>
-                <a:ext cx="1770111" cy="499253"/>
-              </a:xfrm>
-              <a:prstGeom prst="rect">
-                <a:avLst/>
-              </a:prstGeom>
-              <a:noFill/>
-            </p:spPr>
-            <p:txBody>
-              <a:bodyPr wrap="square">
-                <a:spAutoFit/>
-              </a:bodyPr>
-              <a:lstStyle/>
-              <a:p>
-                <a:r>
-                  <a:rPr lang="en-US" sz="1600" dirty="0"/>
-                  <a:t>Observation</a:t>
-                </a:r>
-              </a:p>
-            </p:txBody>
-          </p:sp>
-        </p:grpSp>
-        <mc:AlternateContent xmlns:mc="http://schemas.openxmlformats.org/markup-compatibility/2006" xmlns:a14="http://schemas.microsoft.com/office/drawing/2010/main">
-          <mc:Choice Requires="a14">
-            <p:sp>
-              <p:nvSpPr>
-                <p:cNvPr id="19" name="TextBox 18">
-                  <a:extLst>
-                    <a:ext uri="{FF2B5EF4-FFF2-40B4-BE49-F238E27FC236}">
-                      <a16:creationId xmlns:a16="http://schemas.microsoft.com/office/drawing/2014/main" id="{D22C3799-B67B-3541-C2C0-1677ACF59793}"/>
-                    </a:ext>
-                  </a:extLst>
-                </p:cNvPr>
-                <p:cNvSpPr txBox="1"/>
-                <p:nvPr/>
-              </p:nvSpPr>
-              <p:spPr>
-                <a:xfrm>
-                  <a:off x="10380371" y="1124198"/>
-                  <a:ext cx="366636" cy="369332"/>
-                </a:xfrm>
-                <a:prstGeom prst="rect">
-                  <a:avLst/>
-                </a:prstGeom>
-                <a:noFill/>
-              </p:spPr>
-              <p:txBody>
-                <a:bodyPr wrap="square">
-                  <a:spAutoFit/>
-                </a:bodyPr>
-                <a:lstStyle/>
-                <a:p>
-                  <a14:m>
-                    <m:oMath xmlns:m="http://schemas.openxmlformats.org/officeDocument/2006/math">
-                      <m:sSubSup>
-                        <m:sSubSupPr>
-                          <m:ctrlPr>
-                            <a:rPr lang="en-US" b="0" i="1" dirty="0" smtClean="0">
-                              <a:solidFill>
-                                <a:schemeClr val="tx1"/>
-                              </a:solidFill>
-                              <a:latin typeface="Cambria Math" panose="02040503050406030204" pitchFamily="18" charset="0"/>
-                            </a:rPr>
-                          </m:ctrlPr>
-                        </m:sSubSupPr>
-                        <m:e>
-                          <m:r>
-                            <a:rPr lang="en-US" b="0" i="1" dirty="0" smtClean="0">
-                              <a:solidFill>
-                                <a:schemeClr val="tx1"/>
-                              </a:solidFill>
-                              <a:latin typeface="Cambria Math" panose="02040503050406030204" pitchFamily="18" charset="0"/>
-                            </a:rPr>
-                            <m:t>𝑠</m:t>
-                          </m:r>
-                        </m:e>
-                        <m:sub>
-                          <m:r>
-                            <a:rPr lang="en-US" i="1" dirty="0">
-                              <a:solidFill>
-                                <a:schemeClr val="tx1"/>
-                              </a:solidFill>
-                              <a:latin typeface="Cambria Math" panose="02040503050406030204" pitchFamily="18" charset="0"/>
-                            </a:rPr>
-                            <m:t>𝑡</m:t>
-                          </m:r>
-                        </m:sub>
-                        <m:sup>
-                          <m:r>
-                            <a:rPr lang="en-US" b="0" i="1" dirty="0" smtClean="0">
-                              <a:solidFill>
-                                <a:schemeClr val="tx1"/>
-                              </a:solidFill>
-                              <a:latin typeface="Cambria Math" panose="02040503050406030204" pitchFamily="18" charset="0"/>
-                            </a:rPr>
-                            <m:t>𝑒</m:t>
-                          </m:r>
-                        </m:sup>
-                      </m:sSubSup>
-                    </m:oMath>
-                  </a14:m>
-                  <a:r>
-                    <a:rPr lang="en-US" dirty="0">
-                      <a:solidFill>
-                        <a:schemeClr val="tx1"/>
-                      </a:solidFill>
-                    </a:rPr>
-                    <a:t> </a:t>
-                  </a:r>
-                </a:p>
-              </p:txBody>
-            </p:sp>
-          </mc:Choice>
-          <mc:Fallback xmlns="">
-            <p:sp>
-              <p:nvSpPr>
-                <p:cNvPr id="6" name="TextBox 5">
-                  <a:extLst>
-                    <a:ext uri="{FF2B5EF4-FFF2-40B4-BE49-F238E27FC236}">
-                      <a16:creationId xmlns:a16="http://schemas.microsoft.com/office/drawing/2014/main" id="{FD761007-719A-F8F6-AAEA-FDD9C5CAA18C}"/>
-                    </a:ext>
-                  </a:extLst>
-                </p:cNvPr>
-                <p:cNvSpPr txBox="1">
-                  <a:spLocks noRot="1" noChangeAspect="1" noMove="1" noResize="1" noEditPoints="1" noAdjustHandles="1" noChangeArrowheads="1" noChangeShapeType="1" noTextEdit="1"/>
-                </p:cNvSpPr>
-                <p:nvPr/>
-              </p:nvSpPr>
-              <p:spPr>
-                <a:xfrm>
-                  <a:off x="10380371" y="1124198"/>
-                  <a:ext cx="366636" cy="369332"/>
-                </a:xfrm>
-                <a:prstGeom prst="rect">
-                  <a:avLst/>
-                </a:prstGeom>
-                <a:blipFill>
-                  <a:blip r:embed="rId8"/>
-                  <a:stretch>
-                    <a:fillRect/>
-                  </a:stretch>
-                </a:blipFill>
-              </p:spPr>
-              <p:txBody>
-                <a:bodyPr/>
-                <a:lstStyle/>
-                <a:p>
-                  <a:r>
-                    <a:rPr lang="en-US">
-                      <a:noFill/>
-                    </a:rPr>
-                    <a:t> </a:t>
-                  </a:r>
-                </a:p>
-              </p:txBody>
-            </p:sp>
-          </mc:Fallback>
-        </mc:AlternateContent>
-        <mc:AlternateContent xmlns:mc="http://schemas.openxmlformats.org/markup-compatibility/2006" xmlns:a14="http://schemas.microsoft.com/office/drawing/2010/main">
-          <mc:Choice Requires="a14">
-            <p:sp>
-              <p:nvSpPr>
-                <p:cNvPr id="20" name="TextBox 19">
-                  <a:extLst>
-                    <a:ext uri="{FF2B5EF4-FFF2-40B4-BE49-F238E27FC236}">
-                      <a16:creationId xmlns:a16="http://schemas.microsoft.com/office/drawing/2014/main" id="{8334190D-B1BC-2DA3-D75A-1839416F13D1}"/>
-                    </a:ext>
-                  </a:extLst>
-                </p:cNvPr>
-                <p:cNvSpPr txBox="1"/>
-                <p:nvPr/>
-              </p:nvSpPr>
-              <p:spPr>
-                <a:xfrm>
-                  <a:off x="8841360" y="2158958"/>
-                  <a:ext cx="402892" cy="369332"/>
-                </a:xfrm>
-                <a:prstGeom prst="rect">
-                  <a:avLst/>
-                </a:prstGeom>
-                <a:noFill/>
-              </p:spPr>
-              <p:txBody>
-                <a:bodyPr wrap="square">
-                  <a:spAutoFit/>
-                </a:bodyPr>
-                <a:lstStyle/>
-                <a:p>
-                  <a:pPr/>
-                  <a14:m>
-                    <m:oMathPara xmlns:m="http://schemas.openxmlformats.org/officeDocument/2006/math">
-                      <m:oMath>
-                        <m:sSub>
-                          <m:sSubPr>
-                            <m:ctrlPr>
-                              <a:rPr lang="en-US" b="0" i="1" dirty="0" smtClean="0">
-                                <a:solidFill>
-                                  <a:schemeClr val="tx1"/>
-                                </a:solidFill>
-                                <a:latin typeface="Cambria Math" panose="02040503050406030204" pitchFamily="18" charset="0"/>
-                              </a:rPr>
-                            </m:ctrlPr>
-                          </m:sSubPr>
-                          <m:e>
-                            <m:r>
-                              <a:rPr lang="en-US" b="0" i="1" dirty="0" smtClean="0">
-                                <a:solidFill>
-                                  <a:schemeClr val="tx1"/>
-                                </a:solidFill>
-                                <a:latin typeface="Cambria Math" panose="02040503050406030204" pitchFamily="18" charset="0"/>
-                              </a:rPr>
-                              <m:t>𝑥</m:t>
-                            </m:r>
-                          </m:e>
-                          <m:sub>
-                            <m:r>
-                              <a:rPr lang="en-US" b="0" i="1" dirty="0" smtClean="0">
-                                <a:solidFill>
-                                  <a:schemeClr val="tx1"/>
-                                </a:solidFill>
-                                <a:latin typeface="Cambria Math" panose="02040503050406030204" pitchFamily="18" charset="0"/>
-                              </a:rPr>
-                              <m:t>𝑡</m:t>
-                            </m:r>
-                          </m:sub>
-                        </m:sSub>
-                      </m:oMath>
-                    </m:oMathPara>
-                  </a14:m>
-                  <a:endParaRPr lang="en-US" dirty="0">
-                    <a:solidFill>
-                      <a:schemeClr val="tx1"/>
-                    </a:solidFill>
-                  </a:endParaRPr>
-                </a:p>
-              </p:txBody>
-            </p:sp>
-          </mc:Choice>
-          <mc:Fallback xmlns="">
-            <p:sp>
-              <p:nvSpPr>
-                <p:cNvPr id="7" name="TextBox 6">
-                  <a:extLst>
-                    <a:ext uri="{FF2B5EF4-FFF2-40B4-BE49-F238E27FC236}">
-                      <a16:creationId xmlns:a16="http://schemas.microsoft.com/office/drawing/2014/main" id="{86D101BB-2275-F525-4BA8-FC2D31EC3C1C}"/>
-                    </a:ext>
-                  </a:extLst>
-                </p:cNvPr>
-                <p:cNvSpPr txBox="1">
-                  <a:spLocks noRot="1" noChangeAspect="1" noMove="1" noResize="1" noEditPoints="1" noAdjustHandles="1" noChangeArrowheads="1" noChangeShapeType="1" noTextEdit="1"/>
-                </p:cNvSpPr>
-                <p:nvPr/>
-              </p:nvSpPr>
-              <p:spPr>
-                <a:xfrm>
-                  <a:off x="8841360" y="2158958"/>
-                  <a:ext cx="402892" cy="369332"/>
-                </a:xfrm>
-                <a:prstGeom prst="rect">
-                  <a:avLst/>
-                </a:prstGeom>
-                <a:blipFill>
-                  <a:blip r:embed="rId9"/>
-                  <a:stretch>
-                    <a:fillRect/>
-                  </a:stretch>
-                </a:blipFill>
-              </p:spPr>
-              <p:txBody>
-                <a:bodyPr/>
-                <a:lstStyle/>
-                <a:p>
-                  <a:r>
-                    <a:rPr lang="en-US">
-                      <a:noFill/>
-                    </a:rPr>
-                    <a:t> </a:t>
-                  </a:r>
-                </a:p>
-              </p:txBody>
-            </p:sp>
-          </mc:Fallback>
-        </mc:AlternateContent>
-      </p:grpSp>
-      <p:grpSp>
-        <p:nvGrpSpPr>
-          <p:cNvPr id="27" name="Group 26">
+          <p:cNvPr id="27" name="Group 26" descr="Orange outline around the agent, with a callout: The agent design often includes designing the reward structure.">
             <a:extLst>
               <a:ext uri="{FF2B5EF4-FFF2-40B4-BE49-F238E27FC236}">
                 <a16:creationId xmlns:a16="http://schemas.microsoft.com/office/drawing/2014/main" id="{15D85CC6-3694-3A14-C329-B1B264CDC7B2}"/>
@@ -14211,6 +14286,9 @@
               <a:extLst>
                 <a:ext uri="{FF2B5EF4-FFF2-40B4-BE49-F238E27FC236}">
                   <a16:creationId xmlns:a16="http://schemas.microsoft.com/office/drawing/2014/main" id="{E11F06F5-3138-198A-75DD-EA1BA368D98C}"/>
+                </a:ext>
+                <a:ext uri="{C183D7F6-B498-43B3-948B-1728B52AA6E4}">
+                  <adec:decorative xmlns:adec="http://schemas.microsoft.com/office/drawing/2017/decorative" val="1"/>
                 </a:ext>
               </a:extLst>
             </p:cNvPr>
@@ -14319,7 +14397,7 @@
         <mc:Choice Requires="a14">
           <p:sp>
             <p:nvSpPr>
-              <p:cNvPr id="31" name="TextBox 30">
+              <p:cNvPr id="31" name="TextBox 30" descr="Equation: r sub t, to the power ext">
                 <a:extLst>
                   <a:ext uri="{FF2B5EF4-FFF2-40B4-BE49-F238E27FC236}">
                     <a16:creationId xmlns:a16="http://schemas.microsoft.com/office/drawing/2014/main" id="{1962CD39-A181-D4CA-2D24-618C04EFD9AD}"/>
@@ -14405,7 +14483,7 @@
         <mc:Fallback xmlns="">
           <p:sp>
             <p:nvSpPr>
-              <p:cNvPr id="31" name="TextBox 30">
+              <p:cNvPr id="31" name="TextBox 30" descr="Equation: r sub t, to the power ext">
                 <a:extLst>
                   <a:ext uri="{FF2B5EF4-FFF2-40B4-BE49-F238E27FC236}">
                     <a16:creationId xmlns:a16="http://schemas.microsoft.com/office/drawing/2014/main" id="{1962CD39-A181-D4CA-2D24-618C04EFD9AD}"/>
@@ -14426,7 +14504,7 @@
                 <a:avLst/>
               </a:prstGeom>
               <a:blipFill>
-                <a:blip r:embed="rId10"/>
+                <a:blip r:embed="rId11"/>
                 <a:stretch>
                   <a:fillRect/>
                 </a:stretch>
@@ -14451,7 +14529,7 @@
         <mc:Choice Requires="a14">
           <p:sp>
             <p:nvSpPr>
-              <p:cNvPr id="34" name="Thought Bubble: Cloud 33">
+              <p:cNvPr id="34" name="Thought Bubble: Cloud 33" descr="Equation: r sub t, to the power int">
                 <a:extLst>
                   <a:ext uri="{FF2B5EF4-FFF2-40B4-BE49-F238E27FC236}">
                     <a16:creationId xmlns:a16="http://schemas.microsoft.com/office/drawing/2014/main" id="{214509B9-54F9-3A46-7391-DCEC8BDDADC0}"/>
@@ -14552,7 +14630,7 @@
         <mc:Fallback xmlns="">
           <p:sp>
             <p:nvSpPr>
-              <p:cNvPr id="34" name="Thought Bubble: Cloud 33">
+              <p:cNvPr id="34" name="Thought Bubble: Cloud 33" descr="Equation: r sub t, to the power int">
                 <a:extLst>
                   <a:ext uri="{FF2B5EF4-FFF2-40B4-BE49-F238E27FC236}">
                     <a16:creationId xmlns:a16="http://schemas.microsoft.com/office/drawing/2014/main" id="{214509B9-54F9-3A46-7391-DCEC8BDDADC0}"/>
@@ -14576,7 +14654,7 @@
                 </a:avLst>
               </a:prstGeom>
               <a:blipFill>
-                <a:blip r:embed="rId11"/>
+                <a:blip r:embed="rId12"/>
                 <a:stretch>
                   <a:fillRect/>
                 </a:stretch>
@@ -14959,7 +15037,7 @@
       </p:sp>
       <p:pic>
         <p:nvPicPr>
-          <p:cNvPr id="7" name="Picture 6">
+          <p:cNvPr id="7" name="Picture 6" descr="Photo of a hand holding up a gold medal with the number 1 on a red ribbon.">
             <a:extLst>
               <a:ext uri="{FF2B5EF4-FFF2-40B4-BE49-F238E27FC236}">
                 <a16:creationId xmlns:a16="http://schemas.microsoft.com/office/drawing/2014/main" id="{2D67C3B7-EE2B-93BC-3DE4-F9050FAC34E4}"/>
@@ -15170,11 +15248,11 @@
           </a:p>
         </p:txBody>
       </p:sp>
-      <mc:AlternateContent xmlns:mc="http://schemas.openxmlformats.org/markup-compatibility/2006">
-        <mc:Choice xmlns:a14="http://schemas.microsoft.com/office/drawing/2010/main" Requires="a14">
+      <mc:AlternateContent xmlns:mc="http://schemas.openxmlformats.org/markup-compatibility/2006" xmlns:a14="http://schemas.microsoft.com/office/drawing/2010/main">
+        <mc:Choice Requires="a14">
           <p:sp>
             <p:nvSpPr>
-              <p:cNvPr id="3" name="Content Placeholder 2">
+              <p:cNvPr id="3" name="Content Placeholder 2" descr="Idea:. States have a potential phi (s) representing how promising the state is to solve the task. The agent can assess phi (s) and use the change in potential to modify the reward. The reward for a state transition s to s prime is modified as:. r prime (s,a,s prime) equals r (s,a,s prime) plus beta (gamma phi (s prime) minus phi (s)). Result:. Densifies rewards with difference in potential. Encourages the agent to learn to move to more promising state. Does not change the optimal policy. Requirement: The agent needs a good heuristic for phi (s)">
                 <a:extLst>
                   <a:ext uri="{FF2B5EF4-FFF2-40B4-BE49-F238E27FC236}">
                     <a16:creationId xmlns:a16="http://schemas.microsoft.com/office/drawing/2014/main" id="{26544DCA-3D60-9EF4-6AB9-F671E9E02BF3}"/>
@@ -15690,10 +15768,10 @@
             </p:txBody>
           </p:sp>
         </mc:Choice>
-        <mc:Fallback>
+        <mc:Fallback xmlns="">
           <p:sp>
             <p:nvSpPr>
-              <p:cNvPr id="3" name="Content Placeholder 2">
+              <p:cNvPr id="3" name="Content Placeholder 2" descr="Idea:. States have a potential phi (s) representing how promising the state is to solve the task. The agent can assess phi (s) and use the change in potential to modify the reward. The reward for a state transition s to s prime is modified as:. r prime (s,a,s prime) equals r (s,a,s prime) plus beta (gamma phi (s prime) minus phi (s)). Result:. Densifies rewards with difference in potential. Encourages the agent to learn to move to more promising state. Does not change the optimal policy. Requirement: The agent needs a good heuristic for phi (s)">
                 <a:extLst>
                   <a:ext uri="{FF2B5EF4-FFF2-40B4-BE49-F238E27FC236}">
                     <a16:creationId xmlns:a16="http://schemas.microsoft.com/office/drawing/2014/main" id="{26544DCA-3D60-9EF4-6AB9-F671E9E02BF3}"/>
@@ -15789,7 +15867,7 @@
       </p:sp>
       <p:grpSp>
         <p:nvGrpSpPr>
-          <p:cNvPr id="21" name="Group 20">
+          <p:cNvPr id="21" name="Group 20" descr="Screenshot of the Gym Frozen Lake environment: a 4 by 4 grid of ice with an elf at the start in the top-left corner, holes in the ice, and a present (the goal) in the bottom-right corner. Labels: Use the negative distance to the goal as the potential function. Compare to A* search; Frozen Lake Maze; s sub t; minus phi (s sub t); Example.">
             <a:extLst>
               <a:ext uri="{FF2B5EF4-FFF2-40B4-BE49-F238E27FC236}">
                 <a16:creationId xmlns:a16="http://schemas.microsoft.com/office/drawing/2014/main" id="{F0277244-06EA-CCA2-DE2F-00DE1621DC6D}"/>
@@ -15844,7 +15922,7 @@
         </p:sp>
         <p:grpSp>
           <p:nvGrpSpPr>
-            <p:cNvPr id="14" name="Group 13">
+            <p:cNvPr id="14" name="Group 13" descr="Screenshot of the Gym Frozen Lake environment: a 4 by 4 grid of ice with an elf at the start in the top-left corner, holes in the ice, and a present (the goal) in the bottom-right corner. Labels: Frozen Lake Maze; s sub t; minus phi (s sub t).">
               <a:extLst>
                 <a:ext uri="{FF2B5EF4-FFF2-40B4-BE49-F238E27FC236}">
                   <a16:creationId xmlns:a16="http://schemas.microsoft.com/office/drawing/2014/main" id="{7DDCD16F-A0C1-20C0-F386-35BCC60495DF}"/>
@@ -15864,7 +15942,7 @@
           </p:grpSpPr>
           <p:grpSp>
             <p:nvGrpSpPr>
-              <p:cNvPr id="4" name="Group 3">
+              <p:cNvPr id="4" name="Group 3" descr="Screenshot of the Gym Frozen Lake environment: a 4 by 4 grid of ice with an elf at the start in the top-left corner, holes in the ice, and a present (the goal) in the bottom-right corner. Labels: Frozen Lake Maze.">
                 <a:extLst>
                   <a:ext uri="{FF2B5EF4-FFF2-40B4-BE49-F238E27FC236}">
                     <a16:creationId xmlns:a16="http://schemas.microsoft.com/office/drawing/2014/main" id="{80176677-784C-DE6E-B3D4-010151EF2BC3}"/>
@@ -15884,7 +15962,7 @@
             </p:grpSpPr>
             <p:pic>
               <p:nvPicPr>
-                <p:cNvPr id="5" name="Picture 4">
+                <p:cNvPr id="5" name="Picture 4" descr="Screenshot of the Gym Frozen Lake environment: a 4 by 4 grid of ice with an elf at the start in the top-left corner, holes in the ice, and a present (the goal) in the bottom-right corner.">
                   <a:extLst>
                     <a:ext uri="{FF2B5EF4-FFF2-40B4-BE49-F238E27FC236}">
                       <a16:creationId xmlns:a16="http://schemas.microsoft.com/office/drawing/2014/main" id="{2422BECA-FA5F-DD84-52DA-3B088A18303B}"/>
@@ -15956,6 +16034,9 @@
                   <a:ext uri="{FF2B5EF4-FFF2-40B4-BE49-F238E27FC236}">
                     <a16:creationId xmlns:a16="http://schemas.microsoft.com/office/drawing/2014/main" id="{B4A008CE-F191-8D2D-A31F-7CD951082FB4}"/>
                   </a:ext>
+                  <a:ext uri="{C183D7F6-B498-43B3-948B-1728B52AA6E4}">
+                    <adec:decorative xmlns:adec="http://schemas.microsoft.com/office/drawing/2017/decorative" val="1"/>
+                  </a:ext>
                 </a:extLst>
               </p:cNvPr>
               <p:cNvCxnSpPr>
@@ -15994,7 +16075,7 @@
             <mc:Choice Requires="a14">
               <p:sp>
                 <p:nvSpPr>
-                  <p:cNvPr id="11" name="TextBox 10">
+                  <p:cNvPr id="11" name="TextBox 10" descr="Equation: s sub t">
                     <a:extLst>
                       <a:ext uri="{FF2B5EF4-FFF2-40B4-BE49-F238E27FC236}">
                         <a16:creationId xmlns:a16="http://schemas.microsoft.com/office/drawing/2014/main" id="{6F1582BE-FC1D-8519-D0F6-0A504C18634A}"/>
@@ -16060,7 +16141,7 @@
             <mc:Fallback xmlns="">
               <p:sp>
                 <p:nvSpPr>
-                  <p:cNvPr id="11" name="TextBox 10">
+                  <p:cNvPr id="11" name="TextBox 10" descr="Equation: s sub t">
                     <a:extLst>
                       <a:ext uri="{FF2B5EF4-FFF2-40B4-BE49-F238E27FC236}">
                         <a16:creationId xmlns:a16="http://schemas.microsoft.com/office/drawing/2014/main" id="{6F1582BE-FC1D-8519-D0F6-0A504C18634A}"/>
@@ -16106,7 +16187,7 @@
             <mc:Choice Requires="a14">
               <p:sp>
                 <p:nvSpPr>
-                  <p:cNvPr id="12" name="TextBox 11">
+                  <p:cNvPr id="12" name="TextBox 11" descr="Equation: minus phi (s sub t)">
                     <a:extLst>
                       <a:ext uri="{FF2B5EF4-FFF2-40B4-BE49-F238E27FC236}">
                         <a16:creationId xmlns:a16="http://schemas.microsoft.com/office/drawing/2014/main" id="{24258222-1224-AF39-EFA8-9570CDC44DFC}"/>
@@ -16195,7 +16276,7 @@
             <mc:Fallback xmlns="">
               <p:sp>
                 <p:nvSpPr>
-                  <p:cNvPr id="12" name="TextBox 11">
+                  <p:cNvPr id="12" name="TextBox 11" descr="Equation: minus phi (s sub t)">
                     <a:extLst>
                       <a:ext uri="{FF2B5EF4-FFF2-40B4-BE49-F238E27FC236}">
                         <a16:creationId xmlns:a16="http://schemas.microsoft.com/office/drawing/2014/main" id="{24258222-1224-AF39-EFA8-9570CDC44DFC}"/>
@@ -16703,11 +16784,11 @@
           </a:p>
         </p:txBody>
       </p:sp>
-      <mc:AlternateContent xmlns:mc="http://schemas.openxmlformats.org/markup-compatibility/2006">
-        <mc:Choice xmlns:a14="http://schemas.microsoft.com/office/drawing/2010/main" Requires="a14">
+      <mc:AlternateContent xmlns:mc="http://schemas.openxmlformats.org/markup-compatibility/2006" xmlns:a14="http://schemas.microsoft.com/office/drawing/2010/main">
+        <mc:Choice Requires="a14">
           <p:sp>
             <p:nvSpPr>
-              <p:cNvPr id="3" name="Content Placeholder 2">
+              <p:cNvPr id="3" name="Content Placeholder 2" descr="Idea: Add small one-time rewards for solving an important subtask: r prime (s,a,s prime) equals r (s,a,s prime) plus m sub t where m sub t equals r sub m when a milestone m is reached for the first time and 0 otherwise. Subtask completion can be represented as reaching a state for the first time. This can help with complex, multi-step problems. Note: This can be seen as a simplified version of PBRS. Issues:. Reward Hacking. Misleading Paths: If the intermediate reward is poorly designed">
                 <a:extLst>
                   <a:ext uri="{FF2B5EF4-FFF2-40B4-BE49-F238E27FC236}">
                     <a16:creationId xmlns:a16="http://schemas.microsoft.com/office/drawing/2014/main" id="{618B468E-DFDF-7E93-B66D-0578F006CF90}"/>
@@ -17097,10 +17178,10 @@
             </p:txBody>
           </p:sp>
         </mc:Choice>
-        <mc:Fallback>
+        <mc:Fallback xmlns="">
           <p:sp>
             <p:nvSpPr>
-              <p:cNvPr id="3" name="Content Placeholder 2">
+              <p:cNvPr id="3" name="Content Placeholder 2" descr="Idea: Add small one-time rewards for solving an important subtask: r prime (s,a,s prime) equals r (s,a,s prime) plus m sub t where m sub t equals r sub m when a milestone m is reached for the first time and 0 otherwise. Subtask completion can be represented as reaching a state for the first time. This can help with complex, multi-step problems. Note: This can be seen as a simplified version of PBRS. Issues:. Reward Hacking. Misleading Paths: If the intermediate reward is poorly designed">
                 <a:extLst>
                   <a:ext uri="{FF2B5EF4-FFF2-40B4-BE49-F238E27FC236}">
                     <a16:creationId xmlns:a16="http://schemas.microsoft.com/office/drawing/2014/main" id="{618B468E-DFDF-7E93-B66D-0578F006CF90}"/>
@@ -17141,106 +17222,11 @@
           </p:sp>
         </mc:Fallback>
       </mc:AlternateContent>
-      <p:grpSp>
-        <p:nvGrpSpPr>
-          <p:cNvPr id="31" name="Group 30">
-            <a:extLst>
-              <a:ext uri="{FF2B5EF4-FFF2-40B4-BE49-F238E27FC236}">
-                <a16:creationId xmlns:a16="http://schemas.microsoft.com/office/drawing/2014/main" id="{F38F2D1E-5ACC-9E69-D3C6-AA7CAB0B7A9F}"/>
-              </a:ext>
-            </a:extLst>
-          </p:cNvPr>
-          <p:cNvGrpSpPr/>
-          <p:nvPr/>
-        </p:nvGrpSpPr>
-        <p:grpSpPr>
-          <a:xfrm>
-            <a:off x="8522058" y="4567826"/>
-            <a:ext cx="3452227" cy="2460192"/>
-            <a:chOff x="8522058" y="4567826"/>
-            <a:chExt cx="3452227" cy="2460192"/>
-          </a:xfrm>
-        </p:grpSpPr>
-        <p:pic>
-          <p:nvPicPr>
-            <p:cNvPr id="19" name="Picture 18">
-              <a:extLst>
-                <a:ext uri="{FF2B5EF4-FFF2-40B4-BE49-F238E27FC236}">
-                  <a16:creationId xmlns:a16="http://schemas.microsoft.com/office/drawing/2014/main" id="{3DFD1FF3-C329-F0CF-1174-2F80AA5EF81F}"/>
-                </a:ext>
-              </a:extLst>
-            </p:cNvPr>
-            <p:cNvPicPr>
-              <a:picLocks noChangeAspect="1"/>
-            </p:cNvPicPr>
-            <p:nvPr/>
-          </p:nvPicPr>
-          <p:blipFill>
-            <a:blip r:embed="rId3"/>
-            <a:stretch>
-              <a:fillRect/>
-            </a:stretch>
-          </p:blipFill>
-          <p:spPr>
-            <a:xfrm>
-              <a:off x="8628426" y="4567826"/>
-              <a:ext cx="2839963" cy="1629195"/>
-            </a:xfrm>
-            <a:prstGeom prst="rect">
-              <a:avLst/>
-            </a:prstGeom>
-          </p:spPr>
-        </p:pic>
-        <p:sp>
-          <p:nvSpPr>
-            <p:cNvPr id="22" name="TextBox 21">
-              <a:extLst>
-                <a:ext uri="{FF2B5EF4-FFF2-40B4-BE49-F238E27FC236}">
-                  <a16:creationId xmlns:a16="http://schemas.microsoft.com/office/drawing/2014/main" id="{DB391B1B-9FC2-9F77-44C3-CE049FE794EE}"/>
-                </a:ext>
-              </a:extLst>
-            </p:cNvPr>
-            <p:cNvSpPr txBox="1"/>
-            <p:nvPr/>
-          </p:nvSpPr>
-          <p:spPr>
-            <a:xfrm>
-              <a:off x="8522058" y="6197021"/>
-              <a:ext cx="3452227" cy="830997"/>
-            </a:xfrm>
-            <a:prstGeom prst="rect">
-              <a:avLst/>
-            </a:prstGeom>
-            <a:noFill/>
-          </p:spPr>
-          <p:txBody>
-            <a:bodyPr wrap="square" rtlCol="0">
-              <a:spAutoFit/>
-            </a:bodyPr>
-            <a:lstStyle/>
-            <a:p>
-              <a:r>
-                <a:rPr lang="en-US" sz="1600" dirty="0"/>
-                <a:t>Milestones: </a:t>
-              </a:r>
-            </a:p>
-            <a:p>
-              <a:r>
-                <a:rPr lang="en-US" sz="1600" dirty="0"/>
-                <a:t>Picking up the key, opening the door.</a:t>
-              </a:r>
-            </a:p>
-            <a:p>
-              <a:endParaRPr lang="en-US" sz="1600" dirty="0"/>
-            </a:p>
-          </p:txBody>
-        </p:sp>
-      </p:grpSp>
       <mc:AlternateContent xmlns:mc="http://schemas.openxmlformats.org/markup-compatibility/2006" xmlns:a14="http://schemas.microsoft.com/office/drawing/2010/main">
         <mc:Choice Requires="a14">
           <p:sp>
             <p:nvSpPr>
-              <p:cNvPr id="25" name="TextBox 24">
+              <p:cNvPr id="25" name="TextBox 24" descr="Equation: r sub m sub 1">
                 <a:extLst>
                   <a:ext uri="{FF2B5EF4-FFF2-40B4-BE49-F238E27FC236}">
                     <a16:creationId xmlns:a16="http://schemas.microsoft.com/office/drawing/2014/main" id="{CB468F2C-575A-F542-AD60-D78B19B89DBF}"/>
@@ -17325,7 +17311,7 @@
         <mc:Fallback xmlns="">
           <p:sp>
             <p:nvSpPr>
-              <p:cNvPr id="25" name="TextBox 24">
+              <p:cNvPr id="25" name="TextBox 24" descr="Equation: r sub m sub 1">
                 <a:extLst>
                   <a:ext uri="{FF2B5EF4-FFF2-40B4-BE49-F238E27FC236}">
                     <a16:creationId xmlns:a16="http://schemas.microsoft.com/office/drawing/2014/main" id="{CB468F2C-575A-F542-AD60-D78B19B89DBF}"/>
@@ -17369,7 +17355,7 @@
       </mc:AlternateContent>
       <p:grpSp>
         <p:nvGrpSpPr>
-          <p:cNvPr id="30" name="Group 29">
+          <p:cNvPr id="30" name="Group 29" descr="Gridworld of 11 by 11 cells, each numbered with its state index (0 to 102), with black wall cells dividing it into rooms; the start S is at the bottom left and the goal G is on the left side near the middle. Labels: S; G; Milestone is going to the next room; Examples; milestones.">
             <a:extLst>
               <a:ext uri="{FF2B5EF4-FFF2-40B4-BE49-F238E27FC236}">
                 <a16:creationId xmlns:a16="http://schemas.microsoft.com/office/drawing/2014/main" id="{A045BF9A-8EB9-76B3-DAAF-FAA96CB2B70C}"/>
@@ -17389,7 +17375,7 @@
         </p:grpSpPr>
         <p:grpSp>
           <p:nvGrpSpPr>
-            <p:cNvPr id="20" name="Group 19">
+            <p:cNvPr id="20" name="Group 19" descr="Gridworld of 11 by 11 cells, each numbered with its state index (0 to 102), with black wall cells dividing it into rooms; the start S is at the bottom left and the goal G is on the left side near the middle. Labels: S; G.">
               <a:extLst>
                 <a:ext uri="{FF2B5EF4-FFF2-40B4-BE49-F238E27FC236}">
                   <a16:creationId xmlns:a16="http://schemas.microsoft.com/office/drawing/2014/main" id="{E9F69A08-A188-1F8E-9AED-3A5BEEEF06DC}"/>
@@ -17409,7 +17395,7 @@
           </p:grpSpPr>
           <p:pic>
             <p:nvPicPr>
-              <p:cNvPr id="5" name="Picture 4">
+              <p:cNvPr id="5" name="Picture 4" descr="Gridworld of 11 by 11 cells, each numbered with its state index (0 to 102), with black wall cells dividing it into rooms; the start S is at the bottom left and the goal G is on the left side near the middle.">
                 <a:extLst>
                   <a:ext uri="{FF2B5EF4-FFF2-40B4-BE49-F238E27FC236}">
                     <a16:creationId xmlns:a16="http://schemas.microsoft.com/office/drawing/2014/main" id="{1072791A-71C7-E9FB-73DE-B3A9C287B549}"/>
@@ -17522,6 +17508,9 @@
                   <a:ext uri="{FF2B5EF4-FFF2-40B4-BE49-F238E27FC236}">
                     <a16:creationId xmlns:a16="http://schemas.microsoft.com/office/drawing/2014/main" id="{713EDFE4-878A-CED1-BB4A-C0A617B8AFED}"/>
                   </a:ext>
+                  <a:ext uri="{C183D7F6-B498-43B3-948B-1728B52AA6E4}">
+                    <adec:decorative xmlns:adec="http://schemas.microsoft.com/office/drawing/2017/decorative" val="1"/>
+                  </a:ext>
                 </a:extLst>
               </p:cNvPr>
               <p:cNvCxnSpPr>
@@ -17562,6 +17551,9 @@
                 <a:extLst>
                   <a:ext uri="{FF2B5EF4-FFF2-40B4-BE49-F238E27FC236}">
                     <a16:creationId xmlns:a16="http://schemas.microsoft.com/office/drawing/2014/main" id="{B117AFCD-8EA3-9F7B-9D9A-DB5468C4180B}"/>
+                  </a:ext>
+                  <a:ext uri="{C183D7F6-B498-43B3-948B-1728B52AA6E4}">
+                    <adec:decorative xmlns:adec="http://schemas.microsoft.com/office/drawing/2017/decorative" val="1"/>
                   </a:ext>
                 </a:extLst>
               </p:cNvPr>
@@ -17675,6 +17667,9 @@
                 <a:ext uri="{FF2B5EF4-FFF2-40B4-BE49-F238E27FC236}">
                   <a16:creationId xmlns:a16="http://schemas.microsoft.com/office/drawing/2014/main" id="{B2F15B02-F890-B53D-BB31-28E200F24BA6}"/>
                 </a:ext>
+                <a:ext uri="{C183D7F6-B498-43B3-948B-1728B52AA6E4}">
+                  <adec:decorative xmlns:adec="http://schemas.microsoft.com/office/drawing/2017/decorative" val="1"/>
+                </a:ext>
               </a:extLst>
             </p:cNvPr>
             <p:cNvCxnSpPr>
@@ -17711,7 +17706,7 @@
         </p:cxnSp>
         <p:grpSp>
           <p:nvGrpSpPr>
-            <p:cNvPr id="29" name="Group 28">
+            <p:cNvPr id="29" name="Group 28" descr="Legend: a blue arrow marks the milestones.">
               <a:extLst>
                 <a:ext uri="{FF2B5EF4-FFF2-40B4-BE49-F238E27FC236}">
                   <a16:creationId xmlns:a16="http://schemas.microsoft.com/office/drawing/2014/main" id="{83DD06DC-83A5-BE27-F526-3AADE71D0746}"/>
@@ -17735,6 +17730,9 @@
                 <a:extLst>
                   <a:ext uri="{FF2B5EF4-FFF2-40B4-BE49-F238E27FC236}">
                     <a16:creationId xmlns:a16="http://schemas.microsoft.com/office/drawing/2014/main" id="{1C44AF51-C2B0-D401-8190-096136BA9382}"/>
+                  </a:ext>
+                  <a:ext uri="{C183D7F6-B498-43B3-948B-1728B52AA6E4}">
+                    <adec:decorative xmlns:adec="http://schemas.microsoft.com/office/drawing/2017/decorative" val="1"/>
                   </a:ext>
                 </a:extLst>
               </p:cNvPr>
@@ -17806,6 +17804,101 @@
             </p:txBody>
           </p:sp>
         </p:grpSp>
+      </p:grpSp>
+      <p:grpSp>
+        <p:nvGrpSpPr>
+          <p:cNvPr id="31" name="Group 30" descr="Screenshot of a MiniGrid environment: a dark grid world with the agent (a red triangle), a green key, a ball, a door in the wall and a yellow goal box. Labels: Milestones:. Picking up the key, opening the door.">
+            <a:extLst>
+              <a:ext uri="{FF2B5EF4-FFF2-40B4-BE49-F238E27FC236}">
+                <a16:creationId xmlns:a16="http://schemas.microsoft.com/office/drawing/2014/main" id="{F38F2D1E-5ACC-9E69-D3C6-AA7CAB0B7A9F}"/>
+              </a:ext>
+            </a:extLst>
+          </p:cNvPr>
+          <p:cNvGrpSpPr/>
+          <p:nvPr/>
+        </p:nvGrpSpPr>
+        <p:grpSpPr>
+          <a:xfrm>
+            <a:off x="8522058" y="4567826"/>
+            <a:ext cx="3452227" cy="2460192"/>
+            <a:chOff x="8522058" y="4567826"/>
+            <a:chExt cx="3452227" cy="2460192"/>
+          </a:xfrm>
+        </p:grpSpPr>
+        <p:pic>
+          <p:nvPicPr>
+            <p:cNvPr id="19" name="Picture 18" descr="Screenshot of a MiniGrid environment: a dark grid world with the agent (a red triangle), a green key, a ball, a door in the wall and a yellow goal box.">
+              <a:extLst>
+                <a:ext uri="{FF2B5EF4-FFF2-40B4-BE49-F238E27FC236}">
+                  <a16:creationId xmlns:a16="http://schemas.microsoft.com/office/drawing/2014/main" id="{3DFD1FF3-C329-F0CF-1174-2F80AA5EF81F}"/>
+                </a:ext>
+              </a:extLst>
+            </p:cNvPr>
+            <p:cNvPicPr>
+              <a:picLocks noChangeAspect="1"/>
+            </p:cNvPicPr>
+            <p:nvPr/>
+          </p:nvPicPr>
+          <p:blipFill>
+            <a:blip r:embed="rId6"/>
+            <a:stretch>
+              <a:fillRect/>
+            </a:stretch>
+          </p:blipFill>
+          <p:spPr>
+            <a:xfrm>
+              <a:off x="8628426" y="4567826"/>
+              <a:ext cx="2839963" cy="1629195"/>
+            </a:xfrm>
+            <a:prstGeom prst="rect">
+              <a:avLst/>
+            </a:prstGeom>
+          </p:spPr>
+        </p:pic>
+        <p:sp>
+          <p:nvSpPr>
+            <p:cNvPr id="22" name="TextBox 21">
+              <a:extLst>
+                <a:ext uri="{FF2B5EF4-FFF2-40B4-BE49-F238E27FC236}">
+                  <a16:creationId xmlns:a16="http://schemas.microsoft.com/office/drawing/2014/main" id="{DB391B1B-9FC2-9F77-44C3-CE049FE794EE}"/>
+                </a:ext>
+              </a:extLst>
+            </p:cNvPr>
+            <p:cNvSpPr txBox="1"/>
+            <p:nvPr/>
+          </p:nvSpPr>
+          <p:spPr>
+            <a:xfrm>
+              <a:off x="8522058" y="6197021"/>
+              <a:ext cx="3452227" cy="830997"/>
+            </a:xfrm>
+            <a:prstGeom prst="rect">
+              <a:avLst/>
+            </a:prstGeom>
+            <a:noFill/>
+          </p:spPr>
+          <p:txBody>
+            <a:bodyPr wrap="square" rtlCol="0">
+              <a:spAutoFit/>
+            </a:bodyPr>
+            <a:lstStyle/>
+            <a:p>
+              <a:r>
+                <a:rPr lang="en-US" sz="1600" dirty="0"/>
+                <a:t>Milestones: </a:t>
+              </a:r>
+            </a:p>
+            <a:p>
+              <a:r>
+                <a:rPr lang="en-US" sz="1600" dirty="0"/>
+                <a:t>Picking up the key, opening the door.</a:t>
+              </a:r>
+            </a:p>
+            <a:p>
+              <a:endParaRPr lang="en-US" sz="1600" dirty="0"/>
+            </a:p>
+          </p:txBody>
+        </p:sp>
       </p:grpSp>
     </p:spTree>
     <p:extLst>

--- a/slides/Lecture_Reward_Engineering.pptx
+++ b/slides/Lecture_Reward_Engineering.pptx
@@ -5,7 +5,7 @@
     <p:sldMasterId id="2147483648" r:id="rId1"/>
   </p:sldMasterIdLst>
   <p:notesMasterIdLst>
-    <p:notesMasterId r:id="rId17"/>
+    <p:notesMasterId r:id="rId18"/>
   </p:notesMasterIdLst>
   <p:sldIdLst>
     <p:sldId id="256" r:id="rId2"/>
@@ -18,11 +18,12 @@
     <p:sldId id="483" r:id="rId9"/>
     <p:sldId id="484" r:id="rId10"/>
     <p:sldId id="486" r:id="rId11"/>
-    <p:sldId id="493" r:id="rId12"/>
-    <p:sldId id="489" r:id="rId13"/>
-    <p:sldId id="485" r:id="rId14"/>
-    <p:sldId id="490" r:id="rId15"/>
-    <p:sldId id="400" r:id="rId16"/>
+    <p:sldId id="494" r:id="rId12"/>
+    <p:sldId id="493" r:id="rId13"/>
+    <p:sldId id="489" r:id="rId14"/>
+    <p:sldId id="485" r:id="rId15"/>
+    <p:sldId id="490" r:id="rId16"/>
+    <p:sldId id="400" r:id="rId17"/>
   </p:sldIdLst>
   <p:sldSz cx="12192000" cy="6858000"/>
   <p:notesSz cx="6858000" cy="9144000"/>
@@ -144,6 +145,7 @@
             <p14:sldId id="483"/>
             <p14:sldId id="484"/>
             <p14:sldId id="486"/>
+            <p14:sldId id="494"/>
           </p14:sldIdLst>
         </p14:section>
         <p14:section name="Related Techniques" id="{DD4220DD-3082-42D2-BCED-46D36CEB56B2}">
@@ -2824,7 +2826,7 @@
           <a:p>
             <a:fld id="{2A92B22A-BE2A-43CB-B312-FF3A0A14567B}" type="datetimeFigureOut">
               <a:rPr lang="en-US" smtClean="0"/>
-              <a:t>10/15/26</a:t>
+              <a:t>10/23/2026</a:t>
             </a:fld>
             <a:endParaRPr lang="en-US"/>
           </a:p>
@@ -3238,7 +3240,7 @@
           <a:p>
             <a:fld id="{3E22BF2E-04DA-469E-97C5-BB68A0368813}" type="datetimeFigureOut">
               <a:rPr lang="en-US" smtClean="0"/>
-              <a:t>10/15/26</a:t>
+              <a:t>10/23/2026</a:t>
             </a:fld>
             <a:endParaRPr lang="en-US"/>
           </a:p>
@@ -3436,7 +3438,7 @@
           <a:p>
             <a:fld id="{3E22BF2E-04DA-469E-97C5-BB68A0368813}" type="datetimeFigureOut">
               <a:rPr lang="en-US" smtClean="0"/>
-              <a:t>10/15/26</a:t>
+              <a:t>10/23/2026</a:t>
             </a:fld>
             <a:endParaRPr lang="en-US"/>
           </a:p>
@@ -3644,7 +3646,7 @@
           <a:p>
             <a:fld id="{3E22BF2E-04DA-469E-97C5-BB68A0368813}" type="datetimeFigureOut">
               <a:rPr lang="en-US" smtClean="0"/>
-              <a:t>10/15/26</a:t>
+              <a:t>10/23/2026</a:t>
             </a:fld>
             <a:endParaRPr lang="en-US"/>
           </a:p>
@@ -3852,7 +3854,7 @@
           <a:p>
             <a:fld id="{3E22BF2E-04DA-469E-97C5-BB68A0368813}" type="datetimeFigureOut">
               <a:rPr lang="en-US" smtClean="0"/>
-              <a:t>10/15/26</a:t>
+              <a:t>10/23/2026</a:t>
             </a:fld>
             <a:endParaRPr lang="en-US"/>
           </a:p>
@@ -4127,7 +4129,7 @@
           <a:p>
             <a:fld id="{3E22BF2E-04DA-469E-97C5-BB68A0368813}" type="datetimeFigureOut">
               <a:rPr lang="en-US" smtClean="0"/>
-              <a:t>10/15/26</a:t>
+              <a:t>10/23/2026</a:t>
             </a:fld>
             <a:endParaRPr lang="en-US"/>
           </a:p>
@@ -4392,7 +4394,7 @@
           <a:p>
             <a:fld id="{3E22BF2E-04DA-469E-97C5-BB68A0368813}" type="datetimeFigureOut">
               <a:rPr lang="en-US" smtClean="0"/>
-              <a:t>10/15/26</a:t>
+              <a:t>10/23/2026</a:t>
             </a:fld>
             <a:endParaRPr lang="en-US"/>
           </a:p>
@@ -4804,7 +4806,7 @@
           <a:p>
             <a:fld id="{3E22BF2E-04DA-469E-97C5-BB68A0368813}" type="datetimeFigureOut">
               <a:rPr lang="en-US" smtClean="0"/>
-              <a:t>10/15/26</a:t>
+              <a:t>10/23/2026</a:t>
             </a:fld>
             <a:endParaRPr lang="en-US"/>
           </a:p>
@@ -4945,7 +4947,7 @@
           <a:p>
             <a:fld id="{3E22BF2E-04DA-469E-97C5-BB68A0368813}" type="datetimeFigureOut">
               <a:rPr lang="en-US" smtClean="0"/>
-              <a:t>10/15/26</a:t>
+              <a:t>10/23/2026</a:t>
             </a:fld>
             <a:endParaRPr lang="en-US"/>
           </a:p>
@@ -5058,7 +5060,7 @@
           <a:p>
             <a:fld id="{3E22BF2E-04DA-469E-97C5-BB68A0368813}" type="datetimeFigureOut">
               <a:rPr lang="en-US" smtClean="0"/>
-              <a:t>10/15/26</a:t>
+              <a:t>10/23/2026</a:t>
             </a:fld>
             <a:endParaRPr lang="en-US"/>
           </a:p>
@@ -5369,7 +5371,7 @@
           <a:p>
             <a:fld id="{3E22BF2E-04DA-469E-97C5-BB68A0368813}" type="datetimeFigureOut">
               <a:rPr lang="en-US" smtClean="0"/>
-              <a:t>10/15/26</a:t>
+              <a:t>10/23/2026</a:t>
             </a:fld>
             <a:endParaRPr lang="en-US"/>
           </a:p>
@@ -5657,7 +5659,7 @@
           <a:p>
             <a:fld id="{3E22BF2E-04DA-469E-97C5-BB68A0368813}" type="datetimeFigureOut">
               <a:rPr lang="en-US" smtClean="0"/>
-              <a:t>10/15/26</a:t>
+              <a:t>10/23/2026</a:t>
             </a:fld>
             <a:endParaRPr lang="en-US"/>
           </a:p>
@@ -5898,7 +5900,7 @@
           <a:p>
             <a:fld id="{3E22BF2E-04DA-469E-97C5-BB68A0368813}" type="datetimeFigureOut">
               <a:rPr lang="en-US" smtClean="0"/>
-              <a:t>10/15/26</a:t>
+              <a:t>10/23/2026</a:t>
             </a:fld>
             <a:endParaRPr lang="en-US"/>
           </a:p>
@@ -8149,6 +8151,132 @@
 <file path=ppt/slides/slide11.xml><?xml version="1.0" encoding="utf-8"?>
 <p:sld xmlns:a="http://schemas.openxmlformats.org/drawingml/2006/main" xmlns:r="http://schemas.openxmlformats.org/officeDocument/2006/relationships" xmlns:p="http://schemas.openxmlformats.org/presentationml/2006/main">
   <p:cSld>
+    <p:spTree>
+      <p:nvGrpSpPr>
+        <p:cNvPr id="1" name=""/>
+        <p:cNvGrpSpPr/>
+        <p:nvPr/>
+      </p:nvGrpSpPr>
+      <p:grpSpPr>
+        <a:xfrm>
+          <a:off x="0" y="0"/>
+          <a:ext cx="0" cy="0"/>
+          <a:chOff x="0" y="0"/>
+          <a:chExt cx="0" cy="0"/>
+        </a:xfrm>
+      </p:grpSpPr>
+      <p:sp>
+        <p:nvSpPr>
+          <p:cNvPr id="4" name="Title 3">
+            <a:extLst>
+              <a:ext uri="{FF2B5EF4-FFF2-40B4-BE49-F238E27FC236}">
+                <a16:creationId xmlns:a16="http://schemas.microsoft.com/office/drawing/2014/main" id="{24CD2877-1046-6123-CF1E-BE9F2D8536CB}"/>
+              </a:ext>
+            </a:extLst>
+          </p:cNvPr>
+          <p:cNvSpPr>
+            <a:spLocks noGrp="1"/>
+          </p:cNvSpPr>
+          <p:nvPr>
+            <p:ph type="title"/>
+          </p:nvPr>
+        </p:nvSpPr>
+        <p:spPr>
+          <a:xfrm>
+            <a:off x="1105486" y="2766218"/>
+            <a:ext cx="10515600" cy="1168047"/>
+          </a:xfrm>
+        </p:spPr>
+        <p:txBody>
+          <a:bodyPr>
+            <a:normAutofit fontScale="90000"/>
+          </a:bodyPr>
+          <a:lstStyle/>
+          <a:p>
+            <a:r>
+              <a:rPr lang="en-US" b="1" dirty="0"/>
+              <a:t>Code </a:t>
+            </a:r>
+            <a:r>
+              <a:rPr lang="en-US" b="1"/>
+              <a:t>example</a:t>
+            </a:r>
+            <a:r>
+              <a:rPr lang="en-US"/>
+              <a:t>: </a:t>
+            </a:r>
+            <a:br>
+              <a:rPr lang="en-US"/>
+            </a:br>
+            <a:r>
+              <a:rPr lang="en-US"/>
+              <a:t>Comparing Reward Engineering Methods</a:t>
+            </a:r>
+            <a:endParaRPr lang="en-US" dirty="0"/>
+          </a:p>
+        </p:txBody>
+      </p:sp>
+      <p:sp>
+        <p:nvSpPr>
+          <p:cNvPr id="5" name="TextBox 4">
+            <a:extLst>
+              <a:ext uri="{FF2B5EF4-FFF2-40B4-BE49-F238E27FC236}">
+                <a16:creationId xmlns:a16="http://schemas.microsoft.com/office/drawing/2014/main" id="{5AA484FF-058C-4694-424C-0B3B26DF9F45}"/>
+              </a:ext>
+            </a:extLst>
+          </p:cNvPr>
+          <p:cNvSpPr txBox="1"/>
+          <p:nvPr/>
+        </p:nvSpPr>
+        <p:spPr>
+          <a:xfrm>
+            <a:off x="1191065" y="6011594"/>
+            <a:ext cx="8811064" cy="307777"/>
+          </a:xfrm>
+          <a:prstGeom prst="rect">
+            <a:avLst/>
+          </a:prstGeom>
+          <a:noFill/>
+        </p:spPr>
+        <p:txBody>
+          <a:bodyPr wrap="square" rtlCol="0">
+            <a:spAutoFit/>
+          </a:bodyPr>
+          <a:lstStyle/>
+          <a:p>
+            <a:r>
+              <a:rPr lang="en-US" sz="1400" dirty="0"/>
+              <a:t>See Code on </a:t>
+            </a:r>
+            <a:r>
+              <a:rPr lang="en-US" sz="1400" dirty="0">
+                <a:hlinkClick r:id="rId2"/>
+              </a:rPr>
+              <a:t>https://michael.hahsler.net/Introduction_to_Reinforcement_Learning/</a:t>
+            </a:r>
+            <a:r>
+              <a:rPr lang="en-US" sz="1400" dirty="0"/>
+              <a:t> </a:t>
+            </a:r>
+          </a:p>
+        </p:txBody>
+      </p:sp>
+    </p:spTree>
+    <p:extLst>
+      <p:ext uri="{BB962C8B-B14F-4D97-AF65-F5344CB8AC3E}">
+        <p14:creationId xmlns:p14="http://schemas.microsoft.com/office/powerpoint/2010/main" val="190193640"/>
+      </p:ext>
+    </p:extLst>
+  </p:cSld>
+  <p:clrMapOvr>
+    <a:masterClrMapping/>
+  </p:clrMapOvr>
+</p:sld>
+</file>
+
+<file path=ppt/slides/slide12.xml><?xml version="1.0" encoding="utf-8"?>
+<p:sld xmlns:a="http://schemas.openxmlformats.org/drawingml/2006/main" xmlns:r="http://schemas.openxmlformats.org/officeDocument/2006/relationships" xmlns:p="http://schemas.openxmlformats.org/presentationml/2006/main">
+  <p:cSld>
     <p:bg>
       <p:bgPr>
         <a:solidFill>
@@ -8402,7 +8530,7 @@
 </p:sld>
 </file>
 
-<file path=ppt/slides/slide12.xml><?xml version="1.0" encoding="utf-8"?>
+<file path=ppt/slides/slide13.xml><?xml version="1.0" encoding="utf-8"?>
 <p:sld xmlns:a="http://schemas.openxmlformats.org/drawingml/2006/main" xmlns:r="http://schemas.openxmlformats.org/officeDocument/2006/relationships" xmlns:p="http://schemas.openxmlformats.org/presentationml/2006/main">
   <p:cSld>
     <p:spTree>
@@ -9741,7 +9869,7 @@
 </p:sld>
 </file>
 
-<file path=ppt/slides/slide13.xml><?xml version="1.0" encoding="utf-8"?>
+<file path=ppt/slides/slide14.xml><?xml version="1.0" encoding="utf-8"?>
 <p:sld xmlns:a="http://schemas.openxmlformats.org/drawingml/2006/main" xmlns:r="http://schemas.openxmlformats.org/officeDocument/2006/relationships" xmlns:p="http://schemas.openxmlformats.org/presentationml/2006/main">
   <p:cSld>
     <p:spTree>
@@ -10249,7 +10377,7 @@
 </p:sld>
 </file>
 
-<file path=ppt/slides/slide14.xml><?xml version="1.0" encoding="utf-8"?>
+<file path=ppt/slides/slide15.xml><?xml version="1.0" encoding="utf-8"?>
 <p:sld xmlns:a="http://schemas.openxmlformats.org/drawingml/2006/main" xmlns:r="http://schemas.openxmlformats.org/officeDocument/2006/relationships" xmlns:p="http://schemas.openxmlformats.org/presentationml/2006/main">
   <p:cSld>
     <p:spTree>
@@ -10679,7 +10807,7 @@
 </p:sld>
 </file>
 
-<file path=ppt/slides/slide15.xml><?xml version="1.0" encoding="utf-8"?>
+<file path=ppt/slides/slide16.xml><?xml version="1.0" encoding="utf-8"?>
 <p:sld xmlns:a="http://schemas.openxmlformats.org/drawingml/2006/main" xmlns:r="http://schemas.openxmlformats.org/officeDocument/2006/relationships" xmlns:p="http://schemas.openxmlformats.org/presentationml/2006/main">
   <p:cSld>
     <p:bg>
